--- a/lectures/lecture10.pptx
+++ b/lectures/lecture10.pptx
@@ -5,36 +5,36 @@
     <p:sldMasterId id="2147483648" r:id="rId1"/>
   </p:sldMasterIdLst>
   <p:sldIdLst>
-    <p:sldId id="256" r:id="rId7"/>
-    <p:sldId id="257" r:id="rId8"/>
-    <p:sldId id="258" r:id="rId9"/>
-    <p:sldId id="259" r:id="rId10"/>
-    <p:sldId id="260" r:id="rId11"/>
-    <p:sldId id="261" r:id="rId12"/>
-    <p:sldId id="262" r:id="rId13"/>
-    <p:sldId id="263" r:id="rId14"/>
-    <p:sldId id="264" r:id="rId15"/>
-    <p:sldId id="265" r:id="rId16"/>
-    <p:sldId id="266" r:id="rId17"/>
-    <p:sldId id="267" r:id="rId18"/>
-    <p:sldId id="268" r:id="rId19"/>
-    <p:sldId id="269" r:id="rId20"/>
-    <p:sldId id="270" r:id="rId21"/>
-    <p:sldId id="271" r:id="rId22"/>
-    <p:sldId id="272" r:id="rId23"/>
-    <p:sldId id="273" r:id="rId24"/>
-    <p:sldId id="274" r:id="rId25"/>
-    <p:sldId id="282" r:id="rId33"/>
-    <p:sldId id="283" r:id="rId34"/>
-    <p:sldId id="275" r:id="rId26"/>
-    <p:sldId id="276" r:id="rId27"/>
-    <p:sldId id="277" r:id="rId28"/>
-    <p:sldId id="278" r:id="rId29"/>
-    <p:sldId id="279" r:id="rId30"/>
-    <p:sldId id="280" r:id="rId31"/>
-    <p:sldId id="281" r:id="rId32"/>
+    <p:sldId id="256" r:id="rId2"/>
+    <p:sldId id="257" r:id="rId3"/>
+    <p:sldId id="258" r:id="rId4"/>
+    <p:sldId id="259" r:id="rId5"/>
+    <p:sldId id="260" r:id="rId6"/>
+    <p:sldId id="261" r:id="rId7"/>
+    <p:sldId id="262" r:id="rId8"/>
+    <p:sldId id="263" r:id="rId9"/>
+    <p:sldId id="264" r:id="rId10"/>
+    <p:sldId id="265" r:id="rId11"/>
+    <p:sldId id="266" r:id="rId12"/>
+    <p:sldId id="267" r:id="rId13"/>
+    <p:sldId id="268" r:id="rId14"/>
+    <p:sldId id="284" r:id="rId15"/>
+    <p:sldId id="285" r:id="rId16"/>
+    <p:sldId id="271" r:id="rId17"/>
+    <p:sldId id="272" r:id="rId18"/>
+    <p:sldId id="273" r:id="rId19"/>
+    <p:sldId id="286" r:id="rId20"/>
+    <p:sldId id="291" r:id="rId21"/>
+    <p:sldId id="290" r:id="rId22"/>
+    <p:sldId id="275" r:id="rId23"/>
+    <p:sldId id="276" r:id="rId24"/>
+    <p:sldId id="277" r:id="rId25"/>
+    <p:sldId id="278" r:id="rId26"/>
+    <p:sldId id="292" r:id="rId27"/>
+    <p:sldId id="280" r:id="rId28"/>
+    <p:sldId id="281" r:id="rId29"/>
   </p:sldIdLst>
-  <p:sldSz cx="9144000" cy="5143500" type="screen4x3"/>
+  <p:sldSz cx="9144000" cy="5143500" type="screen16x9"/>
   <p:notesSz cx="6858000" cy="9144000"/>
   <p:defaultTextStyle>
     <a:defPPr>
@@ -131,6 +131,22 @@
       </a:defRPr>
     </a:lvl9pPr>
   </p:defaultTextStyle>
+  <p:extLst>
+    <p:ext uri="{EFAFB233-063F-42B5-8137-9DF3F51BA10A}">
+      <p15:sldGuideLst xmlns:p15="http://schemas.microsoft.com/office/powerpoint/2012/main">
+        <p15:guide id="1" orient="horz" pos="2160">
+          <p15:clr>
+            <a:srgbClr val="A4A3A4"/>
+          </p15:clr>
+        </p15:guide>
+        <p15:guide id="2" pos="2880">
+          <p15:clr>
+            <a:srgbClr val="A4A3A4"/>
+          </p15:clr>
+        </p15:guide>
+      </p15:sldGuideLst>
+    </p:ext>
+  </p:extLst>
 </p:presentation>
 </file>
 
@@ -172,10 +188,9 @@
           <a:lstStyle/>
           <a:p>
             <a:r>
-              <a:rPr lang="en-US" smtClean="0"/>
+              <a:rPr lang="en-US"/>
               <a:t>Click to edit Master title style</a:t>
             </a:r>
-            <a:endParaRPr lang="en-US"/>
           </a:p>
         </p:txBody>
       </p:sp>
@@ -291,10 +306,9 @@
           </a:lstStyle>
           <a:p>
             <a:r>
-              <a:rPr lang="en-US" smtClean="0"/>
+              <a:rPr lang="en-US"/>
               <a:t>Click to edit Master subtitle style</a:t>
             </a:r>
-            <a:endParaRPr lang="en-US"/>
           </a:p>
         </p:txBody>
       </p:sp>
@@ -315,7 +329,7 @@
           <a:p>
             <a:fld id="{5BCAD085-E8A6-8845-BD4E-CB4CCA059FC4}" type="datetimeFigureOut">
               <a:rPr lang="en-US" smtClean="0"/>
-              <a:t>1/27/13</a:t>
+              <a:t>4/30/26</a:t>
             </a:fld>
             <a:endParaRPr lang="en-US"/>
           </a:p>
@@ -409,10 +423,9 @@
           <a:lstStyle/>
           <a:p>
             <a:r>
-              <a:rPr lang="en-US" smtClean="0"/>
+              <a:rPr lang="en-US"/>
               <a:t>Click to edit Master title style</a:t>
             </a:r>
-            <a:endParaRPr lang="en-US"/>
           </a:p>
         </p:txBody>
       </p:sp>
@@ -433,38 +446,37 @@
           <a:p>
             <a:pPr lvl="0"/>
             <a:r>
-              <a:rPr lang="en-US" smtClean="0"/>
+              <a:rPr lang="en-US"/>
               <a:t>Click to edit Master text styles</a:t>
             </a:r>
           </a:p>
           <a:p>
             <a:pPr lvl="1"/>
             <a:r>
-              <a:rPr lang="en-US" smtClean="0"/>
+              <a:rPr lang="en-US"/>
               <a:t>Second level</a:t>
             </a:r>
           </a:p>
           <a:p>
             <a:pPr lvl="2"/>
             <a:r>
-              <a:rPr lang="en-US" smtClean="0"/>
+              <a:rPr lang="en-US"/>
               <a:t>Third level</a:t>
             </a:r>
           </a:p>
           <a:p>
             <a:pPr lvl="3"/>
             <a:r>
-              <a:rPr lang="en-US" smtClean="0"/>
+              <a:rPr lang="en-US"/>
               <a:t>Fourth level</a:t>
             </a:r>
           </a:p>
           <a:p>
             <a:pPr lvl="4"/>
             <a:r>
-              <a:rPr lang="en-US" smtClean="0"/>
+              <a:rPr lang="en-US"/>
               <a:t>Fifth level</a:t>
             </a:r>
-            <a:endParaRPr lang="en-US"/>
           </a:p>
         </p:txBody>
       </p:sp>
@@ -485,7 +497,7 @@
           <a:p>
             <a:fld id="{5BCAD085-E8A6-8845-BD4E-CB4CCA059FC4}" type="datetimeFigureOut">
               <a:rPr lang="en-US" smtClean="0"/>
-              <a:t>1/27/13</a:t>
+              <a:t>4/30/26</a:t>
             </a:fld>
             <a:endParaRPr lang="en-US"/>
           </a:p>
@@ -584,10 +596,9 @@
           <a:lstStyle/>
           <a:p>
             <a:r>
-              <a:rPr lang="en-US" smtClean="0"/>
+              <a:rPr lang="en-US"/>
               <a:t>Click to edit Master title style</a:t>
             </a:r>
-            <a:endParaRPr lang="en-US"/>
           </a:p>
         </p:txBody>
       </p:sp>
@@ -613,38 +624,37 @@
           <a:p>
             <a:pPr lvl="0"/>
             <a:r>
-              <a:rPr lang="en-US" smtClean="0"/>
+              <a:rPr lang="en-US"/>
               <a:t>Click to edit Master text styles</a:t>
             </a:r>
           </a:p>
           <a:p>
             <a:pPr lvl="1"/>
             <a:r>
-              <a:rPr lang="en-US" smtClean="0"/>
+              <a:rPr lang="en-US"/>
               <a:t>Second level</a:t>
             </a:r>
           </a:p>
           <a:p>
             <a:pPr lvl="2"/>
             <a:r>
-              <a:rPr lang="en-US" smtClean="0"/>
+              <a:rPr lang="en-US"/>
               <a:t>Third level</a:t>
             </a:r>
           </a:p>
           <a:p>
             <a:pPr lvl="3"/>
             <a:r>
-              <a:rPr lang="en-US" smtClean="0"/>
+              <a:rPr lang="en-US"/>
               <a:t>Fourth level</a:t>
             </a:r>
           </a:p>
           <a:p>
             <a:pPr lvl="4"/>
             <a:r>
-              <a:rPr lang="en-US" smtClean="0"/>
+              <a:rPr lang="en-US"/>
               <a:t>Fifth level</a:t>
             </a:r>
-            <a:endParaRPr lang="en-US"/>
           </a:p>
         </p:txBody>
       </p:sp>
@@ -665,7 +675,7 @@
           <a:p>
             <a:fld id="{5BCAD085-E8A6-8845-BD4E-CB4CCA059FC4}" type="datetimeFigureOut">
               <a:rPr lang="en-US" smtClean="0"/>
-              <a:t>1/27/13</a:t>
+              <a:t>4/30/26</a:t>
             </a:fld>
             <a:endParaRPr lang="en-US"/>
           </a:p>
@@ -759,10 +769,9 @@
           <a:lstStyle/>
           <a:p>
             <a:r>
-              <a:rPr lang="en-US" smtClean="0"/>
+              <a:rPr lang="en-US"/>
               <a:t>Click to edit Master title style</a:t>
             </a:r>
-            <a:endParaRPr lang="en-US"/>
           </a:p>
         </p:txBody>
       </p:sp>
@@ -783,38 +792,37 @@
           <a:p>
             <a:pPr lvl="0"/>
             <a:r>
-              <a:rPr lang="en-US" smtClean="0"/>
+              <a:rPr lang="en-US"/>
               <a:t>Click to edit Master text styles</a:t>
             </a:r>
           </a:p>
           <a:p>
             <a:pPr lvl="1"/>
             <a:r>
-              <a:rPr lang="en-US" smtClean="0"/>
+              <a:rPr lang="en-US"/>
               <a:t>Second level</a:t>
             </a:r>
           </a:p>
           <a:p>
             <a:pPr lvl="2"/>
             <a:r>
-              <a:rPr lang="en-US" smtClean="0"/>
+              <a:rPr lang="en-US"/>
               <a:t>Third level</a:t>
             </a:r>
           </a:p>
           <a:p>
             <a:pPr lvl="3"/>
             <a:r>
-              <a:rPr lang="en-US" smtClean="0"/>
+              <a:rPr lang="en-US"/>
               <a:t>Fourth level</a:t>
             </a:r>
           </a:p>
           <a:p>
             <a:pPr lvl="4"/>
             <a:r>
-              <a:rPr lang="en-US" smtClean="0"/>
+              <a:rPr lang="en-US"/>
               <a:t>Fifth level</a:t>
             </a:r>
-            <a:endParaRPr lang="en-US"/>
           </a:p>
         </p:txBody>
       </p:sp>
@@ -835,7 +843,7 @@
           <a:p>
             <a:fld id="{5BCAD085-E8A6-8845-BD4E-CB4CCA059FC4}" type="datetimeFigureOut">
               <a:rPr lang="en-US" smtClean="0"/>
-              <a:t>1/27/13</a:t>
+              <a:t>4/30/26</a:t>
             </a:fld>
             <a:endParaRPr lang="en-US"/>
           </a:p>
@@ -938,10 +946,9 @@
           </a:lstStyle>
           <a:p>
             <a:r>
-              <a:rPr lang="en-US" smtClean="0"/>
+              <a:rPr lang="en-US"/>
               <a:t>Click to edit Master title style</a:t>
             </a:r>
-            <a:endParaRPr lang="en-US"/>
           </a:p>
         </p:txBody>
       </p:sp>
@@ -1058,7 +1065,7 @@
           <a:p>
             <a:pPr lvl="0"/>
             <a:r>
-              <a:rPr lang="en-US" smtClean="0"/>
+              <a:rPr lang="en-US"/>
               <a:t>Click to edit Master text styles</a:t>
             </a:r>
           </a:p>
@@ -1081,7 +1088,7 @@
           <a:p>
             <a:fld id="{5BCAD085-E8A6-8845-BD4E-CB4CCA059FC4}" type="datetimeFigureOut">
               <a:rPr lang="en-US" smtClean="0"/>
-              <a:t>1/27/13</a:t>
+              <a:t>4/30/26</a:t>
             </a:fld>
             <a:endParaRPr lang="en-US"/>
           </a:p>
@@ -1175,10 +1182,9 @@
           <a:lstStyle/>
           <a:p>
             <a:r>
-              <a:rPr lang="en-US" smtClean="0"/>
+              <a:rPr lang="en-US"/>
               <a:t>Click to edit Master title style</a:t>
             </a:r>
-            <a:endParaRPr lang="en-US"/>
           </a:p>
         </p:txBody>
       </p:sp>
@@ -1232,38 +1238,37 @@
           <a:p>
             <a:pPr lvl="0"/>
             <a:r>
-              <a:rPr lang="en-US" smtClean="0"/>
+              <a:rPr lang="en-US"/>
               <a:t>Click to edit Master text styles</a:t>
             </a:r>
           </a:p>
           <a:p>
             <a:pPr lvl="1"/>
             <a:r>
-              <a:rPr lang="en-US" smtClean="0"/>
+              <a:rPr lang="en-US"/>
               <a:t>Second level</a:t>
             </a:r>
           </a:p>
           <a:p>
             <a:pPr lvl="2"/>
             <a:r>
-              <a:rPr lang="en-US" smtClean="0"/>
+              <a:rPr lang="en-US"/>
               <a:t>Third level</a:t>
             </a:r>
           </a:p>
           <a:p>
             <a:pPr lvl="3"/>
             <a:r>
-              <a:rPr lang="en-US" smtClean="0"/>
+              <a:rPr lang="en-US"/>
               <a:t>Fourth level</a:t>
             </a:r>
           </a:p>
           <a:p>
             <a:pPr lvl="4"/>
             <a:r>
-              <a:rPr lang="en-US" smtClean="0"/>
+              <a:rPr lang="en-US"/>
               <a:t>Fifth level</a:t>
             </a:r>
-            <a:endParaRPr lang="en-US"/>
           </a:p>
         </p:txBody>
       </p:sp>
@@ -1317,38 +1322,37 @@
           <a:p>
             <a:pPr lvl="0"/>
             <a:r>
-              <a:rPr lang="en-US" smtClean="0"/>
+              <a:rPr lang="en-US"/>
               <a:t>Click to edit Master text styles</a:t>
             </a:r>
           </a:p>
           <a:p>
             <a:pPr lvl="1"/>
             <a:r>
-              <a:rPr lang="en-US" smtClean="0"/>
+              <a:rPr lang="en-US"/>
               <a:t>Second level</a:t>
             </a:r>
           </a:p>
           <a:p>
             <a:pPr lvl="2"/>
             <a:r>
-              <a:rPr lang="en-US" smtClean="0"/>
+              <a:rPr lang="en-US"/>
               <a:t>Third level</a:t>
             </a:r>
           </a:p>
           <a:p>
             <a:pPr lvl="3"/>
             <a:r>
-              <a:rPr lang="en-US" smtClean="0"/>
+              <a:rPr lang="en-US"/>
               <a:t>Fourth level</a:t>
             </a:r>
           </a:p>
           <a:p>
             <a:pPr lvl="4"/>
             <a:r>
-              <a:rPr lang="en-US" smtClean="0"/>
+              <a:rPr lang="en-US"/>
               <a:t>Fifth level</a:t>
             </a:r>
-            <a:endParaRPr lang="en-US"/>
           </a:p>
         </p:txBody>
       </p:sp>
@@ -1369,7 +1373,7 @@
           <a:p>
             <a:fld id="{5BCAD085-E8A6-8845-BD4E-CB4CCA059FC4}" type="datetimeFigureOut">
               <a:rPr lang="en-US" smtClean="0"/>
-              <a:t>1/27/13</a:t>
+              <a:t>4/30/26</a:t>
             </a:fld>
             <a:endParaRPr lang="en-US"/>
           </a:p>
@@ -1467,10 +1471,9 @@
           </a:lstStyle>
           <a:p>
             <a:r>
-              <a:rPr lang="en-US" smtClean="0"/>
+              <a:rPr lang="en-US"/>
               <a:t>Click to edit Master title style</a:t>
             </a:r>
-            <a:endParaRPr lang="en-US"/>
           </a:p>
         </p:txBody>
       </p:sp>
@@ -1533,7 +1536,7 @@
           <a:p>
             <a:pPr lvl="0"/>
             <a:r>
-              <a:rPr lang="en-US" smtClean="0"/>
+              <a:rPr lang="en-US"/>
               <a:t>Click to edit Master text styles</a:t>
             </a:r>
           </a:p>
@@ -1589,38 +1592,37 @@
           <a:p>
             <a:pPr lvl="0"/>
             <a:r>
-              <a:rPr lang="en-US" smtClean="0"/>
+              <a:rPr lang="en-US"/>
               <a:t>Click to edit Master text styles</a:t>
             </a:r>
           </a:p>
           <a:p>
             <a:pPr lvl="1"/>
             <a:r>
-              <a:rPr lang="en-US" smtClean="0"/>
+              <a:rPr lang="en-US"/>
               <a:t>Second level</a:t>
             </a:r>
           </a:p>
           <a:p>
             <a:pPr lvl="2"/>
             <a:r>
-              <a:rPr lang="en-US" smtClean="0"/>
+              <a:rPr lang="en-US"/>
               <a:t>Third level</a:t>
             </a:r>
           </a:p>
           <a:p>
             <a:pPr lvl="3"/>
             <a:r>
-              <a:rPr lang="en-US" smtClean="0"/>
+              <a:rPr lang="en-US"/>
               <a:t>Fourth level</a:t>
             </a:r>
           </a:p>
           <a:p>
             <a:pPr lvl="4"/>
             <a:r>
-              <a:rPr lang="en-US" smtClean="0"/>
+              <a:rPr lang="en-US"/>
               <a:t>Fifth level</a:t>
             </a:r>
-            <a:endParaRPr lang="en-US"/>
           </a:p>
         </p:txBody>
       </p:sp>
@@ -1683,7 +1685,7 @@
           <a:p>
             <a:pPr lvl="0"/>
             <a:r>
-              <a:rPr lang="en-US" smtClean="0"/>
+              <a:rPr lang="en-US"/>
               <a:t>Click to edit Master text styles</a:t>
             </a:r>
           </a:p>
@@ -1739,38 +1741,37 @@
           <a:p>
             <a:pPr lvl="0"/>
             <a:r>
-              <a:rPr lang="en-US" smtClean="0"/>
+              <a:rPr lang="en-US"/>
               <a:t>Click to edit Master text styles</a:t>
             </a:r>
           </a:p>
           <a:p>
             <a:pPr lvl="1"/>
             <a:r>
-              <a:rPr lang="en-US" smtClean="0"/>
+              <a:rPr lang="en-US"/>
               <a:t>Second level</a:t>
             </a:r>
           </a:p>
           <a:p>
             <a:pPr lvl="2"/>
             <a:r>
-              <a:rPr lang="en-US" smtClean="0"/>
+              <a:rPr lang="en-US"/>
               <a:t>Third level</a:t>
             </a:r>
           </a:p>
           <a:p>
             <a:pPr lvl="3"/>
             <a:r>
-              <a:rPr lang="en-US" smtClean="0"/>
+              <a:rPr lang="en-US"/>
               <a:t>Fourth level</a:t>
             </a:r>
           </a:p>
           <a:p>
             <a:pPr lvl="4"/>
             <a:r>
-              <a:rPr lang="en-US" smtClean="0"/>
+              <a:rPr lang="en-US"/>
               <a:t>Fifth level</a:t>
             </a:r>
-            <a:endParaRPr lang="en-US"/>
           </a:p>
         </p:txBody>
       </p:sp>
@@ -1791,7 +1792,7 @@
           <a:p>
             <a:fld id="{5BCAD085-E8A6-8845-BD4E-CB4CCA059FC4}" type="datetimeFigureOut">
               <a:rPr lang="en-US" smtClean="0"/>
-              <a:t>1/27/13</a:t>
+              <a:t>4/30/26</a:t>
             </a:fld>
             <a:endParaRPr lang="en-US"/>
           </a:p>
@@ -1885,10 +1886,9 @@
           <a:lstStyle/>
           <a:p>
             <a:r>
-              <a:rPr lang="en-US" smtClean="0"/>
+              <a:rPr lang="en-US"/>
               <a:t>Click to edit Master title style</a:t>
             </a:r>
-            <a:endParaRPr lang="en-US"/>
           </a:p>
         </p:txBody>
       </p:sp>
@@ -1909,7 +1909,7 @@
           <a:p>
             <a:fld id="{5BCAD085-E8A6-8845-BD4E-CB4CCA059FC4}" type="datetimeFigureOut">
               <a:rPr lang="en-US" smtClean="0"/>
-              <a:t>1/27/13</a:t>
+              <a:t>4/30/26</a:t>
             </a:fld>
             <a:endParaRPr lang="en-US"/>
           </a:p>
@@ -2004,7 +2004,7 @@
           <a:p>
             <a:fld id="{5BCAD085-E8A6-8845-BD4E-CB4CCA059FC4}" type="datetimeFigureOut">
               <a:rPr lang="en-US" smtClean="0"/>
-              <a:t>1/27/13</a:t>
+              <a:t>4/30/26</a:t>
             </a:fld>
             <a:endParaRPr lang="en-US"/>
           </a:p>
@@ -2107,10 +2107,9 @@
           </a:lstStyle>
           <a:p>
             <a:r>
-              <a:rPr lang="en-US" smtClean="0"/>
+              <a:rPr lang="en-US"/>
               <a:t>Click to edit Master title style</a:t>
             </a:r>
-            <a:endParaRPr lang="en-US"/>
           </a:p>
         </p:txBody>
       </p:sp>
@@ -2164,38 +2163,37 @@
           <a:p>
             <a:pPr lvl="0"/>
             <a:r>
-              <a:rPr lang="en-US" smtClean="0"/>
+              <a:rPr lang="en-US"/>
               <a:t>Click to edit Master text styles</a:t>
             </a:r>
           </a:p>
           <a:p>
             <a:pPr lvl="1"/>
             <a:r>
-              <a:rPr lang="en-US" smtClean="0"/>
+              <a:rPr lang="en-US"/>
               <a:t>Second level</a:t>
             </a:r>
           </a:p>
           <a:p>
             <a:pPr lvl="2"/>
             <a:r>
-              <a:rPr lang="en-US" smtClean="0"/>
+              <a:rPr lang="en-US"/>
               <a:t>Third level</a:t>
             </a:r>
           </a:p>
           <a:p>
             <a:pPr lvl="3"/>
             <a:r>
-              <a:rPr lang="en-US" smtClean="0"/>
+              <a:rPr lang="en-US"/>
               <a:t>Fourth level</a:t>
             </a:r>
           </a:p>
           <a:p>
             <a:pPr lvl="4"/>
             <a:r>
-              <a:rPr lang="en-US" smtClean="0"/>
+              <a:rPr lang="en-US"/>
               <a:t>Fifth level</a:t>
             </a:r>
-            <a:endParaRPr lang="en-US"/>
           </a:p>
         </p:txBody>
       </p:sp>
@@ -2258,7 +2256,7 @@
           <a:p>
             <a:pPr lvl="0"/>
             <a:r>
-              <a:rPr lang="en-US" smtClean="0"/>
+              <a:rPr lang="en-US"/>
               <a:t>Click to edit Master text styles</a:t>
             </a:r>
           </a:p>
@@ -2281,7 +2279,7 @@
           <a:p>
             <a:fld id="{5BCAD085-E8A6-8845-BD4E-CB4CCA059FC4}" type="datetimeFigureOut">
               <a:rPr lang="en-US" smtClean="0"/>
-              <a:t>1/27/13</a:t>
+              <a:t>4/30/26</a:t>
             </a:fld>
             <a:endParaRPr lang="en-US"/>
           </a:p>
@@ -2384,10 +2382,9 @@
           </a:lstStyle>
           <a:p>
             <a:r>
-              <a:rPr lang="en-US" smtClean="0"/>
+              <a:rPr lang="en-US"/>
               <a:t>Click to edit Master title style</a:t>
             </a:r>
-            <a:endParaRPr lang="en-US"/>
           </a:p>
         </p:txBody>
       </p:sp>
@@ -2511,7 +2508,7 @@
           <a:p>
             <a:pPr lvl="0"/>
             <a:r>
-              <a:rPr lang="en-US" smtClean="0"/>
+              <a:rPr lang="en-US"/>
               <a:t>Click to edit Master text styles</a:t>
             </a:r>
           </a:p>
@@ -2534,7 +2531,7 @@
           <a:p>
             <a:fld id="{5BCAD085-E8A6-8845-BD4E-CB4CCA059FC4}" type="datetimeFigureOut">
               <a:rPr lang="en-US" smtClean="0"/>
-              <a:t>1/27/13</a:t>
+              <a:t>4/30/26</a:t>
             </a:fld>
             <a:endParaRPr lang="en-US"/>
           </a:p>
@@ -2643,10 +2640,9 @@
           <a:lstStyle/>
           <a:p>
             <a:r>
-              <a:rPr lang="en-US" smtClean="0"/>
+              <a:rPr lang="en-US"/>
               <a:t>Click to edit Master title style</a:t>
             </a:r>
-            <a:endParaRPr lang="en-US"/>
           </a:p>
         </p:txBody>
       </p:sp>
@@ -2677,38 +2673,37 @@
           <a:p>
             <a:pPr lvl="0"/>
             <a:r>
-              <a:rPr lang="en-US" smtClean="0"/>
+              <a:rPr lang="en-US"/>
               <a:t>Click to edit Master text styles</a:t>
             </a:r>
           </a:p>
           <a:p>
             <a:pPr lvl="1"/>
             <a:r>
-              <a:rPr lang="en-US" smtClean="0"/>
+              <a:rPr lang="en-US"/>
               <a:t>Second level</a:t>
             </a:r>
           </a:p>
           <a:p>
             <a:pPr lvl="2"/>
             <a:r>
-              <a:rPr lang="en-US" smtClean="0"/>
+              <a:rPr lang="en-US"/>
               <a:t>Third level</a:t>
             </a:r>
           </a:p>
           <a:p>
             <a:pPr lvl="3"/>
             <a:r>
-              <a:rPr lang="en-US" smtClean="0"/>
+              <a:rPr lang="en-US"/>
               <a:t>Fourth level</a:t>
             </a:r>
           </a:p>
           <a:p>
             <a:pPr lvl="4"/>
             <a:r>
-              <a:rPr lang="en-US" smtClean="0"/>
+              <a:rPr lang="en-US"/>
               <a:t>Fifth level</a:t>
             </a:r>
-            <a:endParaRPr lang="en-US"/>
           </a:p>
         </p:txBody>
       </p:sp>
@@ -2747,7 +2742,7 @@
           <a:p>
             <a:fld id="{5BCAD085-E8A6-8845-BD4E-CB4CCA059FC4}" type="datetimeFigureOut">
               <a:rPr lang="en-US" smtClean="0"/>
-              <a:t>1/27/13</a:t>
+              <a:t>4/30/26</a:t>
             </a:fld>
             <a:endParaRPr lang="en-US"/>
           </a:p>
@@ -3106,7 +3101,7 @@
 </file>
 
 <file path=ppt/slides/slide1.xml><?xml version="1.0" encoding="utf-8"?>
-<p:sld xmlns:a="http://schemas.openxmlformats.org/drawingml/2006/main" xmlns:p="http://schemas.openxmlformats.org/presentationml/2006/main" xmlns:r="http://schemas.openxmlformats.org/officeDocument/2006/relationships">
+<p:sld xmlns:a="http://schemas.openxmlformats.org/drawingml/2006/main" xmlns:r="http://schemas.openxmlformats.org/officeDocument/2006/relationships" xmlns:p="http://schemas.openxmlformats.org/presentationml/2006/main">
   <p:cSld>
     <p:spTree>
       <p:nvGrpSpPr>
@@ -3114,7 +3109,14 @@
         <p:cNvGrpSpPr/>
         <p:nvPr/>
       </p:nvGrpSpPr>
-      <p:grpSpPr/>
+      <p:grpSpPr>
+        <a:xfrm>
+          <a:off x="0" y="0"/>
+          <a:ext cx="0" cy="0"/>
+          <a:chOff x="0" y="0"/>
+          <a:chExt cx="0" cy="0"/>
+        </a:xfrm>
+      </p:grpSpPr>
       <p:sp>
         <p:nvSpPr>
           <p:cNvPr id="2" name="TextBox 1"/>
@@ -3323,7 +3325,7 @@
 </file>
 
 <file path=ppt/slides/slide10.xml><?xml version="1.0" encoding="utf-8"?>
-<p:sld xmlns:a="http://schemas.openxmlformats.org/drawingml/2006/main" xmlns:p="http://schemas.openxmlformats.org/presentationml/2006/main" xmlns:r="http://schemas.openxmlformats.org/officeDocument/2006/relationships">
+<p:sld xmlns:a="http://schemas.openxmlformats.org/drawingml/2006/main" xmlns:r="http://schemas.openxmlformats.org/officeDocument/2006/relationships" xmlns:p="http://schemas.openxmlformats.org/presentationml/2006/main">
   <p:cSld>
     <p:spTree>
       <p:nvGrpSpPr>
@@ -3331,7 +3333,14 @@
         <p:cNvGrpSpPr/>
         <p:nvPr/>
       </p:nvGrpSpPr>
-      <p:grpSpPr/>
+      <p:grpSpPr>
+        <a:xfrm>
+          <a:off x="0" y="0"/>
+          <a:ext cx="0" cy="0"/>
+          <a:chOff x="0" y="0"/>
+          <a:chExt cx="0" cy="0"/>
+        </a:xfrm>
+      </p:grpSpPr>
       <p:sp>
         <p:nvSpPr>
           <p:cNvPr id="2" name="TextBox 1"/>
@@ -3557,6 +3566,7 @@
                 <a:latin typeface="Trebuchet MS"/>
               </a:defRPr>
             </a:pPr>
+            <a:endParaRPr/>
           </a:p>
           <a:p>
             <a:pPr algn="l">
@@ -3618,6 +3628,7 @@
                 <a:latin typeface="Trebuchet MS"/>
               </a:defRPr>
             </a:pPr>
+            <a:endParaRPr/>
           </a:p>
           <a:p>
             <a:pPr algn="l">
@@ -3679,6 +3690,7 @@
                 <a:latin typeface="Trebuchet MS"/>
               </a:defRPr>
             </a:pPr>
+            <a:endParaRPr/>
           </a:p>
           <a:p>
             <a:pPr algn="l">
@@ -3724,6 +3736,7 @@
                 <a:latin typeface="Trebuchet MS"/>
               </a:defRPr>
             </a:pPr>
+            <a:endParaRPr/>
           </a:p>
           <a:p>
             <a:pPr algn="l">
@@ -3752,7 +3765,7 @@
 </file>
 
 <file path=ppt/slides/slide11.xml><?xml version="1.0" encoding="utf-8"?>
-<p:sld xmlns:a="http://schemas.openxmlformats.org/drawingml/2006/main" xmlns:p="http://schemas.openxmlformats.org/presentationml/2006/main" xmlns:r="http://schemas.openxmlformats.org/officeDocument/2006/relationships">
+<p:sld xmlns:a="http://schemas.openxmlformats.org/drawingml/2006/main" xmlns:r="http://schemas.openxmlformats.org/officeDocument/2006/relationships" xmlns:p="http://schemas.openxmlformats.org/presentationml/2006/main">
   <p:cSld>
     <p:spTree>
       <p:nvGrpSpPr>
@@ -3760,7 +3773,14 @@
         <p:cNvGrpSpPr/>
         <p:nvPr/>
       </p:nvGrpSpPr>
-      <p:grpSpPr/>
+      <p:grpSpPr>
+        <a:xfrm>
+          <a:off x="0" y="0"/>
+          <a:ext cx="0" cy="0"/>
+          <a:chOff x="0" y="0"/>
+          <a:chExt cx="0" cy="0"/>
+        </a:xfrm>
+      </p:grpSpPr>
       <p:sp>
         <p:nvSpPr>
           <p:cNvPr id="2" name="TextBox 1"/>
@@ -3954,6 +3974,7 @@
                 <a:latin typeface="Trebuchet MS"/>
               </a:defRPr>
             </a:pPr>
+            <a:endParaRPr/>
           </a:p>
           <a:p>
             <a:pPr algn="l">
@@ -4015,6 +4036,7 @@
                 <a:latin typeface="Trebuchet MS"/>
               </a:defRPr>
             </a:pPr>
+            <a:endParaRPr/>
           </a:p>
           <a:p>
             <a:pPr algn="l">
@@ -4060,6 +4082,7 @@
                 <a:latin typeface="Trebuchet MS"/>
               </a:defRPr>
             </a:pPr>
+            <a:endParaRPr/>
           </a:p>
           <a:p>
             <a:pPr algn="l">
@@ -4121,6 +4144,7 @@
                 <a:latin typeface="Trebuchet MS"/>
               </a:defRPr>
             </a:pPr>
+            <a:endParaRPr/>
           </a:p>
           <a:p>
             <a:pPr algn="l">
@@ -4165,7 +4189,7 @@
 </file>
 
 <file path=ppt/slides/slide12.xml><?xml version="1.0" encoding="utf-8"?>
-<p:sld xmlns:a="http://schemas.openxmlformats.org/drawingml/2006/main" xmlns:p="http://schemas.openxmlformats.org/presentationml/2006/main" xmlns:r="http://schemas.openxmlformats.org/officeDocument/2006/relationships">
+<p:sld xmlns:a="http://schemas.openxmlformats.org/drawingml/2006/main" xmlns:r="http://schemas.openxmlformats.org/officeDocument/2006/relationships" xmlns:p="http://schemas.openxmlformats.org/presentationml/2006/main">
   <p:cSld>
     <p:spTree>
       <p:nvGrpSpPr>
@@ -4173,7 +4197,14 @@
         <p:cNvGrpSpPr/>
         <p:nvPr/>
       </p:nvGrpSpPr>
-      <p:grpSpPr/>
+      <p:grpSpPr>
+        <a:xfrm>
+          <a:off x="0" y="0"/>
+          <a:ext cx="0" cy="0"/>
+          <a:chOff x="0" y="0"/>
+          <a:chExt cx="0" cy="0"/>
+        </a:xfrm>
+      </p:grpSpPr>
       <p:sp>
         <p:nvSpPr>
           <p:cNvPr id="2" name="TextBox 1"/>
@@ -4367,6 +4398,7 @@
                 <a:latin typeface="Trebuchet MS"/>
               </a:defRPr>
             </a:pPr>
+            <a:endParaRPr/>
           </a:p>
           <a:p>
             <a:pPr algn="ctr">
@@ -4396,6 +4428,7 @@
                 <a:latin typeface="Trebuchet MS"/>
               </a:defRPr>
             </a:pPr>
+            <a:endParaRPr/>
           </a:p>
           <a:p>
             <a:pPr algn="l">
@@ -4425,6 +4458,7 @@
                 <a:latin typeface="Trebuchet MS"/>
               </a:defRPr>
             </a:pPr>
+            <a:endParaRPr/>
           </a:p>
           <a:p>
             <a:pPr algn="l">
@@ -4486,6 +4520,7 @@
                 <a:latin typeface="Trebuchet MS"/>
               </a:defRPr>
             </a:pPr>
+            <a:endParaRPr/>
           </a:p>
           <a:p>
             <a:pPr algn="l">
@@ -4530,7 +4565,7 @@
 </file>
 
 <file path=ppt/slides/slide13.xml><?xml version="1.0" encoding="utf-8"?>
-<p:sld xmlns:a="http://schemas.openxmlformats.org/drawingml/2006/main" xmlns:p="http://schemas.openxmlformats.org/presentationml/2006/main" xmlns:r="http://schemas.openxmlformats.org/officeDocument/2006/relationships">
+<p:sld xmlns:a="http://schemas.openxmlformats.org/drawingml/2006/main" xmlns:r="http://schemas.openxmlformats.org/officeDocument/2006/relationships" xmlns:p="http://schemas.openxmlformats.org/presentationml/2006/main">
   <p:cSld>
     <p:spTree>
       <p:nvGrpSpPr>
@@ -4538,7 +4573,14 @@
         <p:cNvGrpSpPr/>
         <p:nvPr/>
       </p:nvGrpSpPr>
-      <p:grpSpPr/>
+      <p:grpSpPr>
+        <a:xfrm>
+          <a:off x="0" y="0"/>
+          <a:ext cx="0" cy="0"/>
+          <a:chOff x="0" y="0"/>
+          <a:chExt cx="0" cy="0"/>
+        </a:xfrm>
+      </p:grpSpPr>
       <p:sp>
         <p:nvSpPr>
           <p:cNvPr id="2" name="TextBox 1"/>
@@ -4732,6 +4774,7 @@
                 <a:latin typeface="Trebuchet MS"/>
               </a:defRPr>
             </a:pPr>
+            <a:endParaRPr/>
           </a:p>
           <a:p>
             <a:pPr algn="ctr">
@@ -4761,6 +4804,7 @@
                 <a:latin typeface="Trebuchet MS"/>
               </a:defRPr>
             </a:pPr>
+            <a:endParaRPr/>
           </a:p>
           <a:p>
             <a:pPr algn="l">
@@ -4854,6 +4898,7 @@
                 <a:latin typeface="Trebuchet MS"/>
               </a:defRPr>
             </a:pPr>
+            <a:endParaRPr/>
           </a:p>
           <a:p>
             <a:pPr algn="l">
@@ -4883,6 +4928,7 @@
                 <a:latin typeface="Trebuchet MS"/>
               </a:defRPr>
             </a:pPr>
+            <a:endParaRPr/>
           </a:p>
           <a:p>
             <a:pPr algn="l">
@@ -4927,7 +4973,7 @@
 </file>
 
 <file path=ppt/slides/slide14.xml><?xml version="1.0" encoding="utf-8"?>
-<p:sld xmlns:a="http://schemas.openxmlformats.org/drawingml/2006/main" xmlns:p="http://schemas.openxmlformats.org/presentationml/2006/main" xmlns:r="http://schemas.openxmlformats.org/officeDocument/2006/relationships">
+<p:sld xmlns:a="http://schemas.openxmlformats.org/drawingml/2006/main" xmlns:r="http://schemas.openxmlformats.org/officeDocument/2006/relationships" xmlns:p="http://schemas.openxmlformats.org/presentationml/2006/main">
   <p:cSld>
     <p:spTree>
       <p:nvGrpSpPr>
@@ -4935,7 +4981,14 @@
         <p:cNvGrpSpPr/>
         <p:nvPr/>
       </p:nvGrpSpPr>
-      <p:grpSpPr/>
+      <p:grpSpPr>
+        <a:xfrm>
+          <a:off x="0" y="0"/>
+          <a:ext cx="0" cy="0"/>
+          <a:chOff x="0" y="0"/>
+          <a:chExt cx="0" cy="0"/>
+        </a:xfrm>
+      </p:grpSpPr>
       <p:sp>
         <p:nvSpPr>
           <p:cNvPr id="2" name="TextBox 1"/>
@@ -5088,8 +5141,8 @@
         </p:nvSpPr>
         <p:spPr>
           <a:xfrm>
-            <a:off x="502920" y="1005840"/>
-            <a:ext cx="4572000" cy="3200400"/>
+            <a:off x="508000" y="1003300"/>
+            <a:ext cx="4572000" cy="433452"/>
           </a:xfrm>
           <a:prstGeom prst="rect">
             <a:avLst/>
@@ -5104,7 +5157,7 @@
           <a:p>
             <a:pPr algn="l">
               <a:spcAft>
-                <a:spcPts val="300"/>
+                <a:spcPts val="200"/>
               </a:spcAft>
               <a:defRPr sz="1150" b="1">
                 <a:solidFill>
@@ -5114,148 +5167,20 @@
               </a:defRPr>
             </a:pPr>
             <a:r>
-              <a:t>States</a:t>
-            </a:r>
-          </a:p>
-          <a:p>
-            <a:pPr algn="l">
-              <a:spcAft>
-                <a:spcPts val="300"/>
-              </a:spcAft>
-              <a:defRPr sz="1100" b="0">
-                <a:solidFill>
-                  <a:srgbClr val="4A5568"/>
-                </a:solidFill>
-                <a:latin typeface="Courier New"/>
-              </a:defRPr>
-            </a:pPr>
-            <a:r>
-              <a:t>  q₀ = OK  (accepting)</a:t>
-            </a:r>
-          </a:p>
-          <a:p>
-            <a:pPr algn="l">
-              <a:spcAft>
-                <a:spcPts val="300"/>
-              </a:spcAft>
-              <a:defRPr sz="1100" b="0">
-                <a:solidFill>
-                  <a:srgbClr val="C0392B"/>
-                </a:solidFill>
-                <a:latin typeface="Courier New"/>
-              </a:defRPr>
-            </a:pPr>
-            <a:r>
-              <a:t>  q₁ = VIOLATION  (rejecting)</a:t>
-            </a:r>
-          </a:p>
-          <a:p>
-            <a:pPr algn="l">
-              <a:spcAft>
-                <a:spcPts val="300"/>
-              </a:spcAft>
-              <a:defRPr sz="600" b="0">
-                <a:solidFill>
-                  <a:srgbClr val="4A5568"/>
-                </a:solidFill>
-                <a:latin typeface="Trebuchet MS"/>
-              </a:defRPr>
-            </a:pPr>
-          </a:p>
-          <a:p>
-            <a:pPr algn="l">
-              <a:spcAft>
-                <a:spcPts val="300"/>
-              </a:spcAft>
-              <a:defRPr sz="1150" b="1">
-                <a:solidFill>
-                  <a:srgbClr val="0E7C7B"/>
-                </a:solidFill>
-                <a:latin typeface="Trebuchet MS"/>
-              </a:defRPr>
-            </a:pPr>
-            <a:r>
-              <a:t>Transitions</a:t>
-            </a:r>
-          </a:p>
-          <a:p>
-            <a:pPr algn="l">
-              <a:spcAft>
-                <a:spcPts val="300"/>
-              </a:spcAft>
-              <a:defRPr sz="1050" b="0">
-                <a:solidFill>
-                  <a:srgbClr val="4A5568"/>
-                </a:solidFill>
-                <a:latin typeface="Courier New"/>
-              </a:defRPr>
-            </a:pPr>
-            <a:r>
-              <a:t>  q₀ ── write(path ∈ sandbox) ──▶ q₀</a:t>
-            </a:r>
-          </a:p>
-          <a:p>
-            <a:pPr algn="l">
-              <a:spcAft>
-                <a:spcPts val="300"/>
-              </a:spcAft>
-              <a:defRPr sz="1050" b="0">
-                <a:solidFill>
-                  <a:srgbClr val="C0392B"/>
-                </a:solidFill>
-                <a:latin typeface="Courier New"/>
-              </a:defRPr>
-            </a:pPr>
-            <a:r>
-              <a:t>  q₀ ── write(path ∉ sandbox) ──▶ q₁</a:t>
-            </a:r>
-          </a:p>
-          <a:p>
-            <a:pPr algn="l">
-              <a:spcAft>
-                <a:spcPts val="300"/>
-              </a:spcAft>
-              <a:defRPr sz="1050" b="0">
-                <a:solidFill>
-                  <a:srgbClr val="4A5568"/>
-                </a:solidFill>
-                <a:latin typeface="Courier New"/>
-              </a:defRPr>
-            </a:pPr>
-            <a:r>
-              <a:t>  q₀ ── read(*) ──▶ q₀</a:t>
-            </a:r>
-          </a:p>
-          <a:p>
-            <a:pPr algn="l">
-              <a:spcAft>
-                <a:spcPts val="300"/>
-              </a:spcAft>
-              <a:defRPr sz="1050" b="0">
-                <a:solidFill>
-                  <a:srgbClr val="4A5568"/>
-                </a:solidFill>
-                <a:latin typeface="Courier New"/>
-              </a:defRPr>
-            </a:pPr>
-            <a:r>
-              <a:t>  q₀ ── bash(*) ──▶ q₀</a:t>
-            </a:r>
-          </a:p>
-          <a:p>
-            <a:pPr algn="l">
-              <a:spcAft>
-                <a:spcPts val="300"/>
-              </a:spcAft>
-              <a:defRPr sz="1050" b="0">
-                <a:solidFill>
-                  <a:srgbClr val="C0392B"/>
-                </a:solidFill>
-                <a:latin typeface="Courier New"/>
-              </a:defRPr>
-            </a:pPr>
-            <a:r>
-              <a:t>  q₁ ── * ──▶ q₁  (absorbing)</a:t>
+              <a:t>States &amp; Transitions</a:t>
+            </a:r>
+          </a:p>
+          <a:p>
+            <a:pPr algn="l">
+              <a:defRPr sz="900" b="0">
+                <a:solidFill>
+                  <a:srgbClr val="4A5568"/>
+                </a:solidFill>
+                <a:latin typeface="Trebuchet MS"/>
+              </a:defRPr>
+            </a:pPr>
+            <a:r>
+              <a:t>q₀ = OK (accepting) · q₁ = VIOLATION (absorbing)</a:t>
             </a:r>
           </a:p>
         </p:txBody>
@@ -5309,6 +5234,7 @@
                 <a:latin typeface="Trebuchet MS"/>
               </a:defRPr>
             </a:pPr>
+            <a:endParaRPr/>
           </a:p>
           <a:p>
             <a:pPr algn="l">
@@ -5338,6 +5264,7 @@
                 <a:latin typeface="Trebuchet MS"/>
               </a:defRPr>
             </a:pPr>
+            <a:endParaRPr/>
           </a:p>
           <a:p>
             <a:pPr algn="l">
@@ -5501,7 +5428,402 @@
           </a:p>
         </p:txBody>
       </p:sp>
+      <p:sp>
+        <p:nvSpPr>
+          <p:cNvPr id="8" name="q0_outer"/>
+          <p:cNvSpPr/>
+          <p:nvPr/>
+        </p:nvSpPr>
+        <p:spPr>
+          <a:xfrm>
+            <a:off x="1168400" y="2628900"/>
+            <a:ext cx="965200" cy="965200"/>
+          </a:xfrm>
+          <a:prstGeom prst="ellipse">
+            <a:avLst/>
+          </a:prstGeom>
+          <a:solidFill>
+            <a:srgbClr val="FFFFFF"/>
+          </a:solidFill>
+          <a:ln w="19050">
+            <a:solidFill>
+              <a:srgbClr val="0E7C7B"/>
+            </a:solidFill>
+          </a:ln>
+        </p:spPr>
+        <p:txBody>
+          <a:bodyPr wrap="none" lIns="0" tIns="0" rIns="0" bIns="0" anchor="ctr">
+            <a:noAutofit/>
+          </a:bodyPr>
+          <a:lstStyle/>
+          <a:p>
+            <a:pPr algn="ctr"/>
+            <a:endParaRPr/>
+          </a:p>
+        </p:txBody>
+      </p:sp>
+      <p:sp>
+        <p:nvSpPr>
+          <p:cNvPr id="9" name="q0_inner"/>
+          <p:cNvSpPr/>
+          <p:nvPr/>
+        </p:nvSpPr>
+        <p:spPr>
+          <a:xfrm>
+            <a:off x="1244600" y="2705100"/>
+            <a:ext cx="812800" cy="812800"/>
+          </a:xfrm>
+          <a:prstGeom prst="ellipse">
+            <a:avLst/>
+          </a:prstGeom>
+          <a:solidFill>
+            <a:srgbClr val="E6F4F3"/>
+          </a:solidFill>
+          <a:ln w="19050">
+            <a:solidFill>
+              <a:srgbClr val="0E7C7B"/>
+            </a:solidFill>
+          </a:ln>
+        </p:spPr>
+        <p:txBody>
+          <a:bodyPr wrap="none" lIns="0" tIns="0" rIns="0" bIns="0" anchor="ctr">
+            <a:noAutofit/>
+          </a:bodyPr>
+          <a:lstStyle/>
+          <a:p>
+            <a:pPr algn="ctr"/>
+            <a:r>
+              <a:rPr lang="en-US" sz="1200" b="1" dirty="0">
+                <a:solidFill>
+                  <a:srgbClr val="0E7C7B"/>
+                </a:solidFill>
+                <a:latin typeface="Trebuchet MS"/>
+              </a:rPr>
+              <a:t>q₀ OK</a:t>
+            </a:r>
+          </a:p>
+        </p:txBody>
+      </p:sp>
+      <p:sp>
+        <p:nvSpPr>
+          <p:cNvPr id="10" name="q1"/>
+          <p:cNvSpPr/>
+          <p:nvPr/>
+        </p:nvSpPr>
+        <p:spPr>
+          <a:xfrm>
+            <a:off x="3708400" y="2628900"/>
+            <a:ext cx="965200" cy="965200"/>
+          </a:xfrm>
+          <a:prstGeom prst="ellipse">
+            <a:avLst/>
+          </a:prstGeom>
+          <a:solidFill>
+            <a:srgbClr val="FBE9E7"/>
+          </a:solidFill>
+          <a:ln w="19050">
+            <a:solidFill>
+              <a:srgbClr val="C0392B"/>
+            </a:solidFill>
+          </a:ln>
+        </p:spPr>
+        <p:txBody>
+          <a:bodyPr wrap="none" lIns="0" tIns="0" rIns="0" bIns="0" anchor="ctr">
+            <a:noAutofit/>
+          </a:bodyPr>
+          <a:lstStyle/>
+          <a:p>
+            <a:pPr algn="ctr"/>
+            <a:r>
+              <a:rPr lang="en-US" sz="1000" b="1" dirty="0">
+                <a:solidFill>
+                  <a:srgbClr val="C0392B"/>
+                </a:solidFill>
+                <a:latin typeface="Trebuchet MS"/>
+              </a:rPr>
+              <a:t>q₁ VIOLATION</a:t>
+            </a:r>
+          </a:p>
+        </p:txBody>
+      </p:sp>
+      <p:cxnSp>
+        <p:nvCxnSpPr>
+          <p:cNvPr id="11" name="start_arrow"/>
+          <p:cNvCxnSpPr/>
+          <p:nvPr/>
+        </p:nvCxnSpPr>
+        <p:spPr>
+          <a:xfrm>
+            <a:off x="762000" y="3111500"/>
+            <a:ext cx="406400" cy="12700"/>
+          </a:xfrm>
+          <a:prstGeom prst="straightConnector1">
+            <a:avLst/>
+          </a:prstGeom>
+          <a:ln w="12700">
+            <a:solidFill>
+              <a:srgbClr val="1B2A4A"/>
+            </a:solidFill>
+            <a:tailEnd type="triangle" w="med" len="med"/>
+          </a:ln>
+        </p:spPr>
+        <p:style>
+          <a:lnRef idx="1">
+            <a:schemeClr val="accent1"/>
+          </a:lnRef>
+          <a:fillRef idx="0">
+            <a:schemeClr val="accent1"/>
+          </a:fillRef>
+          <a:effectRef idx="0">
+            <a:schemeClr val="accent1"/>
+          </a:effectRef>
+          <a:fontRef idx="minor">
+            <a:schemeClr val="tx1"/>
+          </a:fontRef>
+        </p:style>
+      </p:cxnSp>
+      <p:sp>
+        <p:nvSpPr>
+          <p:cNvPr id="12" name="start_label"/>
+          <p:cNvSpPr txBox="1"/>
+          <p:nvPr/>
+        </p:nvSpPr>
+        <p:spPr>
+          <a:xfrm>
+            <a:off x="508000" y="2933700"/>
+            <a:ext cx="279400" cy="152400"/>
+          </a:xfrm>
+          <a:prstGeom prst="rect">
+            <a:avLst/>
+          </a:prstGeom>
+          <a:noFill/>
+        </p:spPr>
+        <p:txBody>
+          <a:bodyPr wrap="none" lIns="0" tIns="0" rIns="0" bIns="0">
+            <a:spAutoFit/>
+          </a:bodyPr>
+          <a:lstStyle/>
+          <a:p>
+            <a:pPr algn="l"/>
+            <a:r>
+              <a:rPr lang="en-US" sz="900" b="0" dirty="0">
+                <a:solidFill>
+                  <a:srgbClr val="1B2A4A"/>
+                </a:solidFill>
+                <a:latin typeface="Courier New"/>
+              </a:rPr>
+              <a:t>start</a:t>
+            </a:r>
+          </a:p>
+        </p:txBody>
+      </p:sp>
+      <p:cxnSp>
+        <p:nvCxnSpPr>
+          <p:cNvPr id="13" name="t_q0_q1"/>
+          <p:cNvCxnSpPr/>
+          <p:nvPr/>
+        </p:nvCxnSpPr>
+        <p:spPr>
+          <a:xfrm>
+            <a:off x="2108200" y="3009900"/>
+            <a:ext cx="1625600" cy="12700"/>
+          </a:xfrm>
+          <a:prstGeom prst="straightConnector1">
+            <a:avLst/>
+          </a:prstGeom>
+          <a:ln w="12700">
+            <a:solidFill>
+              <a:srgbClr val="C0392B"/>
+            </a:solidFill>
+            <a:tailEnd type="triangle" w="med" len="med"/>
+          </a:ln>
+        </p:spPr>
+        <p:style>
+          <a:lnRef idx="1">
+            <a:schemeClr val="accent1"/>
+          </a:lnRef>
+          <a:fillRef idx="0">
+            <a:schemeClr val="accent1"/>
+          </a:fillRef>
+          <a:effectRef idx="0">
+            <a:schemeClr val="accent1"/>
+          </a:effectRef>
+          <a:fontRef idx="minor">
+            <a:schemeClr val="tx1"/>
+          </a:fontRef>
+        </p:style>
+      </p:cxnSp>
+      <p:sp>
+        <p:nvSpPr>
+          <p:cNvPr id="14" name="t_q0_q1_label"/>
+          <p:cNvSpPr txBox="1"/>
+          <p:nvPr/>
+        </p:nvSpPr>
+        <p:spPr>
+          <a:xfrm>
+            <a:off x="2159000" y="2438400"/>
+            <a:ext cx="1651000" cy="177800"/>
+          </a:xfrm>
+          <a:prstGeom prst="rect">
+            <a:avLst/>
+          </a:prstGeom>
+          <a:noFill/>
+        </p:spPr>
+        <p:txBody>
+          <a:bodyPr wrap="none" lIns="0" tIns="0" rIns="0" bIns="0">
+            <a:spAutoFit/>
+          </a:bodyPr>
+          <a:lstStyle/>
+          <a:p>
+            <a:pPr algn="l"/>
+            <a:r>
+              <a:rPr lang="en-US" sz="900" b="1" dirty="0">
+                <a:solidFill>
+                  <a:srgbClr val="C0392B"/>
+                </a:solidFill>
+                <a:latin typeface="Courier New"/>
+              </a:rPr>
+              <a:t>write(path ∉ sandbox)</a:t>
+            </a:r>
+          </a:p>
+        </p:txBody>
+      </p:sp>
+      <p:sp>
+        <p:nvSpPr>
+          <p:cNvPr id="15" name="q0_loop"/>
+          <p:cNvSpPr/>
+          <p:nvPr/>
+        </p:nvSpPr>
+        <p:spPr>
+          <a:xfrm>
+            <a:off x="1371600" y="2298700"/>
+            <a:ext cx="558800" cy="355600"/>
+          </a:xfrm>
+          <a:prstGeom prst="ellipse">
+            <a:avLst/>
+          </a:prstGeom>
+          <a:noFill/>
+          <a:ln w="12700">
+            <a:solidFill>
+              <a:srgbClr val="0E7C7B"/>
+            </a:solidFill>
+            <a:tailEnd type="triangle" w="sm" len="sm"/>
+          </a:ln>
+        </p:spPr>
+        <p:txBody>
+          <a:bodyPr/>
+          <a:lstStyle/>
+          <a:p>
+            <a:endParaRPr/>
+          </a:p>
+        </p:txBody>
+      </p:sp>
+      <p:sp>
+        <p:nvSpPr>
+          <p:cNvPr id="16" name="q0_loop_label"/>
+          <p:cNvSpPr txBox="1"/>
+          <p:nvPr/>
+        </p:nvSpPr>
+        <p:spPr>
+          <a:xfrm>
+            <a:off x="762000" y="1905000"/>
+            <a:ext cx="1778000" cy="177800"/>
+          </a:xfrm>
+          <a:prstGeom prst="rect">
+            <a:avLst/>
+          </a:prstGeom>
+          <a:noFill/>
+        </p:spPr>
+        <p:txBody>
+          <a:bodyPr wrap="none" lIns="0" tIns="0" rIns="0" bIns="0">
+            <a:spAutoFit/>
+          </a:bodyPr>
+          <a:lstStyle/>
+          <a:p>
+            <a:pPr algn="ctr"/>
+            <a:r>
+              <a:rPr lang="en-US" sz="900" b="0" dirty="0">
+                <a:solidFill>
+                  <a:srgbClr val="0E7C7B"/>
+                </a:solidFill>
+                <a:latin typeface="Courier New"/>
+              </a:rPr>
+              <a:t>write(∈ sandbox), read, bash</a:t>
+            </a:r>
+          </a:p>
+        </p:txBody>
+      </p:sp>
+      <p:sp>
+        <p:nvSpPr>
+          <p:cNvPr id="17" name="q1_loop"/>
+          <p:cNvSpPr/>
+          <p:nvPr/>
+        </p:nvSpPr>
+        <p:spPr>
+          <a:xfrm>
+            <a:off x="3911600" y="2298700"/>
+            <a:ext cx="558800" cy="355600"/>
+          </a:xfrm>
+          <a:prstGeom prst="ellipse">
+            <a:avLst/>
+          </a:prstGeom>
+          <a:noFill/>
+          <a:ln w="12700">
+            <a:solidFill>
+              <a:srgbClr val="C0392B"/>
+            </a:solidFill>
+            <a:tailEnd type="triangle" w="sm" len="sm"/>
+          </a:ln>
+        </p:spPr>
+        <p:txBody>
+          <a:bodyPr/>
+          <a:lstStyle/>
+          <a:p>
+            <a:endParaRPr/>
+          </a:p>
+        </p:txBody>
+      </p:sp>
+      <p:sp>
+        <p:nvSpPr>
+          <p:cNvPr id="18" name="q1_loop_label"/>
+          <p:cNvSpPr txBox="1"/>
+          <p:nvPr/>
+        </p:nvSpPr>
+        <p:spPr>
+          <a:xfrm>
+            <a:off x="3810000" y="1905000"/>
+            <a:ext cx="762000" cy="177800"/>
+          </a:xfrm>
+          <a:prstGeom prst="rect">
+            <a:avLst/>
+          </a:prstGeom>
+          <a:noFill/>
+        </p:spPr>
+        <p:txBody>
+          <a:bodyPr wrap="none" lIns="0" tIns="0" rIns="0" bIns="0">
+            <a:spAutoFit/>
+          </a:bodyPr>
+          <a:lstStyle/>
+          <a:p>
+            <a:pPr algn="ctr"/>
+            <a:r>
+              <a:rPr lang="en-US" sz="900" b="0" dirty="0">
+                <a:solidFill>
+                  <a:srgbClr val="C0392B"/>
+                </a:solidFill>
+                <a:latin typeface="Courier New"/>
+              </a:rPr>
+              <a:t>any (*)</a:t>
+            </a:r>
+          </a:p>
+        </p:txBody>
+      </p:sp>
     </p:spTree>
+    <p:extLst>
+      <p:ext uri="{BB962C8B-B14F-4D97-AF65-F5344CB8AC3E}">
+        <p14:creationId xmlns:p14="http://schemas.microsoft.com/office/powerpoint/2010/main" val="1467763927"/>
+      </p:ext>
+    </p:extLst>
   </p:cSld>
   <p:clrMapOvr>
     <a:masterClrMapping/>
@@ -5510,7 +5832,7 @@
 </file>
 
 <file path=ppt/slides/slide15.xml><?xml version="1.0" encoding="utf-8"?>
-<p:sld xmlns:a="http://schemas.openxmlformats.org/drawingml/2006/main" xmlns:p="http://schemas.openxmlformats.org/presentationml/2006/main" xmlns:r="http://schemas.openxmlformats.org/officeDocument/2006/relationships">
+<p:sld xmlns:a="http://schemas.openxmlformats.org/drawingml/2006/main" xmlns:r="http://schemas.openxmlformats.org/officeDocument/2006/relationships" xmlns:p="http://schemas.openxmlformats.org/presentationml/2006/main">
   <p:cSld>
     <p:spTree>
       <p:nvGrpSpPr>
@@ -5518,7 +5840,14 @@
         <p:cNvGrpSpPr/>
         <p:nvPr/>
       </p:nvGrpSpPr>
-      <p:grpSpPr/>
+      <p:grpSpPr>
+        <a:xfrm>
+          <a:off x="0" y="0"/>
+          <a:ext cx="0" cy="0"/>
+          <a:chOff x="0" y="0"/>
+          <a:chExt cx="0" cy="0"/>
+        </a:xfrm>
+      </p:grpSpPr>
       <p:sp>
         <p:nvSpPr>
           <p:cNvPr id="2" name="TextBox 1"/>
@@ -5671,8 +6000,8 @@
         </p:nvSpPr>
         <p:spPr>
           <a:xfrm>
-            <a:off x="502920" y="1005840"/>
-            <a:ext cx="8229600" cy="3657600"/>
+            <a:off x="508000" y="1003300"/>
+            <a:ext cx="4191000" cy="1549142"/>
           </a:xfrm>
           <a:prstGeom prst="rect">
             <a:avLst/>
@@ -5702,23 +6031,16 @@
           </a:p>
           <a:p>
             <a:pPr algn="l">
-              <a:spcAft>
-                <a:spcPts val="300"/>
-              </a:spcAft>
-              <a:defRPr sz="600" b="0">
-                <a:solidFill>
-                  <a:srgbClr val="4A5568"/>
-                </a:solidFill>
-                <a:latin typeface="Trebuchet MS"/>
-              </a:defRPr>
-            </a:pPr>
-          </a:p>
-          <a:p>
-            <a:pPr algn="l">
-              <a:spcAft>
-                <a:spcPts val="300"/>
-              </a:spcAft>
-              <a:defRPr sz="1150" b="1">
+              <a:defRPr sz="500"/>
+            </a:pPr>
+            <a:endParaRPr/>
+          </a:p>
+          <a:p>
+            <a:pPr algn="l">
+              <a:spcAft>
+                <a:spcPts val="200"/>
+              </a:spcAft>
+              <a:defRPr sz="1100" b="1">
                 <a:solidFill>
                   <a:srgbClr val="0E7C7B"/>
                 </a:solidFill>
@@ -5732,9 +6054,9 @@
           <a:p>
             <a:pPr algn="l">
               <a:spcAft>
-                <a:spcPts val="300"/>
-              </a:spcAft>
-              <a:defRPr sz="1100" b="0">
+                <a:spcPts val="200"/>
+              </a:spcAft>
+              <a:defRPr sz="1000" b="0">
                 <a:solidFill>
                   <a:srgbClr val="4A5568"/>
                 </a:solidFill>
@@ -5742,15 +6064,15 @@
               </a:defRPr>
             </a:pPr>
             <a:r>
-              <a:t>  UNREAD      — file has not been read yet</a:t>
-            </a:r>
-          </a:p>
-          <a:p>
-            <a:pPr algn="l">
-              <a:spcAft>
-                <a:spcPts val="300"/>
-              </a:spcAft>
-              <a:defRPr sz="1100" b="0">
+              <a:t>  UNREAD     not read yet</a:t>
+            </a:r>
+          </a:p>
+          <a:p>
+            <a:pPr algn="l">
+              <a:spcAft>
+                <a:spcPts val="200"/>
+              </a:spcAft>
+              <a:defRPr sz="1000" b="0">
                 <a:solidFill>
                   <a:srgbClr val="4A5568"/>
                 </a:solidFill>
@@ -5758,15 +6080,15 @@
               </a:defRPr>
             </a:pPr>
             <a:r>
-              <a:t>  READ        — file has been read</a:t>
-            </a:r>
-          </a:p>
-          <a:p>
-            <a:pPr algn="l">
-              <a:spcAft>
-                <a:spcPts val="300"/>
-              </a:spcAft>
-              <a:defRPr sz="1100" b="0">
+              <a:t>  READ       file has been read</a:t>
+            </a:r>
+          </a:p>
+          <a:p>
+            <a:pPr algn="l">
+              <a:spcAft>
+                <a:spcPts val="200"/>
+              </a:spcAft>
+              <a:defRPr sz="1000" b="0">
                 <a:solidFill>
                   <a:srgbClr val="C0392B"/>
                 </a:solidFill>
@@ -5774,134 +6096,482 @@
               </a:defRPr>
             </a:pPr>
             <a:r>
-              <a:t>  VIOLATION   — edit attempted without prior read</a:t>
-            </a:r>
-          </a:p>
-          <a:p>
-            <a:pPr algn="l">
-              <a:spcAft>
-                <a:spcPts val="300"/>
-              </a:spcAft>
-              <a:defRPr sz="600" b="0">
-                <a:solidFill>
-                  <a:srgbClr val="4A5568"/>
-                </a:solidFill>
-                <a:latin typeface="Trebuchet MS"/>
-              </a:defRPr>
-            </a:pPr>
-          </a:p>
-          <a:p>
-            <a:pPr algn="l">
-              <a:spcAft>
-                <a:spcPts val="300"/>
-              </a:spcAft>
-              <a:defRPr sz="1150" b="1">
+              <a:t>  VIOLATION  edit before read</a:t>
+            </a:r>
+          </a:p>
+          <a:p>
+            <a:pPr algn="l">
+              <a:defRPr sz="500"/>
+            </a:pPr>
+            <a:endParaRPr/>
+          </a:p>
+          <a:p>
+            <a:pPr algn="l">
+              <a:spcAft>
+                <a:spcPts val="300"/>
+              </a:spcAft>
+              <a:defRPr sz="1000" b="0">
+                <a:solidFill>
+                  <a:srgbClr val="4A5568"/>
+                </a:solidFill>
+                <a:latin typeface="Trebuchet MS"/>
+              </a:defRPr>
+            </a:pPr>
+            <a:r>
+              <a:t>Ordering property as a DFA — one automaton per tracked file.</a:t>
+            </a:r>
+          </a:p>
+          <a:p>
+            <a:pPr algn="l">
+              <a:spcAft>
+                <a:spcPts val="300"/>
+              </a:spcAft>
+              <a:defRPr sz="1000" b="1">
+                <a:solidFill>
+                  <a:srgbClr val="E67E22"/>
+                </a:solidFill>
+                <a:latin typeface="Trebuchet MS"/>
+              </a:defRPr>
+            </a:pPr>
+            <a:r>
+              <a:t>Claude Code enforces this: Read before Edit.</a:t>
+            </a:r>
+          </a:p>
+        </p:txBody>
+      </p:sp>
+      <p:sp>
+        <p:nvSpPr>
+          <p:cNvPr id="7" name="UNREAD"/>
+          <p:cNvSpPr/>
+          <p:nvPr/>
+        </p:nvSpPr>
+        <p:spPr>
+          <a:xfrm>
+            <a:off x="5295900" y="1612900"/>
+            <a:ext cx="965200" cy="965200"/>
+          </a:xfrm>
+          <a:prstGeom prst="ellipse">
+            <a:avLst/>
+          </a:prstGeom>
+          <a:solidFill>
+            <a:srgbClr val="FFFFFF"/>
+          </a:solidFill>
+          <a:ln w="19050">
+            <a:solidFill>
+              <a:srgbClr val="1B2A4A"/>
+            </a:solidFill>
+          </a:ln>
+        </p:spPr>
+        <p:txBody>
+          <a:bodyPr wrap="none" lIns="0" tIns="0" rIns="0" bIns="0" anchor="ctr">
+            <a:noAutofit/>
+          </a:bodyPr>
+          <a:lstStyle/>
+          <a:p>
+            <a:pPr algn="ctr"/>
+            <a:r>
+              <a:rPr lang="en-US" sz="1000" b="1" dirty="0">
+                <a:solidFill>
+                  <a:srgbClr val="1B2A4A"/>
+                </a:solidFill>
+                <a:latin typeface="Trebuchet MS"/>
+              </a:rPr>
+              <a:t>UNREAD</a:t>
+            </a:r>
+          </a:p>
+        </p:txBody>
+      </p:sp>
+      <p:sp>
+        <p:nvSpPr>
+          <p:cNvPr id="8" name="READ_outer"/>
+          <p:cNvSpPr/>
+          <p:nvPr/>
+        </p:nvSpPr>
+        <p:spPr>
+          <a:xfrm>
+            <a:off x="7454900" y="1612900"/>
+            <a:ext cx="965200" cy="965200"/>
+          </a:xfrm>
+          <a:prstGeom prst="ellipse">
+            <a:avLst/>
+          </a:prstGeom>
+          <a:solidFill>
+            <a:srgbClr val="FFFFFF"/>
+          </a:solidFill>
+          <a:ln w="19050">
+            <a:solidFill>
+              <a:srgbClr val="0E7C7B"/>
+            </a:solidFill>
+          </a:ln>
+        </p:spPr>
+        <p:txBody>
+          <a:bodyPr/>
+          <a:lstStyle/>
+          <a:p>
+            <a:endParaRPr/>
+          </a:p>
+        </p:txBody>
+      </p:sp>
+      <p:sp>
+        <p:nvSpPr>
+          <p:cNvPr id="9" name="READ"/>
+          <p:cNvSpPr/>
+          <p:nvPr/>
+        </p:nvSpPr>
+        <p:spPr>
+          <a:xfrm>
+            <a:off x="7531100" y="1689100"/>
+            <a:ext cx="812800" cy="812800"/>
+          </a:xfrm>
+          <a:prstGeom prst="ellipse">
+            <a:avLst/>
+          </a:prstGeom>
+          <a:solidFill>
+            <a:srgbClr val="E6F4F3"/>
+          </a:solidFill>
+          <a:ln w="19050">
+            <a:solidFill>
+              <a:srgbClr val="0E7C7B"/>
+            </a:solidFill>
+          </a:ln>
+        </p:spPr>
+        <p:txBody>
+          <a:bodyPr wrap="none" lIns="0" tIns="0" rIns="0" bIns="0" anchor="ctr">
+            <a:noAutofit/>
+          </a:bodyPr>
+          <a:lstStyle/>
+          <a:p>
+            <a:pPr algn="ctr"/>
+            <a:r>
+              <a:rPr lang="en-US" sz="1100" b="1" dirty="0">
                 <a:solidFill>
                   <a:srgbClr val="0E7C7B"/>
                 </a:solidFill>
                 <a:latin typeface="Trebuchet MS"/>
-              </a:defRPr>
-            </a:pPr>
-            <a:r>
-              <a:t>Transitions:</a:t>
-            </a:r>
-          </a:p>
-          <a:p>
-            <a:pPr algn="l">
-              <a:spcAft>
-                <a:spcPts val="300"/>
-              </a:spcAft>
-              <a:defRPr sz="1100" b="0">
-                <a:solidFill>
-                  <a:srgbClr val="4A5568"/>
+              </a:rPr>
+              <a:t>READ</a:t>
+            </a:r>
+          </a:p>
+        </p:txBody>
+      </p:sp>
+      <p:sp>
+        <p:nvSpPr>
+          <p:cNvPr id="10" name="VIOLATION"/>
+          <p:cNvSpPr/>
+          <p:nvPr/>
+        </p:nvSpPr>
+        <p:spPr>
+          <a:xfrm>
+            <a:off x="6375400" y="3581400"/>
+            <a:ext cx="965200" cy="965200"/>
+          </a:xfrm>
+          <a:prstGeom prst="ellipse">
+            <a:avLst/>
+          </a:prstGeom>
+          <a:solidFill>
+            <a:srgbClr val="FBE9E7"/>
+          </a:solidFill>
+          <a:ln w="19050">
+            <a:solidFill>
+              <a:srgbClr val="C0392B"/>
+            </a:solidFill>
+          </a:ln>
+        </p:spPr>
+        <p:txBody>
+          <a:bodyPr wrap="none" lIns="0" tIns="0" rIns="0" bIns="0" anchor="ctr">
+            <a:noAutofit/>
+          </a:bodyPr>
+          <a:lstStyle/>
+          <a:p>
+            <a:pPr algn="ctr"/>
+            <a:r>
+              <a:rPr lang="en-US" sz="1000" b="1" dirty="0">
+                <a:solidFill>
+                  <a:srgbClr val="C0392B"/>
+                </a:solidFill>
+                <a:latin typeface="Trebuchet MS"/>
+              </a:rPr>
+              <a:t>VIOLATION</a:t>
+            </a:r>
+          </a:p>
+        </p:txBody>
+      </p:sp>
+      <p:cxnSp>
+        <p:nvCxnSpPr>
+          <p:cNvPr id="11" name="start"/>
+          <p:cNvCxnSpPr/>
+          <p:nvPr/>
+        </p:nvCxnSpPr>
+        <p:spPr>
+          <a:xfrm>
+            <a:off x="5778500" y="1333500"/>
+            <a:ext cx="12700" cy="279400"/>
+          </a:xfrm>
+          <a:prstGeom prst="straightConnector1">
+            <a:avLst/>
+          </a:prstGeom>
+          <a:ln w="12700">
+            <a:solidFill>
+              <a:srgbClr val="1B2A4A"/>
+            </a:solidFill>
+            <a:tailEnd type="triangle" w="med" len="med"/>
+          </a:ln>
+        </p:spPr>
+        <p:style>
+          <a:lnRef idx="1">
+            <a:schemeClr val="accent1"/>
+          </a:lnRef>
+          <a:fillRef idx="0">
+            <a:schemeClr val="accent1"/>
+          </a:fillRef>
+          <a:effectRef idx="0">
+            <a:schemeClr val="accent1"/>
+          </a:effectRef>
+          <a:fontRef idx="minor">
+            <a:schemeClr val="tx1"/>
+          </a:fontRef>
+        </p:style>
+      </p:cxnSp>
+      <p:sp>
+        <p:nvSpPr>
+          <p:cNvPr id="12" name="start_lbl"/>
+          <p:cNvSpPr txBox="1"/>
+          <p:nvPr/>
+        </p:nvSpPr>
+        <p:spPr>
+          <a:xfrm>
+            <a:off x="5600700" y="1155700"/>
+            <a:ext cx="381000" cy="152400"/>
+          </a:xfrm>
+          <a:prstGeom prst="rect">
+            <a:avLst/>
+          </a:prstGeom>
+          <a:noFill/>
+        </p:spPr>
+        <p:txBody>
+          <a:bodyPr wrap="none" lIns="0" tIns="0" rIns="0" bIns="0"/>
+          <a:lstStyle/>
+          <a:p>
+            <a:pPr algn="l"/>
+            <a:r>
+              <a:rPr lang="en-US" sz="900" b="0" dirty="0">
+                <a:solidFill>
+                  <a:srgbClr val="1B2A4A"/>
+                </a:solidFill>
+                <a:latin typeface="Trebuchet MS"/>
+              </a:rPr>
+              <a:t>start</a:t>
+            </a:r>
+          </a:p>
+        </p:txBody>
+      </p:sp>
+      <p:cxnSp>
+        <p:nvCxnSpPr>
+          <p:cNvPr id="13" name="u2r"/>
+          <p:cNvCxnSpPr/>
+          <p:nvPr/>
+        </p:nvCxnSpPr>
+        <p:spPr>
+          <a:xfrm>
+            <a:off x="6261100" y="2095500"/>
+            <a:ext cx="1193800" cy="12700"/>
+          </a:xfrm>
+          <a:prstGeom prst="straightConnector1">
+            <a:avLst/>
+          </a:prstGeom>
+          <a:ln w="12700">
+            <a:solidFill>
+              <a:srgbClr val="0E7C7B"/>
+            </a:solidFill>
+            <a:tailEnd type="triangle" w="med" len="med"/>
+          </a:ln>
+        </p:spPr>
+        <p:style>
+          <a:lnRef idx="1">
+            <a:schemeClr val="accent1"/>
+          </a:lnRef>
+          <a:fillRef idx="0">
+            <a:schemeClr val="accent1"/>
+          </a:fillRef>
+          <a:effectRef idx="0">
+            <a:schemeClr val="accent1"/>
+          </a:effectRef>
+          <a:fontRef idx="minor">
+            <a:schemeClr val="tx1"/>
+          </a:fontRef>
+        </p:style>
+      </p:cxnSp>
+      <p:sp>
+        <p:nvSpPr>
+          <p:cNvPr id="14" name="u2r_lbl"/>
+          <p:cNvSpPr txBox="1"/>
+          <p:nvPr/>
+        </p:nvSpPr>
+        <p:spPr>
+          <a:xfrm>
+            <a:off x="6362700" y="1866900"/>
+            <a:ext cx="1397000" cy="152400"/>
+          </a:xfrm>
+          <a:prstGeom prst="rect">
+            <a:avLst/>
+          </a:prstGeom>
+          <a:noFill/>
+        </p:spPr>
+        <p:txBody>
+          <a:bodyPr wrap="none" lIns="0" tIns="0" rIns="0" bIns="0"/>
+          <a:lstStyle/>
+          <a:p>
+            <a:pPr algn="ctr"/>
+            <a:r>
+              <a:rPr lang="en-US" sz="900" b="1" dirty="0">
+                <a:solidFill>
+                  <a:srgbClr val="0E7C7B"/>
                 </a:solidFill>
                 <a:latin typeface="Courier New"/>
-              </a:defRPr>
-            </a:pPr>
-            <a:r>
-              <a:t>  UNREAD  ── read(path)  ──▶ READ</a:t>
-            </a:r>
-          </a:p>
-          <a:p>
-            <a:pPr algn="l">
-              <a:spcAft>
-                <a:spcPts val="300"/>
-              </a:spcAft>
-              <a:defRPr sz="1100" b="0">
+              </a:rPr>
+              <a:t>read(path)</a:t>
+            </a:r>
+          </a:p>
+        </p:txBody>
+      </p:sp>
+      <p:cxnSp>
+        <p:nvCxnSpPr>
+          <p:cNvPr id="15" name="u2v"/>
+          <p:cNvCxnSpPr/>
+          <p:nvPr/>
+        </p:nvCxnSpPr>
+        <p:spPr>
+          <a:xfrm>
+            <a:off x="6057900" y="2476500"/>
+            <a:ext cx="419100" cy="1155700"/>
+          </a:xfrm>
+          <a:prstGeom prst="straightConnector1">
+            <a:avLst/>
+          </a:prstGeom>
+          <a:ln w="12700">
+            <a:solidFill>
+              <a:srgbClr val="C0392B"/>
+            </a:solidFill>
+            <a:tailEnd type="triangle" w="med" len="med"/>
+          </a:ln>
+        </p:spPr>
+        <p:style>
+          <a:lnRef idx="1">
+            <a:schemeClr val="accent1"/>
+          </a:lnRef>
+          <a:fillRef idx="0">
+            <a:schemeClr val="accent1"/>
+          </a:fillRef>
+          <a:effectRef idx="0">
+            <a:schemeClr val="accent1"/>
+          </a:effectRef>
+          <a:fontRef idx="minor">
+            <a:schemeClr val="tx1"/>
+          </a:fontRef>
+        </p:style>
+      </p:cxnSp>
+      <p:sp>
+        <p:nvSpPr>
+          <p:cNvPr id="16" name="u2v_lbl"/>
+          <p:cNvSpPr txBox="1"/>
+          <p:nvPr/>
+        </p:nvSpPr>
+        <p:spPr>
+          <a:xfrm>
+            <a:off x="6159500" y="2679700"/>
+            <a:ext cx="1651000" cy="152400"/>
+          </a:xfrm>
+          <a:prstGeom prst="rect">
+            <a:avLst/>
+          </a:prstGeom>
+          <a:noFill/>
+        </p:spPr>
+        <p:txBody>
+          <a:bodyPr wrap="none" lIns="0" tIns="0" rIns="0" bIns="0"/>
+          <a:lstStyle/>
+          <a:p>
+            <a:pPr algn="l"/>
+            <a:r>
+              <a:rPr lang="en-US" sz="900" b="1" dirty="0">
                 <a:solidFill>
                   <a:srgbClr val="C0392B"/>
                 </a:solidFill>
                 <a:latin typeface="Courier New"/>
-              </a:defRPr>
-            </a:pPr>
-            <a:r>
-              <a:t>  UNREAD  ── edit(path)  ──▶ VIOLATION  (reject!)</a:t>
-            </a:r>
-          </a:p>
-          <a:p>
-            <a:pPr algn="l">
-              <a:spcAft>
-                <a:spcPts val="300"/>
-              </a:spcAft>
-              <a:defRPr sz="1100" b="0">
+              </a:rPr>
+              <a:t>edit(path) — reject!</a:t>
+            </a:r>
+          </a:p>
+        </p:txBody>
+      </p:sp>
+      <p:sp>
+        <p:nvSpPr>
+          <p:cNvPr id="17" name="r_loop"/>
+          <p:cNvSpPr/>
+          <p:nvPr/>
+        </p:nvSpPr>
+        <p:spPr>
+          <a:xfrm>
+            <a:off x="8369300" y="1917700"/>
+            <a:ext cx="355600" cy="558800"/>
+          </a:xfrm>
+          <a:prstGeom prst="ellipse">
+            <a:avLst/>
+          </a:prstGeom>
+          <a:noFill/>
+          <a:ln w="12700">
+            <a:solidFill>
+              <a:srgbClr val="0E7C7B"/>
+            </a:solidFill>
+            <a:tailEnd type="triangle" w="sm" len="sm"/>
+          </a:ln>
+        </p:spPr>
+        <p:txBody>
+          <a:bodyPr/>
+          <a:lstStyle/>
+          <a:p>
+            <a:endParaRPr/>
+          </a:p>
+        </p:txBody>
+      </p:sp>
+      <p:sp>
+        <p:nvSpPr>
+          <p:cNvPr id="18" name="r_loop_lbl"/>
+          <p:cNvSpPr txBox="1"/>
+          <p:nvPr/>
+        </p:nvSpPr>
+        <p:spPr>
+          <a:xfrm>
+            <a:off x="8801100" y="2019300"/>
+            <a:ext cx="1016000" cy="152400"/>
+          </a:xfrm>
+          <a:prstGeom prst="rect">
+            <a:avLst/>
+          </a:prstGeom>
+          <a:noFill/>
+        </p:spPr>
+        <p:txBody>
+          <a:bodyPr wrap="none" lIns="0" tIns="0" rIns="0" bIns="0"/>
+          <a:lstStyle/>
+          <a:p>
+            <a:pPr algn="l"/>
+            <a:r>
+              <a:rPr lang="en-US" sz="900" b="1" dirty="0">
                 <a:solidFill>
                   <a:srgbClr val="0E7C7B"/>
                 </a:solidFill>
                 <a:latin typeface="Courier New"/>
-              </a:defRPr>
-            </a:pPr>
-            <a:r>
-              <a:t>  READ    ── edit(path)  ──▶ READ  (allowed)</a:t>
-            </a:r>
-          </a:p>
-          <a:p>
-            <a:pPr algn="l">
-              <a:spcAft>
-                <a:spcPts val="300"/>
-              </a:spcAft>
-              <a:defRPr sz="600" b="0">
-                <a:solidFill>
-                  <a:srgbClr val="4A5568"/>
-                </a:solidFill>
-                <a:latin typeface="Trebuchet MS"/>
-              </a:defRPr>
-            </a:pPr>
-          </a:p>
-          <a:p>
-            <a:pPr algn="l">
-              <a:spcAft>
-                <a:spcPts val="300"/>
-              </a:spcAft>
-              <a:defRPr sz="1100" b="0">
-                <a:solidFill>
-                  <a:srgbClr val="4A5568"/>
-                </a:solidFill>
-                <a:latin typeface="Trebuchet MS"/>
-              </a:defRPr>
-            </a:pPr>
-            <a:r>
-              <a:t>This is an ordering property encoded as a DFA — one automaton instance per tracked file.</a:t>
-            </a:r>
-          </a:p>
-          <a:p>
-            <a:pPr algn="l">
-              <a:spcAft>
-                <a:spcPts val="300"/>
-              </a:spcAft>
-              <a:defRPr sz="1100" b="1">
-                <a:solidFill>
-                  <a:srgbClr val="E67E22"/>
-                </a:solidFill>
-                <a:latin typeface="Trebuchet MS"/>
-              </a:defRPr>
-            </a:pPr>
-            <a:r>
-              <a:t>Claude Code actually enforces this: you must Read before Edit.</a:t>
+              </a:rPr>
+              <a:t>read / edit</a:t>
             </a:r>
           </a:p>
         </p:txBody>
       </p:sp>
     </p:spTree>
+    <p:extLst>
+      <p:ext uri="{BB962C8B-B14F-4D97-AF65-F5344CB8AC3E}">
+        <p14:creationId xmlns:p14="http://schemas.microsoft.com/office/powerpoint/2010/main" val="1799488850"/>
+      </p:ext>
+    </p:extLst>
   </p:cSld>
   <p:clrMapOvr>
     <a:masterClrMapping/>
@@ -5910,7 +6580,7 @@
 </file>
 
 <file path=ppt/slides/slide16.xml><?xml version="1.0" encoding="utf-8"?>
-<p:sld xmlns:a="http://schemas.openxmlformats.org/drawingml/2006/main" xmlns:p="http://schemas.openxmlformats.org/presentationml/2006/main" xmlns:r="http://schemas.openxmlformats.org/officeDocument/2006/relationships">
+<p:sld xmlns:a="http://schemas.openxmlformats.org/drawingml/2006/main" xmlns:r="http://schemas.openxmlformats.org/officeDocument/2006/relationships" xmlns:p="http://schemas.openxmlformats.org/presentationml/2006/main">
   <p:cSld>
     <p:spTree>
       <p:nvGrpSpPr>
@@ -5918,7 +6588,14 @@
         <p:cNvGrpSpPr/>
         <p:nvPr/>
       </p:nvGrpSpPr>
-      <p:grpSpPr/>
+      <p:grpSpPr>
+        <a:xfrm>
+          <a:off x="0" y="0"/>
+          <a:ext cx="0" cy="0"/>
+          <a:chOff x="0" y="0"/>
+          <a:chExt cx="0" cy="0"/>
+        </a:xfrm>
+      </p:grpSpPr>
       <p:sp>
         <p:nvSpPr>
           <p:cNvPr id="2" name="TextBox 1"/>
@@ -6112,6 +6789,7 @@
                 <a:latin typeface="Trebuchet MS"/>
               </a:defRPr>
             </a:pPr>
+            <a:endParaRPr/>
           </a:p>
           <a:p>
             <a:pPr algn="l">
@@ -6189,6 +6867,7 @@
                 <a:latin typeface="Trebuchet MS"/>
               </a:defRPr>
             </a:pPr>
+            <a:endParaRPr/>
           </a:p>
           <a:p>
             <a:pPr algn="l">
@@ -6218,6 +6897,7 @@
                 <a:latin typeface="Trebuchet MS"/>
               </a:defRPr>
             </a:pPr>
+            <a:endParaRPr/>
           </a:p>
           <a:p>
             <a:pPr algn="l">
@@ -6263,6 +6943,7 @@
                 <a:latin typeface="Trebuchet MS"/>
               </a:defRPr>
             </a:pPr>
+            <a:endParaRPr/>
           </a:p>
           <a:p>
             <a:pPr algn="l">
@@ -6307,7 +6988,7 @@
 </file>
 
 <file path=ppt/slides/slide17.xml><?xml version="1.0" encoding="utf-8"?>
-<p:sld xmlns:a="http://schemas.openxmlformats.org/drawingml/2006/main" xmlns:p="http://schemas.openxmlformats.org/presentationml/2006/main" xmlns:r="http://schemas.openxmlformats.org/officeDocument/2006/relationships">
+<p:sld xmlns:a="http://schemas.openxmlformats.org/drawingml/2006/main" xmlns:r="http://schemas.openxmlformats.org/officeDocument/2006/relationships" xmlns:p="http://schemas.openxmlformats.org/presentationml/2006/main">
   <p:cSld>
     <p:spTree>
       <p:nvGrpSpPr>
@@ -6315,7 +6996,14 @@
         <p:cNvGrpSpPr/>
         <p:nvPr/>
       </p:nvGrpSpPr>
-      <p:grpSpPr/>
+      <p:grpSpPr>
+        <a:xfrm>
+          <a:off x="0" y="0"/>
+          <a:ext cx="0" cy="0"/>
+          <a:chOff x="0" y="0"/>
+          <a:chExt cx="0" cy="0"/>
+        </a:xfrm>
+      </p:grpSpPr>
       <p:sp>
         <p:nvSpPr>
           <p:cNvPr id="2" name="TextBox 1"/>
@@ -6509,6 +7197,7 @@
                 <a:latin typeface="Trebuchet MS"/>
               </a:defRPr>
             </a:pPr>
+            <a:endParaRPr/>
           </a:p>
           <a:p>
             <a:pPr algn="l">
@@ -6538,6 +7227,7 @@
                 <a:latin typeface="Trebuchet MS"/>
               </a:defRPr>
             </a:pPr>
+            <a:endParaRPr/>
           </a:p>
           <a:p>
             <a:pPr algn="l">
@@ -6567,6 +7257,7 @@
                 <a:latin typeface="Trebuchet MS"/>
               </a:defRPr>
             </a:pPr>
+            <a:endParaRPr/>
           </a:p>
           <a:p>
             <a:pPr algn="l">
@@ -6596,6 +7287,7 @@
                 <a:latin typeface="Trebuchet MS"/>
               </a:defRPr>
             </a:pPr>
+            <a:endParaRPr/>
           </a:p>
           <a:p>
             <a:pPr algn="l">
@@ -6625,6 +7317,7 @@
                 <a:latin typeface="Trebuchet MS"/>
               </a:defRPr>
             </a:pPr>
+            <a:endParaRPr/>
           </a:p>
           <a:p>
             <a:pPr algn="l">
@@ -6654,6 +7347,7 @@
                 <a:latin typeface="Trebuchet MS"/>
               </a:defRPr>
             </a:pPr>
+            <a:endParaRPr/>
           </a:p>
           <a:p>
             <a:pPr algn="l">
@@ -6698,7 +7392,7 @@
 </file>
 
 <file path=ppt/slides/slide18.xml><?xml version="1.0" encoding="utf-8"?>
-<p:sld xmlns:a="http://schemas.openxmlformats.org/drawingml/2006/main" xmlns:p="http://schemas.openxmlformats.org/presentationml/2006/main" xmlns:r="http://schemas.openxmlformats.org/officeDocument/2006/relationships">
+<p:sld xmlns:a="http://schemas.openxmlformats.org/drawingml/2006/main" xmlns:r="http://schemas.openxmlformats.org/officeDocument/2006/relationships" xmlns:p="http://schemas.openxmlformats.org/presentationml/2006/main">
   <p:cSld>
     <p:spTree>
       <p:nvGrpSpPr>
@@ -6706,7 +7400,14 @@
         <p:cNvGrpSpPr/>
         <p:nvPr/>
       </p:nvGrpSpPr>
-      <p:grpSpPr/>
+      <p:grpSpPr>
+        <a:xfrm>
+          <a:off x="0" y="0"/>
+          <a:ext cx="0" cy="0"/>
+          <a:chOff x="0" y="0"/>
+          <a:chExt cx="0" cy="0"/>
+        </a:xfrm>
+      </p:grpSpPr>
       <p:sp>
         <p:nvSpPr>
           <p:cNvPr id="2" name="TextBox 1"/>
@@ -6900,6 +7601,7 @@
                 <a:latin typeface="Trebuchet MS"/>
               </a:defRPr>
             </a:pPr>
+            <a:endParaRPr/>
           </a:p>
           <a:p>
             <a:pPr algn="l">
@@ -6961,6 +7663,7 @@
                 <a:latin typeface="Trebuchet MS"/>
               </a:defRPr>
             </a:pPr>
+            <a:endParaRPr/>
           </a:p>
           <a:p>
             <a:pPr algn="l">
@@ -6990,6 +7693,7 @@
                 <a:latin typeface="Trebuchet MS"/>
               </a:defRPr>
             </a:pPr>
+            <a:endParaRPr/>
           </a:p>
           <a:p>
             <a:pPr algn="l">
@@ -7083,6 +7787,7 @@
                 <a:latin typeface="Trebuchet MS"/>
               </a:defRPr>
             </a:pPr>
+            <a:endParaRPr/>
           </a:p>
           <a:p>
             <a:pPr algn="l">
@@ -7111,7 +7816,7 @@
 </file>
 
 <file path=ppt/slides/slide19.xml><?xml version="1.0" encoding="utf-8"?>
-<p:sld xmlns:a="http://schemas.openxmlformats.org/drawingml/2006/main" xmlns:p="http://schemas.openxmlformats.org/presentationml/2006/main" xmlns:r="http://schemas.openxmlformats.org/officeDocument/2006/relationships">
+<p:sld xmlns:a="http://schemas.openxmlformats.org/drawingml/2006/main" xmlns:r="http://schemas.openxmlformats.org/officeDocument/2006/relationships" xmlns:p="http://schemas.openxmlformats.org/presentationml/2006/main">
   <p:cSld>
     <p:spTree>
       <p:nvGrpSpPr>
@@ -7119,7 +7824,14 @@
         <p:cNvGrpSpPr/>
         <p:nvPr/>
       </p:nvGrpSpPr>
-      <p:grpSpPr/>
+      <p:grpSpPr>
+        <a:xfrm>
+          <a:off x="0" y="0"/>
+          <a:ext cx="0" cy="0"/>
+          <a:chOff x="0" y="0"/>
+          <a:chExt cx="0" cy="0"/>
+        </a:xfrm>
+      </p:grpSpPr>
       <p:sp>
         <p:nvSpPr>
           <p:cNvPr id="2" name="TextBox 1"/>
@@ -7272,8 +7984,8 @@
         </p:nvSpPr>
         <p:spPr>
           <a:xfrm>
-            <a:off x="502920" y="1005840"/>
-            <a:ext cx="8229600" cy="3657600"/>
+            <a:off x="508000" y="1003300"/>
+            <a:ext cx="4826000" cy="3231654"/>
           </a:xfrm>
           <a:prstGeom prst="rect">
             <a:avLst/>
@@ -7313,6 +8025,7 @@
                 <a:latin typeface="Trebuchet MS"/>
               </a:defRPr>
             </a:pPr>
+            <a:endParaRPr/>
           </a:p>
           <a:p>
             <a:pPr algn="l">
@@ -7390,6 +8103,7 @@
                 <a:latin typeface="Trebuchet MS"/>
               </a:defRPr>
             </a:pPr>
+            <a:endParaRPr/>
           </a:p>
           <a:p>
             <a:pPr algn="l">
@@ -7435,6 +8149,7 @@
                 <a:latin typeface="Trebuchet MS"/>
               </a:defRPr>
             </a:pPr>
+            <a:endParaRPr/>
           </a:p>
           <a:p>
             <a:pPr algn="l">
@@ -7534,7 +8249,234 @@
           </a:p>
         </p:txBody>
       </p:sp>
+      <p:sp>
+        <p:nvSpPr>
+          <p:cNvPr id="7" name="smt_card"/>
+          <p:cNvSpPr/>
+          <p:nvPr/>
+        </p:nvSpPr>
+        <p:spPr>
+          <a:xfrm>
+            <a:off x="5524500" y="1079500"/>
+            <a:ext cx="3175000" cy="3556000"/>
+          </a:xfrm>
+          <a:prstGeom prst="roundRect">
+            <a:avLst>
+              <a:gd name="adj" fmla="val 6000"/>
+            </a:avLst>
+          </a:prstGeom>
+          <a:solidFill>
+            <a:srgbClr val="F4F7FA"/>
+          </a:solidFill>
+          <a:ln w="9525">
+            <a:solidFill>
+              <a:srgbClr val="0E7C7B"/>
+            </a:solidFill>
+          </a:ln>
+        </p:spPr>
+        <p:txBody>
+          <a:bodyPr/>
+          <a:lstStyle/>
+          <a:p>
+            <a:endParaRPr/>
+          </a:p>
+        </p:txBody>
+      </p:sp>
+      <p:sp>
+        <p:nvSpPr>
+          <p:cNvPr id="8" name="smt_text"/>
+          <p:cNvSpPr txBox="1"/>
+          <p:nvPr/>
+        </p:nvSpPr>
+        <p:spPr>
+          <a:xfrm>
+            <a:off x="5715000" y="1206500"/>
+            <a:ext cx="2857500" cy="3302000"/>
+          </a:xfrm>
+          <a:prstGeom prst="rect">
+            <a:avLst/>
+          </a:prstGeom>
+          <a:noFill/>
+        </p:spPr>
+        <p:txBody>
+          <a:bodyPr wrap="square" lIns="36000" tIns="36000" rIns="36000" bIns="36000"/>
+          <a:lstStyle/>
+          <a:p>
+            <a:pPr algn="l">
+              <a:spcAft>
+                <a:spcPts val="200"/>
+              </a:spcAft>
+            </a:pPr>
+            <a:r>
+              <a:rPr lang="en-US" sz="1200" b="1" dirty="0">
+                <a:solidFill>
+                  <a:srgbClr val="0E7C7B"/>
+                </a:solidFill>
+                <a:latin typeface="Trebuchet MS"/>
+              </a:rPr>
+              <a:t>High-level property</a:t>
+            </a:r>
+          </a:p>
+          <a:p>
+            <a:pPr algn="l">
+              <a:spcAft>
+                <a:spcPts val="300"/>
+              </a:spcAft>
+            </a:pPr>
+            <a:r>
+              <a:rPr lang="en-US" sz="1000" b="0" dirty="0">
+                <a:solidFill>
+                  <a:srgbClr val="4A5568"/>
+                </a:solidFill>
+                <a:latin typeface="Trebuchet MS"/>
+              </a:rPr>
+              <a:t>“Every write must target a path inside the sandbox.”</a:t>
+            </a:r>
+          </a:p>
+          <a:p>
+            <a:pPr>
+              <a:defRPr sz="400"/>
+            </a:pPr>
+            <a:endParaRPr/>
+          </a:p>
+          <a:p>
+            <a:pPr algn="l">
+              <a:spcAft>
+                <a:spcPts val="200"/>
+              </a:spcAft>
+            </a:pPr>
+            <a:r>
+              <a:rPr lang="en-US" sz="1000" b="1" dirty="0">
+                <a:solidFill>
+                  <a:srgbClr val="1B2A4A"/>
+                </a:solidFill>
+                <a:latin typeface="Trebuchet MS"/>
+              </a:rPr>
+              <a:t>As an SMT formula:</a:t>
+            </a:r>
+          </a:p>
+          <a:p>
+            <a:pPr>
+              <a:defRPr sz="300"/>
+            </a:pPr>
+            <a:endParaRPr/>
+          </a:p>
+          <a:p>
+            <a:pPr algn="l">
+              <a:spcAft>
+                <a:spcPts val="200"/>
+              </a:spcAft>
+            </a:pPr>
+            <a:r>
+              <a:rPr lang="en-US" sz="1100" b="0" dirty="0">
+                <a:solidFill>
+                  <a:srgbClr val="1B2A4A"/>
+                </a:solidFill>
+                <a:latin typeface="Cambria Math"/>
+              </a:rPr>
+              <a:t>∀ i ∈ {0,1,2}.</a:t>
+            </a:r>
+          </a:p>
+          <a:p>
+            <a:pPr algn="l">
+              <a:spcAft>
+                <a:spcPts val="300"/>
+              </a:spcAft>
+            </a:pPr>
+            <a:r>
+              <a:rPr lang="en-US" sz="1100" b="0" dirty="0">
+                <a:solidFill>
+                  <a:srgbClr val="1B2A4A"/>
+                </a:solidFill>
+                <a:latin typeface="Cambria Math"/>
+              </a:rPr>
+              <a:t>    aᵢ = write  ⟹  sandboxᵢ</a:t>
+            </a:r>
+          </a:p>
+          <a:p>
+            <a:pPr>
+              <a:defRPr sz="400"/>
+            </a:pPr>
+            <a:endParaRPr/>
+          </a:p>
+          <a:p>
+            <a:pPr algn="l">
+              <a:spcAft>
+                <a:spcPts val="200"/>
+              </a:spcAft>
+            </a:pPr>
+            <a:r>
+              <a:rPr lang="en-US" sz="1000" b="1" dirty="0">
+                <a:solidFill>
+                  <a:srgbClr val="1B2A4A"/>
+                </a:solidFill>
+                <a:latin typeface="Trebuchet MS"/>
+              </a:rPr>
+              <a:t>Z3 checks  ¬φ  (negation):</a:t>
+            </a:r>
+          </a:p>
+          <a:p>
+            <a:pPr algn="l">
+              <a:spcAft>
+                <a:spcPts val="200"/>
+              </a:spcAft>
+            </a:pPr>
+            <a:r>
+              <a:rPr lang="en-US" sz="1100" b="0" dirty="0">
+                <a:solidFill>
+                  <a:srgbClr val="C0392B"/>
+                </a:solidFill>
+                <a:latin typeface="Cambria Math"/>
+              </a:rPr>
+              <a:t>∃ i. aᵢ = write ∧ ¬ sandboxᵢ</a:t>
+            </a:r>
+          </a:p>
+          <a:p>
+            <a:pPr>
+              <a:defRPr sz="300"/>
+            </a:pPr>
+            <a:endParaRPr/>
+          </a:p>
+          <a:p>
+            <a:pPr algn="l">
+              <a:spcAft>
+                <a:spcPts val="150"/>
+              </a:spcAft>
+            </a:pPr>
+            <a:r>
+              <a:rPr lang="en-US" sz="950" b="0" dirty="0">
+                <a:solidFill>
+                  <a:srgbClr val="C0392B"/>
+                </a:solidFill>
+                <a:latin typeface="Trebuchet MS"/>
+              </a:rPr>
+              <a:t>sat   → counterexample trace</a:t>
+            </a:r>
+          </a:p>
+          <a:p>
+            <a:pPr algn="l">
+              <a:spcAft>
+                <a:spcPts val="150"/>
+              </a:spcAft>
+            </a:pPr>
+            <a:r>
+              <a:rPr lang="en-US" sz="950" b="0" dirty="0">
+                <a:solidFill>
+                  <a:srgbClr val="0E7C7B"/>
+                </a:solidFill>
+                <a:latin typeface="Trebuchet MS"/>
+              </a:rPr>
+              <a:t>unsat → property holds for length 3</a:t>
+            </a:r>
+          </a:p>
+        </p:txBody>
+      </p:sp>
     </p:spTree>
+    <p:extLst>
+      <p:ext uri="{BB962C8B-B14F-4D97-AF65-F5344CB8AC3E}">
+        <p14:creationId xmlns:p14="http://schemas.microsoft.com/office/powerpoint/2010/main" val="3417381151"/>
+      </p:ext>
+    </p:extLst>
   </p:cSld>
   <p:clrMapOvr>
     <a:masterClrMapping/>
@@ -7543,7 +8485,7 @@
 </file>
 
 <file path=ppt/slides/slide2.xml><?xml version="1.0" encoding="utf-8"?>
-<p:sld xmlns:a="http://schemas.openxmlformats.org/drawingml/2006/main" xmlns:p="http://schemas.openxmlformats.org/presentationml/2006/main" xmlns:r="http://schemas.openxmlformats.org/officeDocument/2006/relationships">
+<p:sld xmlns:a="http://schemas.openxmlformats.org/drawingml/2006/main" xmlns:r="http://schemas.openxmlformats.org/officeDocument/2006/relationships" xmlns:p="http://schemas.openxmlformats.org/presentationml/2006/main">
   <p:cSld>
     <p:spTree>
       <p:nvGrpSpPr>
@@ -7551,7 +8493,14 @@
         <p:cNvGrpSpPr/>
         <p:nvPr/>
       </p:nvGrpSpPr>
-      <p:grpSpPr/>
+      <p:grpSpPr>
+        <a:xfrm>
+          <a:off x="0" y="0"/>
+          <a:ext cx="0" cy="0"/>
+          <a:chOff x="0" y="0"/>
+          <a:chExt cx="0" cy="0"/>
+        </a:xfrm>
+      </p:grpSpPr>
       <p:sp>
         <p:nvSpPr>
           <p:cNvPr id="2" name="TextBox 1"/>
@@ -7725,6 +8674,7 @@
                 <a:latin typeface="Trebuchet MS"/>
               </a:defRPr>
             </a:pPr>
+            <a:endParaRPr/>
           </a:p>
           <a:p>
             <a:pPr algn="l">
@@ -7770,6 +8720,7 @@
                 <a:latin typeface="Trebuchet MS"/>
               </a:defRPr>
             </a:pPr>
+            <a:endParaRPr/>
           </a:p>
           <a:p>
             <a:pPr algn="l">
@@ -7815,6 +8766,7 @@
                 <a:latin typeface="Trebuchet MS"/>
               </a:defRPr>
             </a:pPr>
+            <a:endParaRPr/>
           </a:p>
           <a:p>
             <a:pPr algn="l">
@@ -7859,7 +8811,7 @@
 </file>
 
 <file path=ppt/slides/slide20.xml><?xml version="1.0" encoding="utf-8"?>
-<p:sld xmlns:a="http://schemas.openxmlformats.org/drawingml/2006/main" xmlns:p="http://schemas.openxmlformats.org/presentationml/2006/main" xmlns:r="http://schemas.openxmlformats.org/officeDocument/2006/relationships">
+<p:sld xmlns:a="http://schemas.openxmlformats.org/drawingml/2006/main" xmlns:r="http://schemas.openxmlformats.org/officeDocument/2006/relationships" xmlns:p="http://schemas.openxmlformats.org/presentationml/2006/main">
   <p:cSld>
     <p:spTree>
       <p:nvGrpSpPr>
@@ -7867,7 +8819,14 @@
         <p:cNvGrpSpPr/>
         <p:nvPr/>
       </p:nvGrpSpPr>
-      <p:grpSpPr/>
+      <p:grpSpPr>
+        <a:xfrm>
+          <a:off x="0" y="0"/>
+          <a:ext cx="0" cy="0"/>
+          <a:chOff x="0" y="0"/>
+          <a:chExt cx="0" cy="0"/>
+        </a:xfrm>
+      </p:grpSpPr>
       <p:sp>
         <p:nvSpPr>
           <p:cNvPr id="2" name="TextBox 1"/>
@@ -7935,7 +8894,7 @@
               </a:defRPr>
             </a:pPr>
             <a:r>
-              <a:t>Bounded vs. Runtime Verification</a:t>
+              <a:t>Example: Permission Escalation Detection</a:t>
             </a:r>
           </a:p>
         </p:txBody>
@@ -8007,7 +8966,7 @@
               </a:defRPr>
             </a:pPr>
             <a:r>
-              <a:t>22</a:t>
+              <a:t>20</a:t>
             </a:r>
           </a:p>
         </p:txBody>
@@ -8020,8 +8979,8 @@
         </p:nvSpPr>
         <p:spPr>
           <a:xfrm>
-            <a:off x="502920" y="1051560"/>
-            <a:ext cx="3931920" cy="3200400"/>
+            <a:off x="508000" y="965200"/>
+            <a:ext cx="4699000" cy="3424014"/>
           </a:xfrm>
           <a:prstGeom prst="rect">
             <a:avLst/>
@@ -8038,284 +8997,633 @@
               <a:spcAft>
                 <a:spcPts val="300"/>
               </a:spcAft>
-              <a:defRPr sz="1150" b="1">
+            </a:pPr>
+            <a:r>
+              <a:rPr lang="en-US" sz="1100" b="1" dirty="0">
+                <a:solidFill>
+                  <a:srgbClr val="1B2A4A"/>
+                </a:solidFill>
+                <a:latin typeface="Trebuchet MS"/>
+              </a:rPr>
+              <a:t>Can an agent chain 3 tool calls to escalate from USER to ROOT?</a:t>
+            </a:r>
+          </a:p>
+          <a:p>
+            <a:pPr>
+              <a:defRPr sz="400"/>
+            </a:pPr>
+            <a:endParaRPr/>
+          </a:p>
+          <a:p>
+            <a:pPr algn="l">
+              <a:spcAft>
+                <a:spcPts val="200"/>
+              </a:spcAft>
+            </a:pPr>
+            <a:r>
+              <a:rPr lang="en-US" sz="800" b="0" dirty="0">
+                <a:solidFill>
+                  <a:srgbClr val="1B2A4A"/>
+                </a:solidFill>
+                <a:latin typeface="Courier New"/>
+              </a:rPr>
+              <a:t>from z3 import *</a:t>
+            </a:r>
+          </a:p>
+          <a:p>
+            <a:pPr algn="l">
+              <a:spcAft>
+                <a:spcPts val="200"/>
+              </a:spcAft>
+            </a:pPr>
+            <a:r>
+              <a:rPr lang="en-US" sz="800" b="0" dirty="0">
+                <a:solidFill>
+                  <a:srgbClr val="1B2A4A"/>
+                </a:solidFill>
+                <a:latin typeface="Courier New"/>
+              </a:rPr>
+              <a:t>USER, ADMIN, ROOT = 0, 1, 2</a:t>
+            </a:r>
+          </a:p>
+          <a:p>
+            <a:pPr algn="l">
+              <a:spcAft>
+                <a:spcPts val="200"/>
+              </a:spcAft>
+            </a:pPr>
+            <a:r>
+              <a:rPr lang="en-US" sz="800" b="0" dirty="0">
+                <a:solidFill>
+                  <a:srgbClr val="1B2A4A"/>
+                </a:solidFill>
+                <a:latin typeface="Courier New"/>
+              </a:rPr>
+              <a:t>READ, SUDO, EDIT_CFG = 0, 1, 2</a:t>
+            </a:r>
+          </a:p>
+          <a:p>
+            <a:pPr>
+              <a:defRPr sz="200"/>
+            </a:pPr>
+            <a:endParaRPr/>
+          </a:p>
+          <a:p>
+            <a:pPr algn="l">
+              <a:spcAft>
+                <a:spcPts val="200"/>
+              </a:spcAft>
+            </a:pPr>
+            <a:r>
+              <a:rPr lang="en-US" sz="800" b="0" dirty="0">
+                <a:solidFill>
+                  <a:srgbClr val="1B2A4A"/>
+                </a:solidFill>
+                <a:latin typeface="Courier New"/>
+              </a:rPr>
+              <a:t>perm = [Int(f"perm_{i}") for i in range(4)]</a:t>
+            </a:r>
+          </a:p>
+          <a:p>
+            <a:pPr algn="l">
+              <a:spcAft>
+                <a:spcPts val="200"/>
+              </a:spcAft>
+            </a:pPr>
+            <a:r>
+              <a:rPr lang="en-US" sz="800" b="0" dirty="0">
+                <a:solidFill>
+                  <a:srgbClr val="1B2A4A"/>
+                </a:solidFill>
+                <a:latin typeface="Courier New"/>
+              </a:rPr>
+              <a:t>act  = [Int(f"act_{i}")  for i in range(3)]</a:t>
+            </a:r>
+          </a:p>
+          <a:p>
+            <a:pPr algn="l">
+              <a:spcAft>
+                <a:spcPts val="200"/>
+              </a:spcAft>
+            </a:pPr>
+            <a:r>
+              <a:rPr lang="en-US" sz="800" b="0" dirty="0">
+                <a:solidFill>
+                  <a:srgbClr val="1B2A4A"/>
+                </a:solidFill>
+                <a:latin typeface="Courier New"/>
+              </a:rPr>
+              <a:t>s = Solver()</a:t>
+            </a:r>
+          </a:p>
+          <a:p>
+            <a:pPr algn="l">
+              <a:spcAft>
+                <a:spcPts val="200"/>
+              </a:spcAft>
+            </a:pPr>
+            <a:r>
+              <a:rPr lang="en-US" sz="800" b="0" dirty="0">
+                <a:solidFill>
+                  <a:srgbClr val="1B2A4A"/>
+                </a:solidFill>
+                <a:latin typeface="Courier New"/>
+              </a:rPr>
+              <a:t>s.add(perm[0] == USER)                  # start unprivileged</a:t>
+            </a:r>
+          </a:p>
+          <a:p>
+            <a:pPr algn="l">
+              <a:spcAft>
+                <a:spcPts val="200"/>
+              </a:spcAft>
+            </a:pPr>
+            <a:r>
+              <a:rPr lang="en-US" sz="800" b="0" dirty="0">
+                <a:solidFill>
+                  <a:srgbClr val="1B2A4A"/>
+                </a:solidFill>
+                <a:latin typeface="Courier New"/>
+              </a:rPr>
+              <a:t>for i in range(3):                      # encode transitions</a:t>
+            </a:r>
+          </a:p>
+          <a:p>
+            <a:pPr algn="l">
+              <a:spcAft>
+                <a:spcPts val="200"/>
+              </a:spcAft>
+            </a:pPr>
+            <a:r>
+              <a:rPr lang="en-US" sz="800" b="0" dirty="0">
+                <a:solidFill>
+                  <a:srgbClr val="1B2A4A"/>
+                </a:solidFill>
+                <a:latin typeface="Courier New"/>
+              </a:rPr>
+              <a:t>    s.add(And(act[i] &gt;= 0, act[i] &lt;= 2))</a:t>
+            </a:r>
+          </a:p>
+          <a:p>
+            <a:pPr algn="l">
+              <a:spcAft>
+                <a:spcPts val="200"/>
+              </a:spcAft>
+            </a:pPr>
+            <a:r>
+              <a:rPr lang="en-US" sz="800" b="0" dirty="0">
+                <a:solidFill>
+                  <a:srgbClr val="1B2A4A"/>
+                </a:solidFill>
+                <a:latin typeface="Courier New"/>
+              </a:rPr>
+              <a:t>    s.add(perm[i+1] ==</a:t>
+            </a:r>
+          </a:p>
+          <a:p>
+            <a:pPr algn="l">
+              <a:spcAft>
+                <a:spcPts val="200"/>
+              </a:spcAft>
+            </a:pPr>
+            <a:r>
+              <a:rPr lang="en-US" sz="800" b="0" dirty="0">
+                <a:solidFill>
+                  <a:srgbClr val="1B2A4A"/>
+                </a:solidFill>
+                <a:latin typeface="Courier New"/>
+              </a:rPr>
+              <a:t>      If(And(act[i]==EDIT_CFG,           # USER → ADMIN</a:t>
+            </a:r>
+          </a:p>
+          <a:p>
+            <a:pPr algn="l">
+              <a:spcAft>
+                <a:spcPts val="200"/>
+              </a:spcAft>
+            </a:pPr>
+            <a:r>
+              <a:rPr lang="en-US" sz="800" b="0" dirty="0">
+                <a:solidFill>
+                  <a:srgbClr val="1B2A4A"/>
+                </a:solidFill>
+                <a:latin typeface="Courier New"/>
+              </a:rPr>
+              <a:t>             perm[i]==USER), ADMIN,</a:t>
+            </a:r>
+          </a:p>
+          <a:p>
+            <a:pPr algn="l">
+              <a:spcAft>
+                <a:spcPts val="200"/>
+              </a:spcAft>
+            </a:pPr>
+            <a:r>
+              <a:rPr lang="en-US" sz="800" b="0" dirty="0">
+                <a:solidFill>
+                  <a:srgbClr val="1B2A4A"/>
+                </a:solidFill>
+                <a:latin typeface="Courier New"/>
+              </a:rPr>
+              <a:t>      If(And(act[i]==SUDO,               # ADMIN → ROOT</a:t>
+            </a:r>
+          </a:p>
+          <a:p>
+            <a:pPr algn="l">
+              <a:spcAft>
+                <a:spcPts val="200"/>
+              </a:spcAft>
+            </a:pPr>
+            <a:r>
+              <a:rPr lang="en-US" sz="800" b="0" dirty="0">
+                <a:solidFill>
+                  <a:srgbClr val="1B2A4A"/>
+                </a:solidFill>
+                <a:latin typeface="Courier New"/>
+              </a:rPr>
+              <a:t>             perm[i]==ADMIN), ROOT,</a:t>
+            </a:r>
+          </a:p>
+          <a:p>
+            <a:pPr algn="l">
+              <a:spcAft>
+                <a:spcPts val="200"/>
+              </a:spcAft>
+            </a:pPr>
+            <a:r>
+              <a:rPr lang="en-US" sz="800" b="0" dirty="0">
+                <a:solidFill>
+                  <a:srgbClr val="1B2A4A"/>
+                </a:solidFill>
+                <a:latin typeface="Courier New"/>
+              </a:rPr>
+              <a:t>             perm[i])))                  # otherwise: no change</a:t>
+            </a:r>
+          </a:p>
+          <a:p>
+            <a:pPr>
+              <a:defRPr sz="200"/>
+            </a:pPr>
+            <a:endParaRPr/>
+          </a:p>
+          <a:p>
+            <a:pPr algn="l">
+              <a:spcAft>
+                <a:spcPts val="200"/>
+              </a:spcAft>
+            </a:pPr>
+            <a:r>
+              <a:rPr lang="en-US" sz="800" b="0" dirty="0">
+                <a:solidFill>
+                  <a:srgbClr val="C0392B"/>
+                </a:solidFill>
+                <a:latin typeface="Courier New"/>
+              </a:rPr>
+              <a:t>s.add(perm[3] == ROOT)                  # goal: reach ROOT</a:t>
+            </a:r>
+          </a:p>
+          <a:p>
+            <a:pPr algn="l">
+              <a:spcAft>
+                <a:spcPts val="200"/>
+              </a:spcAft>
+            </a:pPr>
+            <a:r>
+              <a:rPr lang="en-US" sz="800" b="1" dirty="0">
                 <a:solidFill>
                   <a:srgbClr val="0E7C7B"/>
                 </a:solidFill>
-                <a:latin typeface="Trebuchet MS"/>
-              </a:defRPr>
-            </a:pPr>
-            <a:r>
-              <a:t>Runtime Monitor</a:t>
-            </a:r>
-          </a:p>
-          <a:p>
-            <a:pPr algn="l">
-              <a:spcAft>
-                <a:spcPts val="300"/>
-              </a:spcAft>
-              <a:defRPr sz="1100" b="0">
-                <a:solidFill>
-                  <a:srgbClr val="4A5568"/>
-                </a:solidFill>
-                <a:latin typeface="Trebuchet MS"/>
-              </a:defRPr>
-            </a:pPr>
-            <a:r>
-              <a:t>•  Checks one actual trace</a:t>
-            </a:r>
-          </a:p>
-          <a:p>
-            <a:pPr algn="l">
-              <a:spcAft>
-                <a:spcPts val="300"/>
-              </a:spcAft>
-              <a:defRPr sz="1100" b="0">
-                <a:solidFill>
-                  <a:srgbClr val="4A5568"/>
-                </a:solidFill>
-                <a:latin typeface="Trebuchet MS"/>
-              </a:defRPr>
-            </a:pPr>
-            <a:r>
-              <a:t>•  O(n) per trace</a:t>
-            </a:r>
-          </a:p>
-          <a:p>
-            <a:pPr algn="l">
-              <a:spcAft>
-                <a:spcPts val="300"/>
-              </a:spcAft>
-              <a:defRPr sz="1100" b="0">
-                <a:solidFill>
-                  <a:srgbClr val="4A5568"/>
-                </a:solidFill>
-                <a:latin typeface="Trebuchet MS"/>
-              </a:defRPr>
-            </a:pPr>
-            <a:r>
-              <a:t>•  Can stop agent in real time</a:t>
-            </a:r>
-          </a:p>
-          <a:p>
-            <a:pPr algn="l">
-              <a:spcAft>
-                <a:spcPts val="300"/>
-              </a:spcAft>
-              <a:defRPr sz="1100" b="0">
+                <a:latin typeface="Courier New"/>
+              </a:rPr>
+              <a:t>print(s.check())   # sat!</a:t>
+            </a:r>
+          </a:p>
+          <a:p>
+            <a:pPr algn="l">
+              <a:spcAft>
+                <a:spcPts val="200"/>
+              </a:spcAft>
+            </a:pPr>
+            <a:r>
+              <a:rPr lang="en-US" sz="800" b="1" dirty="0">
+                <a:solidFill>
+                  <a:srgbClr val="0E7C7B"/>
+                </a:solidFill>
+                <a:latin typeface="Courier New"/>
+              </a:rPr>
+              <a:t>print(s.model())   # act_0=EDIT_CFG, act_1=SUDO, act_2=READ</a:t>
+            </a:r>
+          </a:p>
+          <a:p>
+            <a:pPr>
+              <a:defRPr sz="300"/>
+            </a:pPr>
+            <a:endParaRPr/>
+          </a:p>
+          <a:p>
+            <a:pPr algn="l">
+              <a:spcAft>
+                <a:spcPts val="300"/>
+              </a:spcAft>
+            </a:pPr>
+            <a:r>
+              <a:rPr lang="en-US" sz="900" b="1" dirty="0">
                 <a:solidFill>
                   <a:srgbClr val="E67E22"/>
                 </a:solidFill>
                 <a:latin typeface="Trebuchet MS"/>
-              </a:defRPr>
-            </a:pPr>
-            <a:r>
-              <a:t>•  Misses traces not taken</a:t>
-            </a:r>
-          </a:p>
-          <a:p>
-            <a:pPr algn="l">
-              <a:spcAft>
-                <a:spcPts val="300"/>
-              </a:spcAft>
-              <a:defRPr sz="600" b="0">
-                <a:solidFill>
-                  <a:srgbClr val="4A5568"/>
-                </a:solidFill>
-                <a:latin typeface="Trebuchet MS"/>
-              </a:defRPr>
-            </a:pPr>
-          </a:p>
-          <a:p>
-            <a:pPr algn="l">
-              <a:spcAft>
-                <a:spcPts val="300"/>
-              </a:spcAft>
-              <a:defRPr sz="1100" b="1">
+              </a:rPr>
+              <a:t>→ Z3 found a 2-step escalation: edit_config then sudo. A monitor should block edit_config for USER.</a:t>
+            </a:r>
+          </a:p>
+        </p:txBody>
+      </p:sp>
+      <p:sp>
+        <p:nvSpPr>
+          <p:cNvPr id="7" name="smt_card"/>
+          <p:cNvSpPr/>
+          <p:nvPr/>
+        </p:nvSpPr>
+        <p:spPr>
+          <a:xfrm>
+            <a:off x="5334000" y="1041400"/>
+            <a:ext cx="3365500" cy="3759200"/>
+          </a:xfrm>
+          <a:prstGeom prst="roundRect">
+            <a:avLst>
+              <a:gd name="adj" fmla="val 6000"/>
+            </a:avLst>
+          </a:prstGeom>
+          <a:solidFill>
+            <a:srgbClr val="F4F7FA"/>
+          </a:solidFill>
+          <a:ln w="9525">
+            <a:solidFill>
+              <a:srgbClr val="0E7C7B"/>
+            </a:solidFill>
+          </a:ln>
+        </p:spPr>
+        <p:txBody>
+          <a:bodyPr/>
+          <a:lstStyle/>
+          <a:p>
+            <a:endParaRPr/>
+          </a:p>
+        </p:txBody>
+      </p:sp>
+      <p:sp>
+        <p:nvSpPr>
+          <p:cNvPr id="8" name="smt_text"/>
+          <p:cNvSpPr txBox="1"/>
+          <p:nvPr/>
+        </p:nvSpPr>
+        <p:spPr>
+          <a:xfrm>
+            <a:off x="5486400" y="1168400"/>
+            <a:ext cx="3111500" cy="3556000"/>
+          </a:xfrm>
+          <a:prstGeom prst="rect">
+            <a:avLst/>
+          </a:prstGeom>
+          <a:noFill/>
+        </p:spPr>
+        <p:txBody>
+          <a:bodyPr wrap="square" lIns="36000" tIns="36000" rIns="36000" bIns="36000"/>
+          <a:lstStyle/>
+          <a:p>
+            <a:pPr algn="l">
+              <a:spcAft>
+                <a:spcPts val="200"/>
+              </a:spcAft>
+            </a:pPr>
+            <a:r>
+              <a:rPr lang="en-US" sz="1200" b="1" dirty="0">
                 <a:solidFill>
                   <a:srgbClr val="0E7C7B"/>
                 </a:solidFill>
                 <a:latin typeface="Trebuchet MS"/>
-              </a:defRPr>
-            </a:pPr>
-            <a:r>
-              <a:t>Use for: production guardrails</a:t>
-            </a:r>
-          </a:p>
-        </p:txBody>
-      </p:sp>
-      <p:sp>
-        <p:nvSpPr>
-          <p:cNvPr id="7" name="TextBox 6"/>
-          <p:cNvSpPr txBox="1"/>
-          <p:nvPr/>
-        </p:nvSpPr>
-        <p:spPr>
-          <a:xfrm>
-            <a:off x="4800600" y="1051560"/>
-            <a:ext cx="3931920" cy="3200400"/>
-          </a:xfrm>
-          <a:prstGeom prst="rect">
-            <a:avLst/>
-          </a:prstGeom>
-          <a:noFill/>
-        </p:spPr>
-        <p:txBody>
-          <a:bodyPr wrap="square">
-            <a:spAutoFit/>
-          </a:bodyPr>
-          <a:lstStyle/>
-          <a:p>
-            <a:pPr algn="l">
-              <a:spcAft>
-                <a:spcPts val="300"/>
-              </a:spcAft>
-              <a:defRPr sz="1150" b="1">
-                <a:solidFill>
-                  <a:srgbClr val="6C5B7B"/>
-                </a:solidFill>
-                <a:latin typeface="Trebuchet MS"/>
-              </a:defRPr>
-            </a:pPr>
-            <a:r>
-              <a:t>Bounded Verification</a:t>
-            </a:r>
-          </a:p>
-          <a:p>
-            <a:pPr algn="l">
-              <a:spcAft>
-                <a:spcPts val="300"/>
-              </a:spcAft>
-              <a:defRPr sz="1100" b="0">
-                <a:solidFill>
-                  <a:srgbClr val="4A5568"/>
-                </a:solidFill>
-                <a:latin typeface="Trebuchet MS"/>
-              </a:defRPr>
-            </a:pPr>
-            <a:r>
-              <a:t>•  Checks all traces up to length k</a:t>
-            </a:r>
-          </a:p>
-          <a:p>
-            <a:pPr algn="l">
-              <a:spcAft>
-                <a:spcPts val="300"/>
-              </a:spcAft>
-              <a:defRPr sz="1100" b="0">
-                <a:solidFill>
-                  <a:srgbClr val="4A5568"/>
-                </a:solidFill>
-                <a:latin typeface="Trebuchet MS"/>
-              </a:defRPr>
-            </a:pPr>
-            <a:r>
-              <a:t>•  NP-hard (but Z3 is good at it)</a:t>
-            </a:r>
-          </a:p>
-          <a:p>
-            <a:pPr algn="l">
-              <a:spcAft>
-                <a:spcPts val="300"/>
-              </a:spcAft>
-              <a:defRPr sz="1100" b="0">
-                <a:solidFill>
-                  <a:srgbClr val="4A5568"/>
-                </a:solidFill>
-                <a:latin typeface="Trebuchet MS"/>
-              </a:defRPr>
-            </a:pPr>
-            <a:r>
-              <a:t>•  Finds bugs before deployment</a:t>
-            </a:r>
-          </a:p>
-          <a:p>
-            <a:pPr algn="l">
-              <a:spcAft>
-                <a:spcPts val="300"/>
-              </a:spcAft>
-              <a:defRPr sz="1100" b="0">
-                <a:solidFill>
-                  <a:srgbClr val="E67E22"/>
-                </a:solidFill>
-                <a:latin typeface="Trebuchet MS"/>
-              </a:defRPr>
-            </a:pPr>
-            <a:r>
-              <a:t>•  Incomplete beyond k</a:t>
-            </a:r>
-          </a:p>
-          <a:p>
-            <a:pPr algn="l">
-              <a:spcAft>
-                <a:spcPts val="300"/>
-              </a:spcAft>
-              <a:defRPr sz="600" b="0">
-                <a:solidFill>
-                  <a:srgbClr val="4A5568"/>
-                </a:solidFill>
-                <a:latin typeface="Trebuchet MS"/>
-              </a:defRPr>
-            </a:pPr>
-          </a:p>
-          <a:p>
-            <a:pPr algn="l">
-              <a:spcAft>
-                <a:spcPts val="300"/>
-              </a:spcAft>
-              <a:defRPr sz="1100" b="1">
-                <a:solidFill>
-                  <a:srgbClr val="6C5B7B"/>
-                </a:solidFill>
-                <a:latin typeface="Trebuchet MS"/>
-              </a:defRPr>
-            </a:pPr>
-            <a:r>
-              <a:t>Use for: skill auditing, HW2</a:t>
-            </a:r>
-          </a:p>
-        </p:txBody>
-      </p:sp>
-      <p:sp>
-        <p:nvSpPr>
-          <p:cNvPr id="8" name="TextBox 7"/>
-          <p:cNvSpPr txBox="1"/>
-          <p:nvPr/>
-        </p:nvSpPr>
-        <p:spPr>
-          <a:xfrm>
-            <a:off x="502920" y="3566160"/>
-            <a:ext cx="8229600" cy="914400"/>
-          </a:xfrm>
-          <a:prstGeom prst="rect">
-            <a:avLst/>
-          </a:prstGeom>
-          <a:noFill/>
-        </p:spPr>
-        <p:txBody>
-          <a:bodyPr wrap="square">
-            <a:spAutoFit/>
-          </a:bodyPr>
-          <a:lstStyle/>
-          <a:p>
-            <a:pPr algn="l">
-              <a:spcAft>
-                <a:spcPts val="300"/>
-              </a:spcAft>
-              <a:defRPr sz="1150" b="1">
-                <a:solidFill>
-                  <a:srgbClr val="E67E22"/>
-                </a:solidFill>
-                <a:latin typeface="Trebuchet MS"/>
-              </a:defRPr>
-            </a:pPr>
-            <a:r>
-              <a:t>In practice, use both: bounded verification at development time, runtime monitors in production.</a:t>
+              </a:rPr>
+              <a:t>High-level property</a:t>
+            </a:r>
+          </a:p>
+          <a:p>
+            <a:pPr algn="l">
+              <a:spcAft>
+                <a:spcPts val="250"/>
+              </a:spcAft>
+            </a:pPr>
+            <a:r>
+              <a:rPr lang="en-US" sz="1000" b="0" dirty="0">
+                <a:solidFill>
+                  <a:srgbClr val="4A5568"/>
+                </a:solidFill>
+                <a:latin typeface="Trebuchet MS"/>
+              </a:rPr>
+              <a:t>“Is there a 3-step trace from USER to ROOT?”  (reachability)</a:t>
+            </a:r>
+          </a:p>
+          <a:p>
+            <a:pPr>
+              <a:defRPr sz="400"/>
+            </a:pPr>
+            <a:endParaRPr/>
+          </a:p>
+          <a:p>
+            <a:pPr algn="l">
+              <a:spcAft>
+                <a:spcPts val="150"/>
+              </a:spcAft>
+            </a:pPr>
+            <a:r>
+              <a:rPr lang="en-US" sz="1000" b="1" dirty="0">
+                <a:solidFill>
+                  <a:srgbClr val="1B2A4A"/>
+                </a:solidFill>
+                <a:latin typeface="Trebuchet MS"/>
+              </a:rPr>
+              <a:t>Transition function:</a:t>
+            </a:r>
+          </a:p>
+          <a:p>
+            <a:pPr algn="l">
+              <a:spcAft>
+                <a:spcPts val="150"/>
+              </a:spcAft>
+            </a:pPr>
+            <a:r>
+              <a:rPr lang="en-US" sz="1000" b="0" dirty="0">
+                <a:solidFill>
+                  <a:srgbClr val="1B2A4A"/>
+                </a:solidFill>
+                <a:latin typeface="Cambria Math"/>
+              </a:rPr>
+              <a:t>T(p, READ)     = p</a:t>
+            </a:r>
+          </a:p>
+          <a:p>
+            <a:pPr algn="l">
+              <a:spcAft>
+                <a:spcPts val="150"/>
+              </a:spcAft>
+            </a:pPr>
+            <a:r>
+              <a:rPr lang="en-US" sz="1000" b="0" dirty="0">
+                <a:solidFill>
+                  <a:srgbClr val="1B2A4A"/>
+                </a:solidFill>
+                <a:latin typeface="Cambria Math"/>
+              </a:rPr>
+              <a:t>T(USER, EDIT_CFG)  = ADMIN</a:t>
+            </a:r>
+          </a:p>
+          <a:p>
+            <a:pPr algn="l">
+              <a:spcAft>
+                <a:spcPts val="150"/>
+              </a:spcAft>
+            </a:pPr>
+            <a:r>
+              <a:rPr lang="en-US" sz="1000" b="0" dirty="0">
+                <a:solidFill>
+                  <a:srgbClr val="1B2A4A"/>
+                </a:solidFill>
+                <a:latin typeface="Cambria Math"/>
+              </a:rPr>
+              <a:t>T(ADMIN, SUDO) = ROOT</a:t>
+            </a:r>
+          </a:p>
+          <a:p>
+            <a:pPr algn="l">
+              <a:spcAft>
+                <a:spcPts val="250"/>
+              </a:spcAft>
+            </a:pPr>
+            <a:r>
+              <a:rPr lang="en-US" sz="1000" b="0" dirty="0">
+                <a:solidFill>
+                  <a:srgbClr val="1B2A4A"/>
+                </a:solidFill>
+                <a:latin typeface="Cambria Math"/>
+              </a:rPr>
+              <a:t>T(p, a)        = p   otherwise</a:t>
+            </a:r>
+          </a:p>
+          <a:p>
+            <a:pPr>
+              <a:defRPr sz="400"/>
+            </a:pPr>
+            <a:endParaRPr/>
+          </a:p>
+          <a:p>
+            <a:pPr algn="l">
+              <a:spcAft>
+                <a:spcPts val="200"/>
+              </a:spcAft>
+            </a:pPr>
+            <a:r>
+              <a:rPr lang="en-US" sz="1000" b="1" dirty="0">
+                <a:solidFill>
+                  <a:srgbClr val="1B2A4A"/>
+                </a:solidFill>
+                <a:latin typeface="Trebuchet MS"/>
+              </a:rPr>
+              <a:t>SMT query  φ  (ask Z3 for sat):</a:t>
+            </a:r>
+          </a:p>
+          <a:p>
+            <a:pPr algn="l">
+              <a:spcAft>
+                <a:spcPts val="150"/>
+              </a:spcAft>
+            </a:pPr>
+            <a:r>
+              <a:rPr lang="en-US" sz="1100" b="0" dirty="0">
+                <a:solidFill>
+                  <a:srgbClr val="1B2A4A"/>
+                </a:solidFill>
+                <a:latin typeface="Cambria Math"/>
+              </a:rPr>
+              <a:t>p₀ = USER</a:t>
+            </a:r>
+          </a:p>
+          <a:p>
+            <a:pPr algn="l">
+              <a:spcAft>
+                <a:spcPts val="150"/>
+              </a:spcAft>
+            </a:pPr>
+            <a:r>
+              <a:rPr lang="en-US" sz="1100" b="0" dirty="0">
+                <a:solidFill>
+                  <a:srgbClr val="1B2A4A"/>
+                </a:solidFill>
+                <a:latin typeface="Cambria Math"/>
+              </a:rPr>
+              <a:t>∧  ⋀ᵢ₌₀..₂  pᵢ₊₁ = T(pᵢ, aᵢ)</a:t>
+            </a:r>
+          </a:p>
+          <a:p>
+            <a:pPr algn="l">
+              <a:spcAft>
+                <a:spcPts val="250"/>
+              </a:spcAft>
+            </a:pPr>
+            <a:r>
+              <a:rPr lang="en-US" sz="1100" b="0" dirty="0">
+                <a:solidFill>
+                  <a:srgbClr val="C0392B"/>
+                </a:solidFill>
+                <a:latin typeface="Cambria Math"/>
+              </a:rPr>
+              <a:t>∧  p₃ = ROOT</a:t>
+            </a:r>
+          </a:p>
+          <a:p>
+            <a:pPr>
+              <a:defRPr sz="300"/>
+            </a:pPr>
+            <a:endParaRPr/>
+          </a:p>
+          <a:p>
+            <a:pPr algn="l">
+              <a:spcAft>
+                <a:spcPts val="100"/>
+              </a:spcAft>
+            </a:pPr>
+            <a:r>
+              <a:rPr lang="en-US" sz="950" b="0" dirty="0">
+                <a:solidFill>
+                  <a:srgbClr val="C0392B"/>
+                </a:solidFill>
+                <a:latin typeface="Trebuchet MS"/>
+              </a:rPr>
+              <a:t>sat  →  attack trace exists (a₀,a₁,a₂)</a:t>
+            </a:r>
+          </a:p>
+          <a:p>
+            <a:pPr algn="l">
+              <a:spcAft>
+                <a:spcPts val="100"/>
+              </a:spcAft>
+            </a:pPr>
+            <a:r>
+              <a:rPr lang="en-US" sz="950" b="0" dirty="0">
+                <a:solidFill>
+                  <a:srgbClr val="0E7C7B"/>
+                </a:solidFill>
+                <a:latin typeface="Trebuchet MS"/>
+              </a:rPr>
+              <a:t>unsat → no escalation in 3 steps</a:t>
             </a:r>
           </a:p>
         </p:txBody>
       </p:sp>
     </p:spTree>
+    <p:extLst>
+      <p:ext uri="{BB962C8B-B14F-4D97-AF65-F5344CB8AC3E}">
+        <p14:creationId xmlns:p14="http://schemas.microsoft.com/office/powerpoint/2010/main" val="1236235341"/>
+      </p:ext>
+    </p:extLst>
   </p:cSld>
   <p:clrMapOvr>
     <a:masterClrMapping/>
@@ -8324,7 +9632,7 @@
 </file>
 
 <file path=ppt/slides/slide21.xml><?xml version="1.0" encoding="utf-8"?>
-<p:sld xmlns:a="http://schemas.openxmlformats.org/drawingml/2006/main" xmlns:p="http://schemas.openxmlformats.org/presentationml/2006/main" xmlns:r="http://schemas.openxmlformats.org/officeDocument/2006/relationships">
+<p:sld xmlns:a="http://schemas.openxmlformats.org/drawingml/2006/main" xmlns:r="http://schemas.openxmlformats.org/officeDocument/2006/relationships" xmlns:p="http://schemas.openxmlformats.org/presentationml/2006/main">
   <p:cSld>
     <p:spTree>
       <p:nvGrpSpPr>
@@ -8332,7 +9640,14 @@
         <p:cNvGrpSpPr/>
         <p:nvPr/>
       </p:nvGrpSpPr>
-      <p:grpSpPr/>
+      <p:grpSpPr>
+        <a:xfrm>
+          <a:off x="0" y="0"/>
+          <a:ext cx="0" cy="0"/>
+          <a:chOff x="0" y="0"/>
+          <a:chExt cx="0" cy="0"/>
+        </a:xfrm>
+      </p:grpSpPr>
       <p:sp>
         <p:nvSpPr>
           <p:cNvPr id="2" name="TextBox 1"/>
@@ -8364,7 +9679,7 @@
               </a:defRPr>
             </a:pPr>
             <a:r>
-              <a:t>V. THE BIG PICTURE</a:t>
+              <a:t>IV. BOUNDED TRACE VERIFICATION</a:t>
             </a:r>
           </a:p>
         </p:txBody>
@@ -8392,15 +9707,15 @@
           <a:lstStyle/>
           <a:p>
             <a:pPr algn="l">
-              <a:defRPr sz="2800" b="1">
+              <a:defRPr sz="2600" b="1">
                 <a:solidFill>
                   <a:srgbClr val="1B2A4A"/>
                 </a:solidFill>
-                <a:latin typeface="Georgia"/>
-              </a:defRPr>
-            </a:pPr>
-            <a:r>
-              <a:t>The Four Pillars, Connected</a:t>
+                <a:latin typeface="Trebuchet MS"/>
+              </a:defRPr>
+            </a:pPr>
+            <a:r>
+              <a:t>Example: Proving Read-Before-Write</a:t>
             </a:r>
           </a:p>
         </p:txBody>
@@ -8472,7 +9787,7 @@
               </a:defRPr>
             </a:pPr>
             <a:r>
-              <a:t>23</a:t>
+              <a:t>21</a:t>
             </a:r>
           </a:p>
         </p:txBody>
@@ -8485,8 +9800,8 @@
         </p:nvSpPr>
         <p:spPr>
           <a:xfrm>
-            <a:off x="502920" y="1005840"/>
-            <a:ext cx="8229600" cy="3657600"/>
+            <a:off x="508000" y="1930400"/>
+            <a:ext cx="4749800" cy="2108269"/>
           </a:xfrm>
           <a:prstGeom prst="rect">
             <a:avLst/>
@@ -8503,216 +9818,548 @@
               <a:spcAft>
                 <a:spcPts val="300"/>
               </a:spcAft>
-              <a:defRPr sz="1150" b="1">
+              <a:defRPr sz="1100" b="0">
+                <a:solidFill>
+                  <a:srgbClr val="4A5568"/>
+                </a:solidFill>
+                <a:latin typeface="Trebuchet MS"/>
+              </a:defRPr>
+            </a:pPr>
+            <a:r>
+              <a:t>Can any 4-step trace write a file</a:t>
+            </a:r>
+          </a:p>
+          <a:p>
+            <a:pPr algn="l">
+              <a:spcAft>
+                <a:spcPts val="300"/>
+              </a:spcAft>
+              <a:defRPr sz="1100" b="0">
+                <a:solidFill>
+                  <a:srgbClr val="4A5568"/>
+                </a:solidFill>
+                <a:latin typeface="Trebuchet MS"/>
+              </a:defRPr>
+            </a:pPr>
+            <a:r>
+              <a:t>without reading it first?</a:t>
+            </a:r>
+          </a:p>
+          <a:p>
+            <a:pPr algn="l">
+              <a:spcAft>
+                <a:spcPts val="300"/>
+              </a:spcAft>
+              <a:defRPr sz="400" b="0">
+                <a:solidFill>
+                  <a:srgbClr val="4A5568"/>
+                </a:solidFill>
+                <a:latin typeface="Trebuchet MS"/>
+              </a:defRPr>
+            </a:pPr>
+            <a:endParaRPr/>
+          </a:p>
+          <a:p>
+            <a:pPr algn="l">
+              <a:spcAft>
+                <a:spcPts val="300"/>
+              </a:spcAft>
+              <a:defRPr sz="1000" b="0">
+                <a:solidFill>
+                  <a:srgbClr val="1B2A4A"/>
+                </a:solidFill>
+                <a:latin typeface="Courier New"/>
+              </a:defRPr>
+            </a:pPr>
+            <a:r>
+              <a:t>from z3 import *</a:t>
+            </a:r>
+          </a:p>
+          <a:p>
+            <a:pPr algn="l">
+              <a:spcAft>
+                <a:spcPts val="300"/>
+              </a:spcAft>
+              <a:defRPr sz="1000" b="0">
+                <a:solidFill>
+                  <a:srgbClr val="1B2A4A"/>
+                </a:solidFill>
+                <a:latin typeface="Courier New"/>
+              </a:defRPr>
+            </a:pPr>
+            <a:r>
+              <a:t>K = 4; READ, WRITE, BASH = 0, 1, 2</a:t>
+            </a:r>
+          </a:p>
+          <a:p>
+            <a:pPr algn="l">
+              <a:spcAft>
+                <a:spcPts val="300"/>
+              </a:spcAft>
+              <a:defRPr sz="1000" b="0">
+                <a:solidFill>
+                  <a:srgbClr val="1B2A4A"/>
+                </a:solidFill>
+                <a:latin typeface="Courier New"/>
+              </a:defRPr>
+            </a:pPr>
+            <a:r>
+              <a:t>act  = [Int(f"a{i}") for i in range(K)]</a:t>
+            </a:r>
+          </a:p>
+          <a:p>
+            <a:pPr algn="l">
+              <a:spcAft>
+                <a:spcPts val="300"/>
+              </a:spcAft>
+              <a:defRPr sz="1000" b="0">
+                <a:solidFill>
+                  <a:srgbClr val="1B2A4A"/>
+                </a:solidFill>
+                <a:latin typeface="Courier New"/>
+              </a:defRPr>
+            </a:pPr>
+            <a:r>
+              <a:t>file = [Int(f"f{i}") for i in range(K)]</a:t>
+            </a:r>
+          </a:p>
+          <a:p>
+            <a:pPr algn="l">
+              <a:spcAft>
+                <a:spcPts val="300"/>
+              </a:spcAft>
+              <a:defRPr sz="1000" b="0">
+                <a:solidFill>
+                  <a:srgbClr val="1B2A4A"/>
+                </a:solidFill>
+                <a:latin typeface="Courier New"/>
+              </a:defRPr>
+            </a:pPr>
+            <a:r>
+              <a:t>s = Solver()</a:t>
+            </a:r>
+          </a:p>
+          <a:p>
+            <a:pPr algn="l">
+              <a:spcAft>
+                <a:spcPts val="300"/>
+              </a:spcAft>
+              <a:defRPr sz="1000" b="0">
+                <a:solidFill>
+                  <a:srgbClr val="1B2A4A"/>
+                </a:solidFill>
+                <a:latin typeface="Courier New"/>
+              </a:defRPr>
+            </a:pPr>
+            <a:r>
+              <a:t>for i in range(K):</a:t>
+            </a:r>
+          </a:p>
+          <a:p>
+            <a:pPr algn="l">
+              <a:spcAft>
+                <a:spcPts val="300"/>
+              </a:spcAft>
+              <a:defRPr sz="1000" b="0">
+                <a:solidFill>
+                  <a:srgbClr val="1B2A4A"/>
+                </a:solidFill>
+                <a:latin typeface="Courier New"/>
+              </a:defRPr>
+            </a:pPr>
+            <a:r>
+              <a:t>  s.add(And(act[i]&gt;=0, act[i]&lt;=2))</a:t>
+            </a:r>
+          </a:p>
+          <a:p>
+            <a:pPr algn="l">
+              <a:spcAft>
+                <a:spcPts val="300"/>
+              </a:spcAft>
+              <a:defRPr sz="1000" b="0">
+                <a:solidFill>
+                  <a:srgbClr val="1B2A4A"/>
+                </a:solidFill>
+                <a:latin typeface="Courier New"/>
+              </a:defRPr>
+            </a:pPr>
+            <a:r>
+              <a:t>  s.add(And(file[i]&gt;=0, file[i]&lt;=2))</a:t>
+            </a:r>
+          </a:p>
+        </p:txBody>
+      </p:sp>
+      <p:sp>
+        <p:nvSpPr>
+          <p:cNvPr id="7" name="TextBox 6"/>
+          <p:cNvSpPr txBox="1"/>
+          <p:nvPr/>
+        </p:nvSpPr>
+        <p:spPr>
+          <a:xfrm>
+            <a:off x="5029200" y="1930400"/>
+            <a:ext cx="3835400" cy="2528897"/>
+          </a:xfrm>
+          <a:prstGeom prst="rect">
+            <a:avLst/>
+          </a:prstGeom>
+          <a:noFill/>
+        </p:spPr>
+        <p:txBody>
+          <a:bodyPr wrap="square">
+            <a:spAutoFit/>
+          </a:bodyPr>
+          <a:lstStyle/>
+          <a:p>
+            <a:pPr algn="l">
+              <a:spcAft>
+                <a:spcPts val="200"/>
+              </a:spcAft>
+            </a:pPr>
+            <a:r>
+              <a:rPr lang="en-US" sz="900" b="0" dirty="0">
+                <a:solidFill>
+                  <a:srgbClr val="8A95A7"/>
+                </a:solidFill>
+                <a:latin typeface="Courier New"/>
+              </a:rPr>
+              <a:t># Find: write with no prior read</a:t>
+            </a:r>
+          </a:p>
+          <a:p>
+            <a:pPr algn="l">
+              <a:spcAft>
+                <a:spcPts val="200"/>
+              </a:spcAft>
+            </a:pPr>
+            <a:r>
+              <a:rPr lang="en-US" sz="900" b="0" dirty="0">
+                <a:solidFill>
+                  <a:srgbClr val="1B2A4A"/>
+                </a:solidFill>
+                <a:latin typeface="Courier New"/>
+              </a:rPr>
+              <a:t>bad = BoolVal(False)</a:t>
+            </a:r>
+          </a:p>
+          <a:p>
+            <a:pPr algn="l">
+              <a:spcAft>
+                <a:spcPts val="200"/>
+              </a:spcAft>
+            </a:pPr>
+            <a:r>
+              <a:rPr lang="en-US" sz="900" b="0" dirty="0">
+                <a:solidFill>
+                  <a:srgbClr val="1B2A4A"/>
+                </a:solidFill>
+                <a:latin typeface="Courier New"/>
+              </a:rPr>
+              <a:t>for j in range(K):</a:t>
+            </a:r>
+          </a:p>
+          <a:p>
+            <a:pPr algn="l">
+              <a:spcAft>
+                <a:spcPts val="200"/>
+              </a:spcAft>
+            </a:pPr>
+            <a:r>
+              <a:rPr lang="en-US" sz="900" b="0" dirty="0">
+                <a:solidFill>
+                  <a:srgbClr val="1B2A4A"/>
+                </a:solidFill>
+                <a:latin typeface="Courier New"/>
+              </a:rPr>
+              <a:t>  prior = Or(*[</a:t>
+            </a:r>
+          </a:p>
+          <a:p>
+            <a:pPr algn="l">
+              <a:spcAft>
+                <a:spcPts val="200"/>
+              </a:spcAft>
+            </a:pPr>
+            <a:r>
+              <a:rPr lang="en-US" sz="900" b="0" dirty="0">
+                <a:solidFill>
+                  <a:srgbClr val="1B2A4A"/>
+                </a:solidFill>
+                <a:latin typeface="Courier New"/>
+              </a:rPr>
+              <a:t>    And(act[i]==READ,</a:t>
+            </a:r>
+          </a:p>
+          <a:p>
+            <a:pPr algn="l">
+              <a:spcAft>
+                <a:spcPts val="200"/>
+              </a:spcAft>
+            </a:pPr>
+            <a:r>
+              <a:rPr lang="en-US" sz="900" b="0" dirty="0">
+                <a:solidFill>
+                  <a:srgbClr val="1B2A4A"/>
+                </a:solidFill>
+                <a:latin typeface="Courier New"/>
+              </a:rPr>
+              <a:t>        file[i]==file[j])</a:t>
+            </a:r>
+          </a:p>
+          <a:p>
+            <a:pPr algn="l">
+              <a:spcAft>
+                <a:spcPts val="200"/>
+              </a:spcAft>
+            </a:pPr>
+            <a:r>
+              <a:rPr lang="en-US" sz="900" b="0" dirty="0">
+                <a:solidFill>
+                  <a:srgbClr val="1B2A4A"/>
+                </a:solidFill>
+                <a:latin typeface="Courier New"/>
+              </a:rPr>
+              <a:t>    for i in range(j)</a:t>
+            </a:r>
+          </a:p>
+          <a:p>
+            <a:pPr algn="l">
+              <a:spcAft>
+                <a:spcPts val="200"/>
+              </a:spcAft>
+            </a:pPr>
+            <a:r>
+              <a:rPr lang="en-US" sz="900" b="0" dirty="0">
+                <a:solidFill>
+                  <a:srgbClr val="1B2A4A"/>
+                </a:solidFill>
+                <a:latin typeface="Courier New"/>
+              </a:rPr>
+              <a:t>  ]) if j &gt; 0 else False</a:t>
+            </a:r>
+          </a:p>
+          <a:p>
+            <a:pPr algn="l">
+              <a:spcAft>
+                <a:spcPts val="200"/>
+              </a:spcAft>
+            </a:pPr>
+            <a:r>
+              <a:rPr lang="en-US" sz="900" b="0" dirty="0">
+                <a:solidFill>
+                  <a:srgbClr val="1B2A4A"/>
+                </a:solidFill>
+                <a:latin typeface="Courier New"/>
+              </a:rPr>
+              <a:t>  bad = Or(bad,</a:t>
+            </a:r>
+          </a:p>
+          <a:p>
+            <a:pPr algn="l">
+              <a:spcAft>
+                <a:spcPts val="200"/>
+              </a:spcAft>
+            </a:pPr>
+            <a:r>
+              <a:rPr lang="en-US" sz="900" b="0" dirty="0">
+                <a:solidFill>
+                  <a:srgbClr val="1B2A4A"/>
+                </a:solidFill>
+                <a:latin typeface="Courier New"/>
+              </a:rPr>
+              <a:t>    And(act[j]==WRITE,</a:t>
+            </a:r>
+          </a:p>
+          <a:p>
+            <a:pPr algn="l">
+              <a:spcAft>
+                <a:spcPts val="200"/>
+              </a:spcAft>
+            </a:pPr>
+            <a:r>
+              <a:rPr lang="en-US" sz="900" b="0" dirty="0">
+                <a:solidFill>
+                  <a:srgbClr val="1B2A4A"/>
+                </a:solidFill>
+                <a:latin typeface="Courier New"/>
+              </a:rPr>
+              <a:t>        Not(prior)))</a:t>
+            </a:r>
+          </a:p>
+          <a:p>
+            <a:pPr algn="l">
+              <a:spcAft>
+                <a:spcPts val="200"/>
+              </a:spcAft>
+            </a:pPr>
+            <a:r>
+              <a:rPr lang="en-US" sz="900" b="0" dirty="0">
+                <a:solidFill>
+                  <a:srgbClr val="C0392B"/>
+                </a:solidFill>
+                <a:latin typeface="Courier New"/>
+              </a:rPr>
+              <a:t>s.add(bad)</a:t>
+            </a:r>
+          </a:p>
+          <a:p>
+            <a:pPr algn="l">
+              <a:spcAft>
+                <a:spcPts val="200"/>
+              </a:spcAft>
+            </a:pPr>
+            <a:r>
+              <a:rPr lang="en-US" sz="900" b="1" dirty="0">
                 <a:solidFill>
                   <a:srgbClr val="0E7C7B"/>
                 </a:solidFill>
-                <a:latin typeface="Trebuchet MS"/>
-              </a:defRPr>
-            </a:pPr>
-            <a:r>
-              <a:t>Hoare Logic (Lec 5–6)</a:t>
-            </a:r>
-          </a:p>
-          <a:p>
-            <a:pPr algn="l">
-              <a:spcAft>
-                <a:spcPts val="300"/>
-              </a:spcAft>
-              <a:defRPr sz="1100" b="0">
-                <a:solidFill>
-                  <a:srgbClr val="4A5568"/>
-                </a:solidFill>
-                <a:latin typeface="Trebuchet MS"/>
-              </a:defRPr>
-            </a:pPr>
-            <a:r>
-              <a:t>Proves individual tool calls correct:  {P} tool_call {Q}</a:t>
-            </a:r>
-          </a:p>
-          <a:p>
-            <a:pPr algn="l">
-              <a:spcAft>
-                <a:spcPts val="300"/>
-              </a:spcAft>
-              <a:defRPr sz="400" b="0">
-                <a:solidFill>
-                  <a:srgbClr val="4A5568"/>
-                </a:solidFill>
-                <a:latin typeface="Trebuchet MS"/>
-              </a:defRPr>
-            </a:pPr>
-          </a:p>
-          <a:p>
-            <a:pPr algn="l">
-              <a:spcAft>
-                <a:spcPts val="300"/>
-              </a:spcAft>
-              <a:defRPr sz="1150" b="1">
+                <a:latin typeface="Courier New"/>
+              </a:rPr>
+              <a:t>print(s.check())  # sat!</a:t>
+            </a:r>
+          </a:p>
+          <a:p>
+            <a:pPr algn="l">
+              <a:spcAft>
+                <a:spcPts val="200"/>
+              </a:spcAft>
+            </a:pPr>
+            <a:r>
+              <a:rPr lang="en-US" sz="900" b="1" dirty="0">
+                <a:solidFill>
+                  <a:srgbClr val="E67E22"/>
+                </a:solidFill>
+                <a:latin typeface="Courier New"/>
+              </a:rPr>
+              <a:t># a0=WRITE, f0=1  → write w/o read</a:t>
+            </a:r>
+          </a:p>
+          <a:p>
+            <a:pPr algn="l">
+              <a:spcAft>
+                <a:spcPts val="200"/>
+              </a:spcAft>
+            </a:pPr>
+            <a:r>
+              <a:rPr lang="en-US" sz="900" b="1" dirty="0">
                 <a:solidFill>
                   <a:srgbClr val="0E7C7B"/>
                 </a:solidFill>
                 <a:latin typeface="Trebuchet MS"/>
-              </a:defRPr>
-            </a:pPr>
-            <a:r>
-              <a:t>SAT/SMT (Lec 7)</a:t>
-            </a:r>
-          </a:p>
-          <a:p>
-            <a:pPr algn="l">
-              <a:spcAft>
-                <a:spcPts val="300"/>
-              </a:spcAft>
-              <a:defRPr sz="1100" b="0">
-                <a:solidFill>
-                  <a:srgbClr val="4A5568"/>
-                </a:solidFill>
-                <a:latin typeface="Trebuchet MS"/>
-              </a:defRPr>
-            </a:pPr>
-            <a:r>
-              <a:t>Automates discharging VCs + encodes permission policies</a:t>
-            </a:r>
-          </a:p>
-          <a:p>
-            <a:pPr algn="l">
-              <a:spcAft>
-                <a:spcPts val="300"/>
-              </a:spcAft>
-              <a:defRPr sz="400" b="0">
-                <a:solidFill>
-                  <a:srgbClr val="4A5568"/>
-                </a:solidFill>
-                <a:latin typeface="Trebuchet MS"/>
-              </a:defRPr>
-            </a:pPr>
-          </a:p>
-          <a:p>
-            <a:pPr algn="l">
-              <a:spcAft>
-                <a:spcPts val="300"/>
-              </a:spcAft>
-              <a:defRPr sz="1150" b="1">
+              </a:rPr>
+              <a:t>Fix: monitor rejects writes to unread files.</a:t>
+            </a:r>
+          </a:p>
+        </p:txBody>
+      </p:sp>
+      <p:sp>
+        <p:nvSpPr>
+          <p:cNvPr id="8" name="smt_card"/>
+          <p:cNvSpPr/>
+          <p:nvPr/>
+        </p:nvSpPr>
+        <p:spPr>
+          <a:xfrm>
+            <a:off x="508000" y="965200"/>
+            <a:ext cx="8178800" cy="889000"/>
+          </a:xfrm>
+          <a:prstGeom prst="roundRect">
+            <a:avLst>
+              <a:gd name="adj" fmla="val 8000"/>
+            </a:avLst>
+          </a:prstGeom>
+          <a:solidFill>
+            <a:srgbClr val="F4F7FA"/>
+          </a:solidFill>
+          <a:ln w="9525">
+            <a:solidFill>
+              <a:srgbClr val="0E7C7B"/>
+            </a:solidFill>
+          </a:ln>
+        </p:spPr>
+        <p:txBody>
+          <a:bodyPr/>
+          <a:lstStyle/>
+          <a:p>
+            <a:endParaRPr/>
+          </a:p>
+        </p:txBody>
+      </p:sp>
+      <p:sp>
+        <p:nvSpPr>
+          <p:cNvPr id="9" name="smt_text"/>
+          <p:cNvSpPr txBox="1"/>
+          <p:nvPr/>
+        </p:nvSpPr>
+        <p:spPr>
+          <a:xfrm>
+            <a:off x="635000" y="1016000"/>
+            <a:ext cx="7924800" cy="787400"/>
+          </a:xfrm>
+          <a:prstGeom prst="rect">
+            <a:avLst/>
+          </a:prstGeom>
+          <a:noFill/>
+        </p:spPr>
+        <p:txBody>
+          <a:bodyPr wrap="square" lIns="36000" tIns="18000" rIns="36000" bIns="18000"/>
+          <a:lstStyle/>
+          <a:p>
+            <a:pPr algn="l">
+              <a:spcAft>
+                <a:spcPts val="100"/>
+              </a:spcAft>
+            </a:pPr>
+            <a:r>
+              <a:rPr lang="en-US" sz="1000" b="1" dirty="0">
                 <a:solidFill>
                   <a:srgbClr val="0E7C7B"/>
                 </a:solidFill>
                 <a:latin typeface="Trebuchet MS"/>
-              </a:defRPr>
-            </a:pPr>
-            <a:r>
-              <a:t>Static Analysis (Lec 8–9)</a:t>
-            </a:r>
-          </a:p>
-          <a:p>
-            <a:pPr algn="l">
-              <a:spcAft>
-                <a:spcPts val="300"/>
-              </a:spcAft>
-              <a:defRPr sz="1100" b="0">
-                <a:solidFill>
-                  <a:srgbClr val="4A5568"/>
-                </a:solidFill>
-                <a:latin typeface="Trebuchet MS"/>
-              </a:defRPr>
-            </a:pPr>
-            <a:r>
-              <a:t>Analyzes skill code for taint, data flow, and pointer relations without running it</a:t>
-            </a:r>
-          </a:p>
-          <a:p>
-            <a:pPr algn="l">
-              <a:spcAft>
-                <a:spcPts val="300"/>
-              </a:spcAft>
-              <a:defRPr sz="400" b="0">
-                <a:solidFill>
-                  <a:srgbClr val="4A5568"/>
-                </a:solidFill>
-                <a:latin typeface="Trebuchet MS"/>
-              </a:defRPr>
-            </a:pPr>
-          </a:p>
-          <a:p>
-            <a:pPr algn="l">
-              <a:spcAft>
-                <a:spcPts val="300"/>
-              </a:spcAft>
-              <a:defRPr sz="1150" b="1">
-                <a:solidFill>
-                  <a:srgbClr val="E67E22"/>
-                </a:solidFill>
-                <a:latin typeface="Trebuchet MS"/>
-              </a:defRPr>
-            </a:pPr>
-            <a:r>
-              <a:t>Trace Verification (Today)</a:t>
-            </a:r>
-          </a:p>
-          <a:p>
-            <a:pPr algn="l">
-              <a:spcAft>
-                <a:spcPts val="300"/>
-              </a:spcAft>
-              <a:defRPr sz="1100" b="0">
-                <a:solidFill>
-                  <a:srgbClr val="4A5568"/>
-                </a:solidFill>
-                <a:latin typeface="Trebuchet MS"/>
-              </a:defRPr>
-            </a:pPr>
-            <a:r>
-              <a:t>Checks that the agent’s actual behavior satisfies safety, liveness, and ordering properties</a:t>
-            </a:r>
-          </a:p>
-          <a:p>
-            <a:pPr algn="l">
-              <a:spcAft>
-                <a:spcPts val="300"/>
-              </a:spcAft>
-              <a:defRPr sz="800" b="0">
-                <a:solidFill>
-                  <a:srgbClr val="4A5568"/>
-                </a:solidFill>
-                <a:latin typeface="Trebuchet MS"/>
-              </a:defRPr>
-            </a:pPr>
-          </a:p>
-          <a:p>
-            <a:pPr algn="l">
-              <a:spcAft>
-                <a:spcPts val="300"/>
-              </a:spcAft>
-              <a:defRPr sz="1200" b="1">
+              </a:rPr>
+              <a:t>High-level property  φ:  every WRITE must be preceded by a READ of the same file</a:t>
+            </a:r>
+          </a:p>
+          <a:p>
+            <a:pPr algn="l">
+              <a:spcAft>
+                <a:spcPts val="100"/>
+              </a:spcAft>
+            </a:pPr>
+            <a:r>
+              <a:rPr lang="en-US" sz="1100" b="0" dirty="0">
                 <a:solidFill>
                   <a:srgbClr val="1B2A4A"/>
                 </a:solidFill>
-                <a:latin typeface="Trebuchet MS"/>
-              </a:defRPr>
-            </a:pPr>
-            <a:r>
-              <a:t>Together they cover the full lifecycle:</a:t>
-            </a:r>
-          </a:p>
-          <a:p>
-            <a:pPr algn="l">
-              <a:spcAft>
-                <a:spcPts val="300"/>
-              </a:spcAft>
-              <a:defRPr sz="1100" b="0">
-                <a:solidFill>
-                  <a:srgbClr val="4A5568"/>
-                </a:solidFill>
-                <a:latin typeface="Trebuchet MS"/>
-              </a:defRPr>
-            </a:pPr>
-            <a:r>
-              <a:t>design time (Hoare) → build time (static analysis) → audit time (SMT) → run time (monitors)</a:t>
+                <a:latin typeface="Cambria Math"/>
+              </a:rPr>
+              <a:t>φ ≡  ∀ j. aⱼ = WRITE  ⟹  ∃ i &lt; j. aᵢ = READ ∧ fᵢ = fⱼ      </a:t>
+            </a:r>
+          </a:p>
+          <a:p>
+            <a:pPr algn="l">
+              <a:spcAft>
+                <a:spcPts val="100"/>
+              </a:spcAft>
+            </a:pPr>
+            <a:r>
+              <a:rPr lang="en-US" sz="1000" b="0" dirty="0">
+                <a:solidFill>
+                  <a:srgbClr val="C0392B"/>
+                </a:solidFill>
+                <a:latin typeface="Cambria Math"/>
+              </a:rPr>
+              <a:t>Z3 asserts ¬φ:   ∃ j. aⱼ = WRITE ∧ ∀ i &lt; j. ¬(aᵢ = READ ∧ fᵢ = fⱼ)        sat → counterexample · unsat → safe</a:t>
             </a:r>
           </a:p>
         </p:txBody>
       </p:sp>
     </p:spTree>
+    <p:extLst>
+      <p:ext uri="{BB962C8B-B14F-4D97-AF65-F5344CB8AC3E}">
+        <p14:creationId xmlns:p14="http://schemas.microsoft.com/office/powerpoint/2010/main" val="1725263884"/>
+      </p:ext>
+    </p:extLst>
   </p:cSld>
   <p:clrMapOvr>
     <a:masterClrMapping/>
@@ -8721,7 +10368,7 @@
 </file>
 
 <file path=ppt/slides/slide22.xml><?xml version="1.0" encoding="utf-8"?>
-<p:sld xmlns:a="http://schemas.openxmlformats.org/drawingml/2006/main" xmlns:p="http://schemas.openxmlformats.org/presentationml/2006/main" xmlns:r="http://schemas.openxmlformats.org/officeDocument/2006/relationships">
+<p:sld xmlns:a="http://schemas.openxmlformats.org/drawingml/2006/main" xmlns:r="http://schemas.openxmlformats.org/officeDocument/2006/relationships" xmlns:p="http://schemas.openxmlformats.org/presentationml/2006/main">
   <p:cSld>
     <p:spTree>
       <p:nvGrpSpPr>
@@ -8729,7 +10376,14 @@
         <p:cNvGrpSpPr/>
         <p:nvPr/>
       </p:nvGrpSpPr>
-      <p:grpSpPr/>
+      <p:grpSpPr>
+        <a:xfrm>
+          <a:off x="0" y="0"/>
+          <a:ext cx="0" cy="0"/>
+          <a:chOff x="0" y="0"/>
+          <a:chExt cx="0" cy="0"/>
+        </a:xfrm>
+      </p:grpSpPr>
       <p:sp>
         <p:nvSpPr>
           <p:cNvPr id="2" name="TextBox 1"/>
@@ -8761,7 +10415,7 @@
               </a:defRPr>
             </a:pPr>
             <a:r>
-              <a:t>V. THE BIG PICTURE</a:t>
+              <a:t>IV. BOUNDED TRACE VERIFICATION</a:t>
             </a:r>
           </a:p>
         </p:txBody>
@@ -8797,7 +10451,7 @@
               </a:defRPr>
             </a:pPr>
             <a:r>
-              <a:t>Four Levels of Agent Verification</a:t>
+              <a:t>Bounded vs. Runtime Verification</a:t>
             </a:r>
           </a:p>
         </p:txBody>
@@ -8869,7 +10523,7 @@
               </a:defRPr>
             </a:pPr>
             <a:r>
-              <a:t>24</a:t>
+              <a:t>22</a:t>
             </a:r>
           </a:p>
         </p:txBody>
@@ -8882,8 +10536,8 @@
         </p:nvSpPr>
         <p:spPr>
           <a:xfrm>
-            <a:off x="502920" y="1005840"/>
-            <a:ext cx="8229600" cy="3657600"/>
+            <a:off x="502920" y="1051560"/>
+            <a:ext cx="3931920" cy="3200400"/>
           </a:xfrm>
           <a:prstGeom prst="rect">
             <a:avLst/>
@@ -8908,7 +10562,7 @@
               </a:defRPr>
             </a:pPr>
             <a:r>
-              <a:t>Step-Level</a:t>
+              <a:t>Runtime Monitor</a:t>
             </a:r>
           </a:p>
           <a:p>
@@ -8924,22 +10578,110 @@
               </a:defRPr>
             </a:pPr>
             <a:r>
-              <a:t>Each tool call satisfies its pre/postcondition.  (Hoare triples)</a:t>
-            </a:r>
-          </a:p>
-          <a:p>
-            <a:pPr algn="l">
-              <a:spcAft>
-                <a:spcPts val="300"/>
-              </a:spcAft>
-              <a:defRPr sz="400" b="0">
-                <a:solidFill>
-                  <a:srgbClr val="4A5568"/>
-                </a:solidFill>
-                <a:latin typeface="Trebuchet MS"/>
-              </a:defRPr>
-            </a:pPr>
-          </a:p>
+              <a:t>•  Checks one actual trace</a:t>
+            </a:r>
+          </a:p>
+          <a:p>
+            <a:pPr algn="l">
+              <a:spcAft>
+                <a:spcPts val="300"/>
+              </a:spcAft>
+              <a:defRPr sz="1100" b="0">
+                <a:solidFill>
+                  <a:srgbClr val="4A5568"/>
+                </a:solidFill>
+                <a:latin typeface="Trebuchet MS"/>
+              </a:defRPr>
+            </a:pPr>
+            <a:r>
+              <a:t>•  O(n) per trace</a:t>
+            </a:r>
+          </a:p>
+          <a:p>
+            <a:pPr algn="l">
+              <a:spcAft>
+                <a:spcPts val="300"/>
+              </a:spcAft>
+              <a:defRPr sz="1100" b="0">
+                <a:solidFill>
+                  <a:srgbClr val="4A5568"/>
+                </a:solidFill>
+                <a:latin typeface="Trebuchet MS"/>
+              </a:defRPr>
+            </a:pPr>
+            <a:r>
+              <a:t>•  Can stop agent in real time</a:t>
+            </a:r>
+          </a:p>
+          <a:p>
+            <a:pPr algn="l">
+              <a:spcAft>
+                <a:spcPts val="300"/>
+              </a:spcAft>
+              <a:defRPr sz="1100" b="0">
+                <a:solidFill>
+                  <a:srgbClr val="E67E22"/>
+                </a:solidFill>
+                <a:latin typeface="Trebuchet MS"/>
+              </a:defRPr>
+            </a:pPr>
+            <a:r>
+              <a:t>•  Misses traces not taken</a:t>
+            </a:r>
+          </a:p>
+          <a:p>
+            <a:pPr algn="l">
+              <a:spcAft>
+                <a:spcPts val="300"/>
+              </a:spcAft>
+              <a:defRPr sz="600" b="0">
+                <a:solidFill>
+                  <a:srgbClr val="4A5568"/>
+                </a:solidFill>
+                <a:latin typeface="Trebuchet MS"/>
+              </a:defRPr>
+            </a:pPr>
+            <a:endParaRPr/>
+          </a:p>
+          <a:p>
+            <a:pPr algn="l">
+              <a:spcAft>
+                <a:spcPts val="300"/>
+              </a:spcAft>
+              <a:defRPr sz="1100" b="1">
+                <a:solidFill>
+                  <a:srgbClr val="0E7C7B"/>
+                </a:solidFill>
+                <a:latin typeface="Trebuchet MS"/>
+              </a:defRPr>
+            </a:pPr>
+            <a:r>
+              <a:t>Use for: production guardrails</a:t>
+            </a:r>
+          </a:p>
+        </p:txBody>
+      </p:sp>
+      <p:sp>
+        <p:nvSpPr>
+          <p:cNvPr id="7" name="TextBox 6"/>
+          <p:cNvSpPr txBox="1"/>
+          <p:nvPr/>
+        </p:nvSpPr>
+        <p:spPr>
+          <a:xfrm>
+            <a:off x="4800600" y="1051560"/>
+            <a:ext cx="3931920" cy="3200400"/>
+          </a:xfrm>
+          <a:prstGeom prst="rect">
+            <a:avLst/>
+          </a:prstGeom>
+          <a:noFill/>
+        </p:spPr>
+        <p:txBody>
+          <a:bodyPr wrap="square">
+            <a:spAutoFit/>
+          </a:bodyPr>
+          <a:lstStyle/>
           <a:p>
             <a:pPr algn="l">
               <a:spcAft>
@@ -8947,13 +10689,13 @@
               </a:spcAft>
               <a:defRPr sz="1150" b="1">
                 <a:solidFill>
-                  <a:srgbClr val="0E7C7B"/>
-                </a:solidFill>
-                <a:latin typeface="Trebuchet MS"/>
-              </a:defRPr>
-            </a:pPr>
-            <a:r>
-              <a:t>Skill-Level</a:t>
+                  <a:srgbClr val="6C5B7B"/>
+                </a:solidFill>
+                <a:latin typeface="Trebuchet MS"/>
+              </a:defRPr>
+            </a:pPr>
+            <a:r>
+              <a:t>Bounded Verification</a:t>
             </a:r>
           </a:p>
           <a:p>
@@ -8969,22 +10711,110 @@
               </a:defRPr>
             </a:pPr>
             <a:r>
-              <a:t>A complete skill satisfies its contract.  (VCG + static analysis)</a:t>
-            </a:r>
-          </a:p>
-          <a:p>
-            <a:pPr algn="l">
-              <a:spcAft>
-                <a:spcPts val="300"/>
-              </a:spcAft>
-              <a:defRPr sz="400" b="0">
-                <a:solidFill>
-                  <a:srgbClr val="4A5568"/>
-                </a:solidFill>
-                <a:latin typeface="Trebuchet MS"/>
-              </a:defRPr>
-            </a:pPr>
-          </a:p>
+              <a:t>•  Checks all traces up to length k</a:t>
+            </a:r>
+          </a:p>
+          <a:p>
+            <a:pPr algn="l">
+              <a:spcAft>
+                <a:spcPts val="300"/>
+              </a:spcAft>
+              <a:defRPr sz="1100" b="0">
+                <a:solidFill>
+                  <a:srgbClr val="4A5568"/>
+                </a:solidFill>
+                <a:latin typeface="Trebuchet MS"/>
+              </a:defRPr>
+            </a:pPr>
+            <a:r>
+              <a:t>•  NP-hard (but Z3 is good at it)</a:t>
+            </a:r>
+          </a:p>
+          <a:p>
+            <a:pPr algn="l">
+              <a:spcAft>
+                <a:spcPts val="300"/>
+              </a:spcAft>
+              <a:defRPr sz="1100" b="0">
+                <a:solidFill>
+                  <a:srgbClr val="4A5568"/>
+                </a:solidFill>
+                <a:latin typeface="Trebuchet MS"/>
+              </a:defRPr>
+            </a:pPr>
+            <a:r>
+              <a:t>•  Finds bugs before deployment</a:t>
+            </a:r>
+          </a:p>
+          <a:p>
+            <a:pPr algn="l">
+              <a:spcAft>
+                <a:spcPts val="300"/>
+              </a:spcAft>
+              <a:defRPr sz="1100" b="0">
+                <a:solidFill>
+                  <a:srgbClr val="E67E22"/>
+                </a:solidFill>
+                <a:latin typeface="Trebuchet MS"/>
+              </a:defRPr>
+            </a:pPr>
+            <a:r>
+              <a:t>•  Incomplete beyond k</a:t>
+            </a:r>
+          </a:p>
+          <a:p>
+            <a:pPr algn="l">
+              <a:spcAft>
+                <a:spcPts val="300"/>
+              </a:spcAft>
+              <a:defRPr sz="600" b="0">
+                <a:solidFill>
+                  <a:srgbClr val="4A5568"/>
+                </a:solidFill>
+                <a:latin typeface="Trebuchet MS"/>
+              </a:defRPr>
+            </a:pPr>
+            <a:endParaRPr/>
+          </a:p>
+          <a:p>
+            <a:pPr algn="l">
+              <a:spcAft>
+                <a:spcPts val="300"/>
+              </a:spcAft>
+              <a:defRPr sz="1100" b="1">
+                <a:solidFill>
+                  <a:srgbClr val="6C5B7B"/>
+                </a:solidFill>
+                <a:latin typeface="Trebuchet MS"/>
+              </a:defRPr>
+            </a:pPr>
+            <a:r>
+              <a:t>Use for: skill auditing, HW2</a:t>
+            </a:r>
+          </a:p>
+        </p:txBody>
+      </p:sp>
+      <p:sp>
+        <p:nvSpPr>
+          <p:cNvPr id="8" name="TextBox 7"/>
+          <p:cNvSpPr txBox="1"/>
+          <p:nvPr/>
+        </p:nvSpPr>
+        <p:spPr>
+          <a:xfrm>
+            <a:off x="502920" y="3566160"/>
+            <a:ext cx="8229600" cy="914400"/>
+          </a:xfrm>
+          <a:prstGeom prst="rect">
+            <a:avLst/>
+          </a:prstGeom>
+          <a:noFill/>
+        </p:spPr>
+        <p:txBody>
+          <a:bodyPr wrap="square">
+            <a:spAutoFit/>
+          </a:bodyPr>
+          <a:lstStyle/>
           <a:p>
             <a:pPr algn="l">
               <a:spcAft>
@@ -8998,113 +10828,7 @@
               </a:defRPr>
             </a:pPr>
             <a:r>
-              <a:t>Trace-Level</a:t>
-            </a:r>
-          </a:p>
-          <a:p>
-            <a:pPr algn="l">
-              <a:spcAft>
-                <a:spcPts val="300"/>
-              </a:spcAft>
-              <a:defRPr sz="1100" b="0">
-                <a:solidFill>
-                  <a:srgbClr val="4A5568"/>
-                </a:solidFill>
-                <a:latin typeface="Trebuchet MS"/>
-              </a:defRPr>
-            </a:pPr>
-            <a:r>
-              <a:t>An execution trace satisfies safety/liveness/ordering.  (Runtime monitors, today)</a:t>
-            </a:r>
-          </a:p>
-          <a:p>
-            <a:pPr algn="l">
-              <a:spcAft>
-                <a:spcPts val="300"/>
-              </a:spcAft>
-              <a:defRPr sz="400" b="0">
-                <a:solidFill>
-                  <a:srgbClr val="4A5568"/>
-                </a:solidFill>
-                <a:latin typeface="Trebuchet MS"/>
-              </a:defRPr>
-            </a:pPr>
-          </a:p>
-          <a:p>
-            <a:pPr algn="l">
-              <a:spcAft>
-                <a:spcPts val="300"/>
-              </a:spcAft>
-              <a:defRPr sz="1150" b="1">
-                <a:solidFill>
-                  <a:srgbClr val="6C5B7B"/>
-                </a:solidFill>
-                <a:latin typeface="Trebuchet MS"/>
-              </a:defRPr>
-            </a:pPr>
-            <a:r>
-              <a:t>System-Level</a:t>
-            </a:r>
-          </a:p>
-          <a:p>
-            <a:pPr algn="l">
-              <a:spcAft>
-                <a:spcPts val="300"/>
-              </a:spcAft>
-              <a:defRPr sz="1100" b="0">
-                <a:solidFill>
-                  <a:srgbClr val="4A5568"/>
-                </a:solidFill>
-                <a:latin typeface="Trebuchet MS"/>
-              </a:defRPr>
-            </a:pPr>
-            <a:r>
-              <a:t>All possible traces of a multi-agent system satisfy a property.  (Full model checking — aspirational)</a:t>
-            </a:r>
-          </a:p>
-          <a:p>
-            <a:pPr algn="l">
-              <a:spcAft>
-                <a:spcPts val="300"/>
-              </a:spcAft>
-              <a:defRPr sz="800" b="0">
-                <a:solidFill>
-                  <a:srgbClr val="4A5568"/>
-                </a:solidFill>
-                <a:latin typeface="Trebuchet MS"/>
-              </a:defRPr>
-            </a:pPr>
-          </a:p>
-          <a:p>
-            <a:pPr algn="l">
-              <a:spcAft>
-                <a:spcPts val="300"/>
-              </a:spcAft>
-              <a:defRPr sz="1100" b="1">
-                <a:solidFill>
-                  <a:srgbClr val="1B2A4A"/>
-                </a:solidFill>
-                <a:latin typeface="Trebuchet MS"/>
-              </a:defRPr>
-            </a:pPr>
-            <a:r>
-              <a:t>This course focuses on step, skill, and trace levels — the practical ones.</a:t>
-            </a:r>
-          </a:p>
-          <a:p>
-            <a:pPr algn="l">
-              <a:spcAft>
-                <a:spcPts val="300"/>
-              </a:spcAft>
-              <a:defRPr sz="1100" b="0">
-                <a:solidFill>
-                  <a:srgbClr val="4A5568"/>
-                </a:solidFill>
-                <a:latin typeface="Trebuchet MS"/>
-              </a:defRPr>
-            </a:pPr>
-            <a:r>
-              <a:t>System-level is active research (and connects to Part III &amp; IV of the course).</a:t>
+              <a:t>In practice, use both: bounded verification at development time, runtime monitors in production.</a:t>
             </a:r>
           </a:p>
         </p:txBody>
@@ -9118,7 +10842,7 @@
 </file>
 
 <file path=ppt/slides/slide23.xml><?xml version="1.0" encoding="utf-8"?>
-<p:sld xmlns:a="http://schemas.openxmlformats.org/drawingml/2006/main" xmlns:p="http://schemas.openxmlformats.org/presentationml/2006/main" xmlns:r="http://schemas.openxmlformats.org/officeDocument/2006/relationships">
+<p:sld xmlns:a="http://schemas.openxmlformats.org/drawingml/2006/main" xmlns:r="http://schemas.openxmlformats.org/officeDocument/2006/relationships" xmlns:p="http://schemas.openxmlformats.org/presentationml/2006/main">
   <p:cSld>
     <p:spTree>
       <p:nvGrpSpPr>
@@ -9126,7 +10850,14 @@
         <p:cNvGrpSpPr/>
         <p:nvPr/>
       </p:nvGrpSpPr>
-      <p:grpSpPr/>
+      <p:grpSpPr>
+        <a:xfrm>
+          <a:off x="0" y="0"/>
+          <a:ext cx="0" cy="0"/>
+          <a:chOff x="0" y="0"/>
+          <a:chExt cx="0" cy="0"/>
+        </a:xfrm>
+      </p:grpSpPr>
       <p:sp>
         <p:nvSpPr>
           <p:cNvPr id="2" name="TextBox 1"/>
@@ -9158,7 +10889,7 @@
               </a:defRPr>
             </a:pPr>
             <a:r>
-              <a:t>EXERCISE</a:t>
+              <a:t>V. THE BIG PICTURE</a:t>
             </a:r>
           </a:p>
         </p:txBody>
@@ -9186,15 +10917,15 @@
           <a:lstStyle/>
           <a:p>
             <a:pPr algn="l">
-              <a:defRPr sz="2600" b="1">
+              <a:defRPr sz="2800" b="1">
                 <a:solidFill>
                   <a:srgbClr val="1B2A4A"/>
                 </a:solidFill>
-                <a:latin typeface="Trebuchet MS"/>
-              </a:defRPr>
-            </a:pPr>
-            <a:r>
-              <a:t>Design a Monitor</a:t>
+                <a:latin typeface="Georgia"/>
+              </a:defRPr>
+            </a:pPr>
+            <a:r>
+              <a:t>The Four Pillars, Connected</a:t>
             </a:r>
           </a:p>
         </p:txBody>
@@ -9266,7 +10997,7 @@
               </a:defRPr>
             </a:pPr>
             <a:r>
-              <a:t>25</a:t>
+              <a:t>23</a:t>
             </a:r>
           </a:p>
         </p:txBody>
@@ -9297,6 +11028,190 @@
               <a:spcAft>
                 <a:spcPts val="300"/>
               </a:spcAft>
+              <a:defRPr sz="1150" b="1">
+                <a:solidFill>
+                  <a:srgbClr val="0E7C7B"/>
+                </a:solidFill>
+                <a:latin typeface="Trebuchet MS"/>
+              </a:defRPr>
+            </a:pPr>
+            <a:r>
+              <a:t>Hoare Logic (Lec 5–6)</a:t>
+            </a:r>
+          </a:p>
+          <a:p>
+            <a:pPr algn="l">
+              <a:spcAft>
+                <a:spcPts val="300"/>
+              </a:spcAft>
+              <a:defRPr sz="1100" b="0">
+                <a:solidFill>
+                  <a:srgbClr val="4A5568"/>
+                </a:solidFill>
+                <a:latin typeface="Trebuchet MS"/>
+              </a:defRPr>
+            </a:pPr>
+            <a:r>
+              <a:t>Proves individual tool calls correct:  {P} tool_call {Q}</a:t>
+            </a:r>
+          </a:p>
+          <a:p>
+            <a:pPr algn="l">
+              <a:spcAft>
+                <a:spcPts val="300"/>
+              </a:spcAft>
+              <a:defRPr sz="400" b="0">
+                <a:solidFill>
+                  <a:srgbClr val="4A5568"/>
+                </a:solidFill>
+                <a:latin typeface="Trebuchet MS"/>
+              </a:defRPr>
+            </a:pPr>
+            <a:endParaRPr/>
+          </a:p>
+          <a:p>
+            <a:pPr algn="l">
+              <a:spcAft>
+                <a:spcPts val="300"/>
+              </a:spcAft>
+              <a:defRPr sz="1150" b="1">
+                <a:solidFill>
+                  <a:srgbClr val="0E7C7B"/>
+                </a:solidFill>
+                <a:latin typeface="Trebuchet MS"/>
+              </a:defRPr>
+            </a:pPr>
+            <a:r>
+              <a:t>SAT/SMT (Lec 7)</a:t>
+            </a:r>
+          </a:p>
+          <a:p>
+            <a:pPr algn="l">
+              <a:spcAft>
+                <a:spcPts val="300"/>
+              </a:spcAft>
+              <a:defRPr sz="1100" b="0">
+                <a:solidFill>
+                  <a:srgbClr val="4A5568"/>
+                </a:solidFill>
+                <a:latin typeface="Trebuchet MS"/>
+              </a:defRPr>
+            </a:pPr>
+            <a:r>
+              <a:t>Automates discharging VCs + encodes permission policies</a:t>
+            </a:r>
+          </a:p>
+          <a:p>
+            <a:pPr algn="l">
+              <a:spcAft>
+                <a:spcPts val="300"/>
+              </a:spcAft>
+              <a:defRPr sz="400" b="0">
+                <a:solidFill>
+                  <a:srgbClr val="4A5568"/>
+                </a:solidFill>
+                <a:latin typeface="Trebuchet MS"/>
+              </a:defRPr>
+            </a:pPr>
+            <a:endParaRPr/>
+          </a:p>
+          <a:p>
+            <a:pPr algn="l">
+              <a:spcAft>
+                <a:spcPts val="300"/>
+              </a:spcAft>
+              <a:defRPr sz="1150" b="1">
+                <a:solidFill>
+                  <a:srgbClr val="0E7C7B"/>
+                </a:solidFill>
+                <a:latin typeface="Trebuchet MS"/>
+              </a:defRPr>
+            </a:pPr>
+            <a:r>
+              <a:t>Static Analysis (Lec 8–9)</a:t>
+            </a:r>
+          </a:p>
+          <a:p>
+            <a:pPr algn="l">
+              <a:spcAft>
+                <a:spcPts val="300"/>
+              </a:spcAft>
+              <a:defRPr sz="1100" b="0">
+                <a:solidFill>
+                  <a:srgbClr val="4A5568"/>
+                </a:solidFill>
+                <a:latin typeface="Trebuchet MS"/>
+              </a:defRPr>
+            </a:pPr>
+            <a:r>
+              <a:t>Analyzes skill code for taint, data flow, and pointer relations without running it</a:t>
+            </a:r>
+          </a:p>
+          <a:p>
+            <a:pPr algn="l">
+              <a:spcAft>
+                <a:spcPts val="300"/>
+              </a:spcAft>
+              <a:defRPr sz="400" b="0">
+                <a:solidFill>
+                  <a:srgbClr val="4A5568"/>
+                </a:solidFill>
+                <a:latin typeface="Trebuchet MS"/>
+              </a:defRPr>
+            </a:pPr>
+            <a:endParaRPr/>
+          </a:p>
+          <a:p>
+            <a:pPr algn="l">
+              <a:spcAft>
+                <a:spcPts val="300"/>
+              </a:spcAft>
+              <a:defRPr sz="1150" b="1">
+                <a:solidFill>
+                  <a:srgbClr val="E67E22"/>
+                </a:solidFill>
+                <a:latin typeface="Trebuchet MS"/>
+              </a:defRPr>
+            </a:pPr>
+            <a:r>
+              <a:t>Trace Verification (Today)</a:t>
+            </a:r>
+          </a:p>
+          <a:p>
+            <a:pPr algn="l">
+              <a:spcAft>
+                <a:spcPts val="300"/>
+              </a:spcAft>
+              <a:defRPr sz="1100" b="0">
+                <a:solidFill>
+                  <a:srgbClr val="4A5568"/>
+                </a:solidFill>
+                <a:latin typeface="Trebuchet MS"/>
+              </a:defRPr>
+            </a:pPr>
+            <a:r>
+              <a:t>Checks that the agent’s actual behavior satisfies safety, liveness, and ordering properties</a:t>
+            </a:r>
+          </a:p>
+          <a:p>
+            <a:pPr algn="l">
+              <a:spcAft>
+                <a:spcPts val="300"/>
+              </a:spcAft>
+              <a:defRPr sz="800" b="0">
+                <a:solidFill>
+                  <a:srgbClr val="4A5568"/>
+                </a:solidFill>
+                <a:latin typeface="Trebuchet MS"/>
+              </a:defRPr>
+            </a:pPr>
+            <a:endParaRPr/>
+          </a:p>
+          <a:p>
+            <a:pPr algn="l">
+              <a:spcAft>
+                <a:spcPts val="300"/>
+              </a:spcAft>
               <a:defRPr sz="1200" b="1">
                 <a:solidFill>
                   <a:srgbClr val="1B2A4A"/>
@@ -9305,123 +11220,7 @@
               </a:defRPr>
             </a:pPr>
             <a:r>
-              <a:t>Policy:  "An agent must not call bash after reading a file containing secrets."</a:t>
-            </a:r>
-          </a:p>
-          <a:p>
-            <a:pPr algn="l">
-              <a:spcAft>
-                <a:spcPts val="300"/>
-              </a:spcAft>
-              <a:defRPr sz="800" b="0">
-                <a:solidFill>
-                  <a:srgbClr val="4A5568"/>
-                </a:solidFill>
-                <a:latin typeface="Trebuchet MS"/>
-              </a:defRPr>
-            </a:pPr>
-          </a:p>
-          <a:p>
-            <a:pPr algn="l">
-              <a:spcAft>
-                <a:spcPts val="300"/>
-              </a:spcAft>
-              <a:defRPr sz="1200" b="1">
-                <a:solidFill>
-                  <a:srgbClr val="4A5568"/>
-                </a:solidFill>
-                <a:latin typeface="Trebuchet MS"/>
-              </a:defRPr>
-            </a:pPr>
-            <a:r>
-              <a:t>Question 1:  What are the DFA states?</a:t>
-            </a:r>
-          </a:p>
-          <a:p>
-            <a:pPr algn="l">
-              <a:spcAft>
-                <a:spcPts val="300"/>
-              </a:spcAft>
-              <a:defRPr sz="600" b="0">
-                <a:solidFill>
-                  <a:srgbClr val="4A5568"/>
-                </a:solidFill>
-                <a:latin typeface="Trebuchet MS"/>
-              </a:defRPr>
-            </a:pPr>
-          </a:p>
-          <a:p>
-            <a:pPr algn="l">
-              <a:spcAft>
-                <a:spcPts val="300"/>
-              </a:spcAft>
-              <a:defRPr sz="1200" b="1">
-                <a:solidFill>
-                  <a:srgbClr val="4A5568"/>
-                </a:solidFill>
-                <a:latin typeface="Trebuchet MS"/>
-              </a:defRPr>
-            </a:pPr>
-            <a:r>
-              <a:t>Question 2:  What are the transitions?</a:t>
-            </a:r>
-          </a:p>
-          <a:p>
-            <a:pPr algn="l">
-              <a:spcAft>
-                <a:spcPts val="300"/>
-              </a:spcAft>
-              <a:defRPr sz="600" b="0">
-                <a:solidFill>
-                  <a:srgbClr val="4A5568"/>
-                </a:solidFill>
-                <a:latin typeface="Trebuchet MS"/>
-              </a:defRPr>
-            </a:pPr>
-          </a:p>
-          <a:p>
-            <a:pPr algn="l">
-              <a:spcAft>
-                <a:spcPts val="300"/>
-              </a:spcAft>
-              <a:defRPr sz="1200" b="1">
-                <a:solidFill>
-                  <a:srgbClr val="4A5568"/>
-                </a:solidFill>
-                <a:latin typeface="Trebuchet MS"/>
-              </a:defRPr>
-            </a:pPr>
-            <a:r>
-              <a:t>Question 3:  What is the reject state?</a:t>
-            </a:r>
-          </a:p>
-          <a:p>
-            <a:pPr algn="l">
-              <a:spcAft>
-                <a:spcPts val="300"/>
-              </a:spcAft>
-              <a:defRPr sz="600" b="0">
-                <a:solidFill>
-                  <a:srgbClr val="4A5568"/>
-                </a:solidFill>
-                <a:latin typeface="Trebuchet MS"/>
-              </a:defRPr>
-            </a:pPr>
-          </a:p>
-          <a:p>
-            <a:pPr algn="l">
-              <a:spcAft>
-                <a:spcPts val="300"/>
-              </a:spcAft>
-              <a:defRPr sz="1200" b="1">
-                <a:solidFill>
-                  <a:srgbClr val="4A5568"/>
-                </a:solidFill>
-                <a:latin typeface="Trebuchet MS"/>
-              </a:defRPr>
-            </a:pPr>
-            <a:r>
-              <a:t>Question 4:  How would you classify this property?</a:t>
+              <a:t>Together they cover the full lifecycle:</a:t>
             </a:r>
           </a:p>
           <a:p>
@@ -9431,71 +11230,13 @@
               </a:spcAft>
               <a:defRPr sz="1100" b="0">
                 <a:solidFill>
-                  <a:srgbClr val="8A95A7"/>
-                </a:solidFill>
-                <a:latin typeface="Trebuchet MS"/>
-              </a:defRPr>
-            </a:pPr>
-            <a:r>
-              <a:t>  (safety / liveness / ordering)</a:t>
-            </a:r>
-          </a:p>
-          <a:p>
-            <a:pPr algn="l">
-              <a:spcAft>
-                <a:spcPts val="300"/>
-              </a:spcAft>
-              <a:defRPr sz="600" b="0">
-                <a:solidFill>
-                  <a:srgbClr val="4A5568"/>
-                </a:solidFill>
-                <a:latin typeface="Trebuchet MS"/>
-              </a:defRPr>
-            </a:pPr>
-          </a:p>
-          <a:p>
-            <a:pPr algn="l">
-              <a:spcAft>
-                <a:spcPts val="300"/>
-              </a:spcAft>
-              <a:defRPr sz="1200" b="1">
-                <a:solidFill>
-                  <a:srgbClr val="4A5568"/>
-                </a:solidFill>
-                <a:latin typeface="Trebuchet MS"/>
-              </a:defRPr>
-            </a:pPr>
-            <a:r>
-              <a:t>Question 5:  Write the monitor as a Python function.</a:t>
-            </a:r>
-          </a:p>
-          <a:p>
-            <a:pPr algn="l">
-              <a:spcAft>
-                <a:spcPts val="300"/>
-              </a:spcAft>
-              <a:defRPr sz="800" b="0">
-                <a:solidFill>
-                  <a:srgbClr val="4A5568"/>
-                </a:solidFill>
-                <a:latin typeface="Trebuchet MS"/>
-              </a:defRPr>
-            </a:pPr>
-          </a:p>
-          <a:p>
-            <a:pPr algn="l">
-              <a:spcAft>
-                <a:spcPts val="300"/>
-              </a:spcAft>
-              <a:defRPr sz="1150" b="1">
-                <a:solidFill>
-                  <a:srgbClr val="E67E22"/>
-                </a:solidFill>
-                <a:latin typeface="Trebuchet MS"/>
-              </a:defRPr>
-            </a:pPr>
-            <a:r>
-              <a:t>Try this on paper before we discuss.  (5 minutes)</a:t>
+                  <a:srgbClr val="4A5568"/>
+                </a:solidFill>
+                <a:latin typeface="Trebuchet MS"/>
+              </a:defRPr>
+            </a:pPr>
+            <a:r>
+              <a:t>design time (Hoare) → build time (static analysis) → audit time (SMT) → run time (monitors)</a:t>
             </a:r>
           </a:p>
         </p:txBody>
@@ -9509,7 +11250,7 @@
 </file>
 
 <file path=ppt/slides/slide24.xml><?xml version="1.0" encoding="utf-8"?>
-<p:sld xmlns:a="http://schemas.openxmlformats.org/drawingml/2006/main" xmlns:p="http://schemas.openxmlformats.org/presentationml/2006/main" xmlns:r="http://schemas.openxmlformats.org/officeDocument/2006/relationships">
+<p:sld xmlns:a="http://schemas.openxmlformats.org/drawingml/2006/main" xmlns:r="http://schemas.openxmlformats.org/officeDocument/2006/relationships" xmlns:p="http://schemas.openxmlformats.org/presentationml/2006/main">
   <p:cSld>
     <p:spTree>
       <p:nvGrpSpPr>
@@ -9517,7 +11258,14 @@
         <p:cNvGrpSpPr/>
         <p:nvPr/>
       </p:nvGrpSpPr>
-      <p:grpSpPr/>
+      <p:grpSpPr>
+        <a:xfrm>
+          <a:off x="0" y="0"/>
+          <a:ext cx="0" cy="0"/>
+          <a:chOff x="0" y="0"/>
+          <a:chExt cx="0" cy="0"/>
+        </a:xfrm>
+      </p:grpSpPr>
       <p:sp>
         <p:nvSpPr>
           <p:cNvPr id="2" name="TextBox 1"/>
@@ -9549,7 +11297,7 @@
               </a:defRPr>
             </a:pPr>
             <a:r>
-              <a:t>VI. MIDTERM PREVIEW</a:t>
+              <a:t>V. THE BIG PICTURE</a:t>
             </a:r>
           </a:p>
         </p:txBody>
@@ -9585,7 +11333,7 @@
               </a:defRPr>
             </a:pPr>
             <a:r>
-              <a:t>Midterm — May 5, In-Class</a:t>
+              <a:t>Four Levels of Agent Verification</a:t>
             </a:r>
           </a:p>
         </p:txBody>
@@ -9657,7 +11405,7 @@
               </a:defRPr>
             </a:pPr>
             <a:r>
-              <a:t>26</a:t>
+              <a:t>24</a:t>
             </a:r>
           </a:p>
         </p:txBody>
@@ -9671,7 +11419,7 @@
         <p:spPr>
           <a:xfrm>
             <a:off x="502920" y="1005840"/>
-            <a:ext cx="4114800" cy="3657600"/>
+            <a:ext cx="8229600" cy="3657600"/>
           </a:xfrm>
           <a:prstGeom prst="rect">
             <a:avLst/>
@@ -9696,7 +11444,7 @@
               </a:defRPr>
             </a:pPr>
             <a:r>
-              <a:t>Format</a:t>
+              <a:t>Step-Level</a:t>
             </a:r>
           </a:p>
           <a:p>
@@ -9712,7 +11460,37 @@
               </a:defRPr>
             </a:pPr>
             <a:r>
-              <a:t>•  Closed-book, closed-note</a:t>
+              <a:t>Each tool call satisfies its pre/postcondition.  (Hoare triples)</a:t>
+            </a:r>
+          </a:p>
+          <a:p>
+            <a:pPr algn="l">
+              <a:spcAft>
+                <a:spcPts val="300"/>
+              </a:spcAft>
+              <a:defRPr sz="400" b="0">
+                <a:solidFill>
+                  <a:srgbClr val="4A5568"/>
+                </a:solidFill>
+                <a:latin typeface="Trebuchet MS"/>
+              </a:defRPr>
+            </a:pPr>
+            <a:endParaRPr/>
+          </a:p>
+          <a:p>
+            <a:pPr algn="l">
+              <a:spcAft>
+                <a:spcPts val="300"/>
+              </a:spcAft>
+              <a:defRPr sz="1150" b="1">
+                <a:solidFill>
+                  <a:srgbClr val="0E7C7B"/>
+                </a:solidFill>
+                <a:latin typeface="Trebuchet MS"/>
+              </a:defRPr>
+            </a:pPr>
+            <a:r>
+              <a:t>Skill-Level</a:t>
             </a:r>
           </a:p>
           <a:p>
@@ -9728,7 +11506,37 @@
               </a:defRPr>
             </a:pPr>
             <a:r>
-              <a:t>•  110 minutes</a:t>
+              <a:t>A complete skill satisfies its contract.  (VCG + static analysis)</a:t>
+            </a:r>
+          </a:p>
+          <a:p>
+            <a:pPr algn="l">
+              <a:spcAft>
+                <a:spcPts val="300"/>
+              </a:spcAft>
+              <a:defRPr sz="400" b="0">
+                <a:solidFill>
+                  <a:srgbClr val="4A5568"/>
+                </a:solidFill>
+                <a:latin typeface="Trebuchet MS"/>
+              </a:defRPr>
+            </a:pPr>
+            <a:endParaRPr/>
+          </a:p>
+          <a:p>
+            <a:pPr algn="l">
+              <a:spcAft>
+                <a:spcPts val="300"/>
+              </a:spcAft>
+              <a:defRPr sz="1150" b="1">
+                <a:solidFill>
+                  <a:srgbClr val="E67E22"/>
+                </a:solidFill>
+                <a:latin typeface="Trebuchet MS"/>
+              </a:defRPr>
+            </a:pPr>
+            <a:r>
+              <a:t>Trace-Level</a:t>
             </a:r>
           </a:p>
           <a:p>
@@ -9744,7 +11552,37 @@
               </a:defRPr>
             </a:pPr>
             <a:r>
-              <a:t>•  Mix of short answer, derivations,</a:t>
+              <a:t>An execution trace satisfies safety/liveness/ordering.  (Runtime monitors, today)</a:t>
+            </a:r>
+          </a:p>
+          <a:p>
+            <a:pPr algn="l">
+              <a:spcAft>
+                <a:spcPts val="300"/>
+              </a:spcAft>
+              <a:defRPr sz="400" b="0">
+                <a:solidFill>
+                  <a:srgbClr val="4A5568"/>
+                </a:solidFill>
+                <a:latin typeface="Trebuchet MS"/>
+              </a:defRPr>
+            </a:pPr>
+            <a:endParaRPr/>
+          </a:p>
+          <a:p>
+            <a:pPr algn="l">
+              <a:spcAft>
+                <a:spcPts val="300"/>
+              </a:spcAft>
+              <a:defRPr sz="1150" b="1">
+                <a:solidFill>
+                  <a:srgbClr val="6C5B7B"/>
+                </a:solidFill>
+                <a:latin typeface="Trebuchet MS"/>
+              </a:defRPr>
+            </a:pPr>
+            <a:r>
+              <a:t>System-Level</a:t>
             </a:r>
           </a:p>
           <a:p>
@@ -9760,7 +11598,7 @@
               </a:defRPr>
             </a:pPr>
             <a:r>
-              <a:t>   and design questions</a:t>
+              <a:t>All possible traces of a multi-agent system satisfy a property.  (Full model checking — aspirational)</a:t>
             </a:r>
           </a:p>
           <a:p>
@@ -9775,21 +11613,22 @@
                 <a:latin typeface="Trebuchet MS"/>
               </a:defRPr>
             </a:pPr>
-          </a:p>
-          <a:p>
-            <a:pPr algn="l">
-              <a:spcAft>
-                <a:spcPts val="300"/>
-              </a:spcAft>
-              <a:defRPr sz="1150" b="1">
-                <a:solidFill>
-                  <a:srgbClr val="0E7C7B"/>
-                </a:solidFill>
-                <a:latin typeface="Trebuchet MS"/>
-              </a:defRPr>
-            </a:pPr>
-            <a:r>
-              <a:t>Coverage (Lectures 1–10)</a:t>
+            <a:endParaRPr/>
+          </a:p>
+          <a:p>
+            <a:pPr algn="l">
+              <a:spcAft>
+                <a:spcPts val="300"/>
+              </a:spcAft>
+              <a:defRPr sz="1100" b="1">
+                <a:solidFill>
+                  <a:srgbClr val="1B2A4A"/>
+                </a:solidFill>
+                <a:latin typeface="Trebuchet MS"/>
+              </a:defRPr>
+            </a:pPr>
+            <a:r>
+              <a:t>This course focuses on step, skill, and trace levels — the practical ones.</a:t>
             </a:r>
           </a:p>
           <a:p>
@@ -9805,296 +11644,7 @@
               </a:defRPr>
             </a:pPr>
             <a:r>
-              <a:t>•  Agentic programming concepts</a:t>
-            </a:r>
-          </a:p>
-          <a:p>
-            <a:pPr algn="l">
-              <a:spcAft>
-                <a:spcPts val="300"/>
-              </a:spcAft>
-              <a:defRPr sz="1100" b="0">
-                <a:solidFill>
-                  <a:srgbClr val="4A5568"/>
-                </a:solidFill>
-                <a:latin typeface="Trebuchet MS"/>
-              </a:defRPr>
-            </a:pPr>
-            <a:r>
-              <a:t>•  Skills, MCP, multi-agent patterns</a:t>
-            </a:r>
-          </a:p>
-          <a:p>
-            <a:pPr algn="l">
-              <a:spcAft>
-                <a:spcPts val="300"/>
-              </a:spcAft>
-              <a:defRPr sz="1100" b="0">
-                <a:solidFill>
-                  <a:srgbClr val="4A5568"/>
-                </a:solidFill>
-                <a:latin typeface="Trebuchet MS"/>
-              </a:defRPr>
-            </a:pPr>
-            <a:r>
-              <a:t>•  Hoare logic + VCG</a:t>
-            </a:r>
-          </a:p>
-          <a:p>
-            <a:pPr algn="l">
-              <a:spcAft>
-                <a:spcPts val="300"/>
-              </a:spcAft>
-              <a:defRPr sz="1100" b="0">
-                <a:solidFill>
-                  <a:srgbClr val="4A5568"/>
-                </a:solidFill>
-                <a:latin typeface="Trebuchet MS"/>
-              </a:defRPr>
-            </a:pPr>
-            <a:r>
-              <a:t>•  SAT/SMT (not solver internals)</a:t>
-            </a:r>
-          </a:p>
-          <a:p>
-            <a:pPr algn="l">
-              <a:spcAft>
-                <a:spcPts val="300"/>
-              </a:spcAft>
-              <a:defRPr sz="1100" b="0">
-                <a:solidFill>
-                  <a:srgbClr val="4A5568"/>
-                </a:solidFill>
-                <a:latin typeface="Trebuchet MS"/>
-              </a:defRPr>
-            </a:pPr>
-            <a:r>
-              <a:t>•  Static analysis + Datalog</a:t>
-            </a:r>
-          </a:p>
-          <a:p>
-            <a:pPr algn="l">
-              <a:spcAft>
-                <a:spcPts val="300"/>
-              </a:spcAft>
-              <a:defRPr sz="1100" b="0">
-                <a:solidFill>
-                  <a:srgbClr val="4A5568"/>
-                </a:solidFill>
-                <a:latin typeface="Trebuchet MS"/>
-              </a:defRPr>
-            </a:pPr>
-            <a:r>
-              <a:t>•  Trace properties + monitors</a:t>
-            </a:r>
-          </a:p>
-        </p:txBody>
-      </p:sp>
-      <p:sp>
-        <p:nvSpPr>
-          <p:cNvPr id="7" name="TextBox 6"/>
-          <p:cNvSpPr txBox="1"/>
-          <p:nvPr/>
-        </p:nvSpPr>
-        <p:spPr>
-          <a:xfrm>
-            <a:off x="4800600" y="1005840"/>
-            <a:ext cx="3931920" cy="3657600"/>
-          </a:xfrm>
-          <a:prstGeom prst="rect">
-            <a:avLst/>
-          </a:prstGeom>
-          <a:noFill/>
-        </p:spPr>
-        <p:txBody>
-          <a:bodyPr wrap="square">
-            <a:spAutoFit/>
-          </a:bodyPr>
-          <a:lstStyle/>
-          <a:p>
-            <a:pPr algn="l">
-              <a:spcAft>
-                <a:spcPts val="300"/>
-              </a:spcAft>
-              <a:defRPr sz="1150" b="1">
-                <a:solidFill>
-                  <a:srgbClr val="E67E22"/>
-                </a:solidFill>
-                <a:latin typeface="Trebuchet MS"/>
-              </a:defRPr>
-            </a:pPr>
-            <a:r>
-              <a:t>Sample Question Types</a:t>
-            </a:r>
-          </a:p>
-          <a:p>
-            <a:pPr algn="l">
-              <a:spcAft>
-                <a:spcPts val="300"/>
-              </a:spcAft>
-              <a:defRPr sz="400" b="0">
-                <a:solidFill>
-                  <a:srgbClr val="4A5568"/>
-                </a:solidFill>
-                <a:latin typeface="Trebuchet MS"/>
-              </a:defRPr>
-            </a:pPr>
-          </a:p>
-          <a:p>
-            <a:pPr algn="l">
-              <a:spcAft>
-                <a:spcPts val="300"/>
-              </a:spcAft>
-              <a:defRPr sz="1100" b="0">
-                <a:solidFill>
-                  <a:srgbClr val="4A5568"/>
-                </a:solidFill>
-                <a:latin typeface="Trebuchet MS"/>
-              </a:defRPr>
-            </a:pPr>
-            <a:r>
-              <a:t>1.  Derive a Hoare logic proof tree</a:t>
-            </a:r>
-          </a:p>
-          <a:p>
-            <a:pPr algn="l">
-              <a:spcAft>
-                <a:spcPts val="300"/>
-              </a:spcAft>
-              <a:defRPr sz="1100" b="0">
-                <a:solidFill>
-                  <a:srgbClr val="4A5568"/>
-                </a:solidFill>
-                <a:latin typeface="Trebuchet MS"/>
-              </a:defRPr>
-            </a:pPr>
-            <a:r>
-              <a:t>2.  Compute wp for an IMP program</a:t>
-            </a:r>
-          </a:p>
-          <a:p>
-            <a:pPr algn="l">
-              <a:spcAft>
-                <a:spcPts val="300"/>
-              </a:spcAft>
-              <a:defRPr sz="1100" b="0">
-                <a:solidFill>
-                  <a:srgbClr val="4A5568"/>
-                </a:solidFill>
-                <a:latin typeface="Trebuchet MS"/>
-              </a:defRPr>
-            </a:pPr>
-            <a:r>
-              <a:t>3.  Write a Z3 encoding for a policy</a:t>
-            </a:r>
-          </a:p>
-          <a:p>
-            <a:pPr algn="l">
-              <a:spcAft>
-                <a:spcPts val="300"/>
-              </a:spcAft>
-              <a:defRPr sz="1100" b="0">
-                <a:solidFill>
-                  <a:srgbClr val="4A5568"/>
-                </a:solidFill>
-                <a:latin typeface="Trebuchet MS"/>
-              </a:defRPr>
-            </a:pPr>
-            <a:r>
-              <a:t>4.  Write Datalog rules for an analysis</a:t>
-            </a:r>
-          </a:p>
-          <a:p>
-            <a:pPr algn="l">
-              <a:spcAft>
-                <a:spcPts val="300"/>
-              </a:spcAft>
-              <a:defRPr sz="1100" b="0">
-                <a:solidFill>
-                  <a:srgbClr val="4A5568"/>
-                </a:solidFill>
-                <a:latin typeface="Trebuchet MS"/>
-              </a:defRPr>
-            </a:pPr>
-            <a:r>
-              <a:t>5.  Design a DFA monitor for a property</a:t>
-            </a:r>
-          </a:p>
-          <a:p>
-            <a:pPr algn="l">
-              <a:spcAft>
-                <a:spcPts val="300"/>
-              </a:spcAft>
-              <a:defRPr sz="1100" b="0">
-                <a:solidFill>
-                  <a:srgbClr val="4A5568"/>
-                </a:solidFill>
-                <a:latin typeface="Trebuchet MS"/>
-              </a:defRPr>
-            </a:pPr>
-            <a:r>
-              <a:t>6.  Classify properties (safety/liveness)</a:t>
-            </a:r>
-          </a:p>
-          <a:p>
-            <a:pPr algn="l">
-              <a:spcAft>
-                <a:spcPts val="300"/>
-              </a:spcAft>
-              <a:defRPr sz="1100" b="0">
-                <a:solidFill>
-                  <a:srgbClr val="4A5568"/>
-                </a:solidFill>
-                <a:latin typeface="Trebuchet MS"/>
-              </a:defRPr>
-            </a:pPr>
-            <a:r>
-              <a:t>7.  Explain when each technique applies</a:t>
-            </a:r>
-          </a:p>
-          <a:p>
-            <a:pPr algn="l">
-              <a:spcAft>
-                <a:spcPts val="300"/>
-              </a:spcAft>
-              <a:defRPr sz="800" b="0">
-                <a:solidFill>
-                  <a:srgbClr val="4A5568"/>
-                </a:solidFill>
-                <a:latin typeface="Trebuchet MS"/>
-              </a:defRPr>
-            </a:pPr>
-          </a:p>
-          <a:p>
-            <a:pPr algn="l">
-              <a:spcAft>
-                <a:spcPts val="300"/>
-              </a:spcAft>
-              <a:defRPr sz="1100" b="1">
-                <a:solidFill>
-                  <a:srgbClr val="0E7C7B"/>
-                </a:solidFill>
-                <a:latin typeface="Trebuchet MS"/>
-              </a:defRPr>
-            </a:pPr>
-            <a:r>
-              <a:t>No memorization of algorithms.</a:t>
-            </a:r>
-          </a:p>
-          <a:p>
-            <a:pPr algn="l">
-              <a:spcAft>
-                <a:spcPts val="300"/>
-              </a:spcAft>
-              <a:defRPr sz="1100" b="0">
-                <a:solidFill>
-                  <a:srgbClr val="4A5568"/>
-                </a:solidFill>
-                <a:latin typeface="Trebuchet MS"/>
-              </a:defRPr>
-            </a:pPr>
-            <a:r>
-              <a:t>Focus on understanding and applying.</a:t>
+              <a:t>System-level is active research (and connects to Part III &amp; IV of the course).</a:t>
             </a:r>
           </a:p>
         </p:txBody>
@@ -10108,7 +11658,7 @@
 </file>
 
 <file path=ppt/slides/slide25.xml><?xml version="1.0" encoding="utf-8"?>
-<p:sld xmlns:a="http://schemas.openxmlformats.org/drawingml/2006/main" xmlns:p="http://schemas.openxmlformats.org/presentationml/2006/main" xmlns:r="http://schemas.openxmlformats.org/officeDocument/2006/relationships">
+<p:sld xmlns:a="http://schemas.openxmlformats.org/drawingml/2006/main" xmlns:r="http://schemas.openxmlformats.org/officeDocument/2006/relationships" xmlns:p="http://schemas.openxmlformats.org/presentationml/2006/main">
   <p:cSld>
     <p:spTree>
       <p:nvGrpSpPr>
@@ -10116,7 +11666,14 @@
         <p:cNvGrpSpPr/>
         <p:nvPr/>
       </p:nvGrpSpPr>
-      <p:grpSpPr/>
+      <p:grpSpPr>
+        <a:xfrm>
+          <a:off x="0" y="0"/>
+          <a:ext cx="0" cy="0"/>
+          <a:chOff x="0" y="0"/>
+          <a:chExt cx="0" cy="0"/>
+        </a:xfrm>
+      </p:grpSpPr>
       <p:sp>
         <p:nvSpPr>
           <p:cNvPr id="2" name="TextBox 1"/>
@@ -10126,7 +11683,7 @@
         <p:spPr>
           <a:xfrm>
             <a:off x="502920" y="164592"/>
-            <a:ext cx="8138160" cy="457200"/>
+            <a:ext cx="8229600" cy="274320"/>
           </a:xfrm>
           <a:prstGeom prst="rect">
             <a:avLst/>
@@ -10140,15 +11697,15 @@
           <a:lstStyle/>
           <a:p>
             <a:pPr algn="l">
-              <a:defRPr sz="2600" b="1">
-                <a:solidFill>
-                  <a:srgbClr val="1B2A4A"/>
-                </a:solidFill>
-                <a:latin typeface="Trebuchet MS"/>
-              </a:defRPr>
-            </a:pPr>
-            <a:r>
-              <a:t>Key Takeaways</a:t>
+              <a:defRPr sz="1100" b="1">
+                <a:solidFill>
+                  <a:srgbClr val="0E7C7B"/>
+                </a:solidFill>
+                <a:latin typeface="Trebuchet MS"/>
+              </a:defRPr>
+            </a:pPr>
+            <a:r>
+              <a:t>EXERCISE</a:t>
             </a:r>
           </a:p>
         </p:txBody>
@@ -10161,6 +11718,42 @@
         </p:nvSpPr>
         <p:spPr>
           <a:xfrm>
+            <a:off x="502920" y="438912"/>
+            <a:ext cx="8229600" cy="457200"/>
+          </a:xfrm>
+          <a:prstGeom prst="rect">
+            <a:avLst/>
+          </a:prstGeom>
+          <a:noFill/>
+        </p:spPr>
+        <p:txBody>
+          <a:bodyPr wrap="square">
+            <a:spAutoFit/>
+          </a:bodyPr>
+          <a:lstStyle/>
+          <a:p>
+            <a:pPr algn="l">
+              <a:defRPr sz="2600" b="1">
+                <a:solidFill>
+                  <a:srgbClr val="1B2A4A"/>
+                </a:solidFill>
+                <a:latin typeface="Trebuchet MS"/>
+              </a:defRPr>
+            </a:pPr>
+            <a:r>
+              <a:t>Design a Monitor</a:t>
+            </a:r>
+          </a:p>
+        </p:txBody>
+      </p:sp>
+      <p:sp>
+        <p:nvSpPr>
+          <p:cNvPr id="4" name="TextBox 3"/>
+          <p:cNvSpPr txBox="1"/>
+          <p:nvPr/>
+        </p:nvSpPr>
+        <p:spPr>
+          <a:xfrm>
             <a:off x="502920" y="4956048"/>
             <a:ext cx="5486400" cy="182880"/>
           </a:xfrm>
@@ -10191,7 +11784,7 @@
       </p:sp>
       <p:sp>
         <p:nvSpPr>
-          <p:cNvPr id="4" name="TextBox 3"/>
+          <p:cNvPr id="5" name="TextBox 4"/>
           <p:cNvSpPr txBox="1"/>
           <p:nvPr/>
         </p:nvSpPr>
@@ -10220,20 +11813,20 @@
               </a:defRPr>
             </a:pPr>
             <a:r>
-              <a:t>27</a:t>
-            </a:r>
-          </a:p>
-        </p:txBody>
-      </p:sp>
-      <p:sp>
-        <p:nvSpPr>
-          <p:cNvPr id="5" name="TextBox 4"/>
+              <a:t>25</a:t>
+            </a:r>
+          </a:p>
+        </p:txBody>
+      </p:sp>
+      <p:sp>
+        <p:nvSpPr>
+          <p:cNvPr id="6" name="TextBox 5"/>
           <p:cNvSpPr txBox="1"/>
           <p:nvPr/>
         </p:nvSpPr>
         <p:spPr>
           <a:xfrm>
-            <a:off x="502920" y="822960"/>
+            <a:off x="502920" y="1005840"/>
             <a:ext cx="8229600" cy="3657600"/>
           </a:xfrm>
           <a:prstGeom prst="rect">
@@ -10251,15 +11844,135 @@
               <a:spcAft>
                 <a:spcPts val="300"/>
               </a:spcAft>
-              <a:defRPr sz="1400" b="1">
-                <a:solidFill>
-                  <a:srgbClr val="5DAFAF"/>
-                </a:solidFill>
-                <a:latin typeface="Trebuchet MS"/>
-              </a:defRPr>
-            </a:pPr>
-            <a:r>
-              <a:t>1</a:t>
+              <a:defRPr sz="1200" b="1">
+                <a:solidFill>
+                  <a:srgbClr val="1B2A4A"/>
+                </a:solidFill>
+                <a:latin typeface="Trebuchet MS"/>
+              </a:defRPr>
+            </a:pPr>
+            <a:r>
+              <a:t>Policy:  "An agent must not call bash after reading a file containing secrets."</a:t>
+            </a:r>
+          </a:p>
+          <a:p>
+            <a:pPr algn="l">
+              <a:spcAft>
+                <a:spcPts val="300"/>
+              </a:spcAft>
+              <a:defRPr sz="800" b="0">
+                <a:solidFill>
+                  <a:srgbClr val="4A5568"/>
+                </a:solidFill>
+                <a:latin typeface="Trebuchet MS"/>
+              </a:defRPr>
+            </a:pPr>
+            <a:endParaRPr/>
+          </a:p>
+          <a:p>
+            <a:pPr algn="l">
+              <a:spcAft>
+                <a:spcPts val="300"/>
+              </a:spcAft>
+              <a:defRPr sz="1200" b="1">
+                <a:solidFill>
+                  <a:srgbClr val="4A5568"/>
+                </a:solidFill>
+                <a:latin typeface="Trebuchet MS"/>
+              </a:defRPr>
+            </a:pPr>
+            <a:r>
+              <a:t>Question 1:  What are the DFA states?</a:t>
+            </a:r>
+          </a:p>
+          <a:p>
+            <a:pPr algn="l">
+              <a:spcAft>
+                <a:spcPts val="300"/>
+              </a:spcAft>
+              <a:defRPr sz="600" b="0">
+                <a:solidFill>
+                  <a:srgbClr val="4A5568"/>
+                </a:solidFill>
+                <a:latin typeface="Trebuchet MS"/>
+              </a:defRPr>
+            </a:pPr>
+            <a:endParaRPr/>
+          </a:p>
+          <a:p>
+            <a:pPr algn="l">
+              <a:spcAft>
+                <a:spcPts val="300"/>
+              </a:spcAft>
+              <a:defRPr sz="1200" b="1">
+                <a:solidFill>
+                  <a:srgbClr val="4A5568"/>
+                </a:solidFill>
+                <a:latin typeface="Trebuchet MS"/>
+              </a:defRPr>
+            </a:pPr>
+            <a:r>
+              <a:t>Question 2:  What are the transitions?</a:t>
+            </a:r>
+          </a:p>
+          <a:p>
+            <a:pPr algn="l">
+              <a:spcAft>
+                <a:spcPts val="300"/>
+              </a:spcAft>
+              <a:defRPr sz="600" b="0">
+                <a:solidFill>
+                  <a:srgbClr val="4A5568"/>
+                </a:solidFill>
+                <a:latin typeface="Trebuchet MS"/>
+              </a:defRPr>
+            </a:pPr>
+            <a:endParaRPr/>
+          </a:p>
+          <a:p>
+            <a:pPr algn="l">
+              <a:spcAft>
+                <a:spcPts val="300"/>
+              </a:spcAft>
+              <a:defRPr sz="1200" b="1">
+                <a:solidFill>
+                  <a:srgbClr val="4A5568"/>
+                </a:solidFill>
+                <a:latin typeface="Trebuchet MS"/>
+              </a:defRPr>
+            </a:pPr>
+            <a:r>
+              <a:t>Question 3:  What is the reject state?</a:t>
+            </a:r>
+          </a:p>
+          <a:p>
+            <a:pPr algn="l">
+              <a:spcAft>
+                <a:spcPts val="300"/>
+              </a:spcAft>
+              <a:defRPr sz="600" b="0">
+                <a:solidFill>
+                  <a:srgbClr val="4A5568"/>
+                </a:solidFill>
+                <a:latin typeface="Trebuchet MS"/>
+              </a:defRPr>
+            </a:pPr>
+            <a:endParaRPr/>
+          </a:p>
+          <a:p>
+            <a:pPr algn="l">
+              <a:spcAft>
+                <a:spcPts val="300"/>
+              </a:spcAft>
+              <a:defRPr sz="1200" b="1">
+                <a:solidFill>
+                  <a:srgbClr val="4A5568"/>
+                </a:solidFill>
+                <a:latin typeface="Trebuchet MS"/>
+              </a:defRPr>
+            </a:pPr>
+            <a:r>
+              <a:t>Question 4:  How would you classify this property?</a:t>
             </a:r>
           </a:p>
           <a:p>
@@ -10269,193 +11982,73 @@
               </a:spcAft>
               <a:defRPr sz="1100" b="0">
                 <a:solidFill>
-                  <a:srgbClr val="4A5568"/>
-                </a:solidFill>
-                <a:latin typeface="Trebuchet MS"/>
-              </a:defRPr>
-            </a:pPr>
-            <a:r>
-              <a:t>Agent traces are sequences of tool-call events — no special formalism needed to work with them.</a:t>
-            </a:r>
-          </a:p>
-          <a:p>
-            <a:pPr algn="l">
-              <a:spcAft>
-                <a:spcPts val="300"/>
-              </a:spcAft>
-              <a:defRPr sz="400" b="0">
-                <a:solidFill>
-                  <a:srgbClr val="4A5568"/>
-                </a:solidFill>
-                <a:latin typeface="Trebuchet MS"/>
-              </a:defRPr>
-            </a:pPr>
-          </a:p>
-          <a:p>
-            <a:pPr algn="l">
-              <a:spcAft>
-                <a:spcPts val="300"/>
-              </a:spcAft>
-              <a:defRPr sz="1400" b="1">
-                <a:solidFill>
-                  <a:srgbClr val="5DAFAF"/>
-                </a:solidFill>
-                <a:latin typeface="Trebuchet MS"/>
-              </a:defRPr>
-            </a:pPr>
-            <a:r>
-              <a:t>2</a:t>
-            </a:r>
-          </a:p>
-          <a:p>
-            <a:pPr algn="l">
-              <a:spcAft>
-                <a:spcPts val="300"/>
-              </a:spcAft>
-              <a:defRPr sz="1100" b="0">
-                <a:solidFill>
-                  <a:srgbClr val="4A5568"/>
-                </a:solidFill>
-                <a:latin typeface="Trebuchet MS"/>
-              </a:defRPr>
-            </a:pPr>
-            <a:r>
-              <a:t>Safety (∀i), liveness (∃i), and ordering (∀j.∃i&lt;j) cover most agent properties, expressed as Python predicates.</a:t>
-            </a:r>
-          </a:p>
-          <a:p>
-            <a:pPr algn="l">
-              <a:spcAft>
-                <a:spcPts val="300"/>
-              </a:spcAft>
-              <a:defRPr sz="400" b="0">
-                <a:solidFill>
-                  <a:srgbClr val="4A5568"/>
-                </a:solidFill>
-                <a:latin typeface="Trebuchet MS"/>
-              </a:defRPr>
-            </a:pPr>
-          </a:p>
-          <a:p>
-            <a:pPr algn="l">
-              <a:spcAft>
-                <a:spcPts val="300"/>
-              </a:spcAft>
-              <a:defRPr sz="1400" b="1">
-                <a:solidFill>
-                  <a:srgbClr val="5DAFAF"/>
-                </a:solidFill>
-                <a:latin typeface="Trebuchet MS"/>
-              </a:defRPr>
-            </a:pPr>
-            <a:r>
-              <a:t>3</a:t>
-            </a:r>
-          </a:p>
-          <a:p>
-            <a:pPr algn="l">
-              <a:spcAft>
-                <a:spcPts val="300"/>
-              </a:spcAft>
-              <a:defRPr sz="1100" b="0">
-                <a:solidFill>
-                  <a:srgbClr val="4A5568"/>
-                </a:solidFill>
-                <a:latin typeface="Trebuchet MS"/>
-              </a:defRPr>
-            </a:pPr>
-            <a:r>
-              <a:t>Runtime monitors are DFAs that consume trace events and reject on violation — O(n), composable, deployable.</a:t>
-            </a:r>
-          </a:p>
-          <a:p>
-            <a:pPr algn="l">
-              <a:spcAft>
-                <a:spcPts val="300"/>
-              </a:spcAft>
-              <a:defRPr sz="400" b="0">
-                <a:solidFill>
-                  <a:srgbClr val="4A5568"/>
-                </a:solidFill>
-                <a:latin typeface="Trebuchet MS"/>
-              </a:defRPr>
-            </a:pPr>
-          </a:p>
-          <a:p>
-            <a:pPr algn="l">
-              <a:spcAft>
-                <a:spcPts val="300"/>
-              </a:spcAft>
-              <a:defRPr sz="1400" b="1">
-                <a:solidFill>
-                  <a:srgbClr val="5DAFAF"/>
-                </a:solidFill>
-                <a:latin typeface="Trebuchet MS"/>
-              </a:defRPr>
-            </a:pPr>
-            <a:r>
-              <a:t>4</a:t>
-            </a:r>
-          </a:p>
-          <a:p>
-            <a:pPr algn="l">
-              <a:spcAft>
-                <a:spcPts val="300"/>
-              </a:spcAft>
-              <a:defRPr sz="1100" b="0">
-                <a:solidFill>
-                  <a:srgbClr val="4A5568"/>
-                </a:solidFill>
-                <a:latin typeface="Trebuchet MS"/>
-              </a:defRPr>
-            </a:pPr>
-            <a:r>
-              <a:t>Bounded trace verification encodes traces as SMT, connecting model checking back to Z3.</a:t>
-            </a:r>
-          </a:p>
-          <a:p>
-            <a:pPr algn="l">
-              <a:spcAft>
-                <a:spcPts val="300"/>
-              </a:spcAft>
-              <a:defRPr sz="400" b="0">
-                <a:solidFill>
-                  <a:srgbClr val="4A5568"/>
-                </a:solidFill>
-                <a:latin typeface="Trebuchet MS"/>
-              </a:defRPr>
-            </a:pPr>
-          </a:p>
-          <a:p>
-            <a:pPr algn="l">
-              <a:spcAft>
-                <a:spcPts val="300"/>
-              </a:spcAft>
-              <a:defRPr sz="1400" b="1">
-                <a:solidFill>
-                  <a:srgbClr val="5DAFAF"/>
-                </a:solidFill>
-                <a:latin typeface="Trebuchet MS"/>
-              </a:defRPr>
-            </a:pPr>
-            <a:r>
-              <a:t>5</a:t>
-            </a:r>
-          </a:p>
-          <a:p>
-            <a:pPr algn="l">
-              <a:spcAft>
-                <a:spcPts val="300"/>
-              </a:spcAft>
-              <a:defRPr sz="1100" b="0">
-                <a:solidFill>
-                  <a:srgbClr val="4A5568"/>
-                </a:solidFill>
-                <a:latin typeface="Trebuchet MS"/>
-              </a:defRPr>
-            </a:pPr>
-            <a:r>
-              <a:t>The four pillars (Hoare, SMT, static analysis, traces) cover the full agent lifecycle.</a:t>
+                  <a:srgbClr val="8A95A7"/>
+                </a:solidFill>
+                <a:latin typeface="Trebuchet MS"/>
+              </a:defRPr>
+            </a:pPr>
+            <a:r>
+              <a:t>  (safety / liveness / ordering)</a:t>
+            </a:r>
+          </a:p>
+          <a:p>
+            <a:pPr algn="l">
+              <a:spcAft>
+                <a:spcPts val="300"/>
+              </a:spcAft>
+              <a:defRPr sz="600" b="0">
+                <a:solidFill>
+                  <a:srgbClr val="4A5568"/>
+                </a:solidFill>
+                <a:latin typeface="Trebuchet MS"/>
+              </a:defRPr>
+            </a:pPr>
+            <a:endParaRPr/>
+          </a:p>
+          <a:p>
+            <a:pPr algn="l">
+              <a:spcAft>
+                <a:spcPts val="300"/>
+              </a:spcAft>
+              <a:defRPr sz="1200" b="1">
+                <a:solidFill>
+                  <a:srgbClr val="4A5568"/>
+                </a:solidFill>
+                <a:latin typeface="Trebuchet MS"/>
+              </a:defRPr>
+            </a:pPr>
+            <a:r>
+              <a:t>Question 5:  Write the monitor as a Python function.</a:t>
+            </a:r>
+          </a:p>
+          <a:p>
+            <a:pPr algn="l">
+              <a:spcAft>
+                <a:spcPts val="300"/>
+              </a:spcAft>
+              <a:defRPr sz="800" b="0">
+                <a:solidFill>
+                  <a:srgbClr val="4A5568"/>
+                </a:solidFill>
+                <a:latin typeface="Trebuchet MS"/>
+              </a:defRPr>
+            </a:pPr>
+            <a:endParaRPr/>
+          </a:p>
+          <a:p>
+            <a:pPr algn="l">
+              <a:spcAft>
+                <a:spcPts val="300"/>
+              </a:spcAft>
+              <a:defRPr sz="1150" b="1">
+                <a:solidFill>
+                  <a:srgbClr val="E67E22"/>
+                </a:solidFill>
+                <a:latin typeface="Trebuchet MS"/>
+              </a:defRPr>
+            </a:pPr>
+            <a:r>
+              <a:t>Try this on paper before we discuss.  (5 minutes)</a:t>
             </a:r>
           </a:p>
         </p:txBody>
@@ -10469,7 +12062,7 @@
 </file>
 
 <file path=ppt/slides/slide26.xml><?xml version="1.0" encoding="utf-8"?>
-<p:sld xmlns:a="http://schemas.openxmlformats.org/drawingml/2006/main" xmlns:p="http://schemas.openxmlformats.org/presentationml/2006/main" xmlns:r="http://schemas.openxmlformats.org/officeDocument/2006/relationships">
+<p:sld xmlns:a="http://schemas.openxmlformats.org/drawingml/2006/main" xmlns:r="http://schemas.openxmlformats.org/officeDocument/2006/relationships" xmlns:p="http://schemas.openxmlformats.org/presentationml/2006/main">
   <p:cSld>
     <p:spTree>
       <p:nvGrpSpPr>
@@ -10477,7 +12070,14 @@
         <p:cNvGrpSpPr/>
         <p:nvPr/>
       </p:nvGrpSpPr>
-      <p:grpSpPr/>
+      <p:grpSpPr>
+        <a:xfrm>
+          <a:off x="0" y="0"/>
+          <a:ext cx="0" cy="0"/>
+          <a:chOff x="0" y="0"/>
+          <a:chExt cx="0" cy="0"/>
+        </a:xfrm>
+      </p:grpSpPr>
       <p:sp>
         <p:nvSpPr>
           <p:cNvPr id="2" name="TextBox 1"/>
@@ -10487,7 +12087,7 @@
         <p:spPr>
           <a:xfrm>
             <a:off x="502920" y="164592"/>
-            <a:ext cx="8138160" cy="457200"/>
+            <a:ext cx="8229600" cy="274320"/>
           </a:xfrm>
           <a:prstGeom prst="rect">
             <a:avLst/>
@@ -10501,15 +12101,15 @@
           <a:lstStyle/>
           <a:p>
             <a:pPr algn="l">
-              <a:defRPr sz="2600" b="1">
-                <a:solidFill>
-                  <a:srgbClr val="1B2A4A"/>
-                </a:solidFill>
-                <a:latin typeface="Trebuchet MS"/>
-              </a:defRPr>
-            </a:pPr>
-            <a:r>
-              <a:t>What’s Next</a:t>
+              <a:defRPr sz="1100" b="1">
+                <a:solidFill>
+                  <a:srgbClr val="0E7C7B"/>
+                </a:solidFill>
+                <a:latin typeface="Trebuchet MS"/>
+              </a:defRPr>
+            </a:pPr>
+            <a:r>
+              <a:t>VI. MIDTERM PREVIEW</a:t>
             </a:r>
           </a:p>
         </p:txBody>
@@ -10522,6 +12122,42 @@
         </p:nvSpPr>
         <p:spPr>
           <a:xfrm>
+            <a:off x="502920" y="438912"/>
+            <a:ext cx="8229600" cy="457200"/>
+          </a:xfrm>
+          <a:prstGeom prst="rect">
+            <a:avLst/>
+          </a:prstGeom>
+          <a:noFill/>
+        </p:spPr>
+        <p:txBody>
+          <a:bodyPr wrap="square">
+            <a:spAutoFit/>
+          </a:bodyPr>
+          <a:lstStyle/>
+          <a:p>
+            <a:pPr algn="l">
+              <a:defRPr sz="2600" b="1">
+                <a:solidFill>
+                  <a:srgbClr val="1B2A4A"/>
+                </a:solidFill>
+                <a:latin typeface="Trebuchet MS"/>
+              </a:defRPr>
+            </a:pPr>
+            <a:r>
+              <a:t>Midterm — May 5, In-Class</a:t>
+            </a:r>
+          </a:p>
+        </p:txBody>
+      </p:sp>
+      <p:sp>
+        <p:nvSpPr>
+          <p:cNvPr id="4" name="TextBox 3"/>
+          <p:cNvSpPr txBox="1"/>
+          <p:nvPr/>
+        </p:nvSpPr>
+        <p:spPr>
+          <a:xfrm>
             <a:off x="502920" y="4956048"/>
             <a:ext cx="5486400" cy="182880"/>
           </a:xfrm>
@@ -10552,7 +12188,7 @@
       </p:sp>
       <p:sp>
         <p:nvSpPr>
-          <p:cNvPr id="4" name="TextBox 3"/>
+          <p:cNvPr id="5" name="TextBox 4"/>
           <p:cNvSpPr txBox="1"/>
           <p:nvPr/>
         </p:nvSpPr>
@@ -10581,21 +12217,21 @@
               </a:defRPr>
             </a:pPr>
             <a:r>
-              <a:t>28</a:t>
-            </a:r>
-          </a:p>
-        </p:txBody>
-      </p:sp>
-      <p:sp>
-        <p:nvSpPr>
-          <p:cNvPr id="5" name="TextBox 4"/>
+              <a:t>26</a:t>
+            </a:r>
+          </a:p>
+        </p:txBody>
+      </p:sp>
+      <p:sp>
+        <p:nvSpPr>
+          <p:cNvPr id="6" name="TextBox 5"/>
           <p:cNvSpPr txBox="1"/>
           <p:nvPr/>
         </p:nvSpPr>
         <p:spPr>
           <a:xfrm>
-            <a:off x="502920" y="822960"/>
-            <a:ext cx="4114800" cy="2286000"/>
+            <a:off x="502920" y="1005840"/>
+            <a:ext cx="4114800" cy="3657600"/>
           </a:xfrm>
           <a:prstGeom prst="rect">
             <a:avLst/>
@@ -10612,77 +12248,219 @@
               <a:spcAft>
                 <a:spcPts val="300"/>
               </a:spcAft>
-              <a:defRPr sz="1600" b="1">
-                <a:solidFill>
-                  <a:srgbClr val="C0392B"/>
-                </a:solidFill>
-                <a:latin typeface="Trebuchet MS"/>
-              </a:defRPr>
-            </a:pPr>
-            <a:r>
-              <a:t>Midterm</a:t>
-            </a:r>
-          </a:p>
-          <a:p>
-            <a:pPr algn="l">
-              <a:spcAft>
-                <a:spcPts val="300"/>
-              </a:spcAft>
-              <a:defRPr sz="1200" b="0">
-                <a:solidFill>
-                  <a:srgbClr val="4A5568"/>
-                </a:solidFill>
-                <a:latin typeface="Trebuchet MS"/>
-              </a:defRPr>
-            </a:pPr>
-            <a:r>
-              <a:t>May 5 (Lecture 11)</a:t>
-            </a:r>
-          </a:p>
-          <a:p>
-            <a:pPr algn="l">
-              <a:spcAft>
-                <a:spcPts val="300"/>
-              </a:spcAft>
-              <a:defRPr sz="1200" b="0">
-                <a:solidFill>
-                  <a:srgbClr val="4A5568"/>
-                </a:solidFill>
-                <a:latin typeface="Trebuchet MS"/>
-              </a:defRPr>
-            </a:pPr>
-            <a:r>
-              <a:t>Covers Lectures 1–10</a:t>
-            </a:r>
-          </a:p>
-          <a:p>
-            <a:pPr algn="l">
-              <a:spcAft>
-                <a:spcPts val="300"/>
-              </a:spcAft>
-              <a:defRPr sz="1200" b="0">
-                <a:solidFill>
-                  <a:srgbClr val="4A5568"/>
-                </a:solidFill>
-                <a:latin typeface="Trebuchet MS"/>
-              </a:defRPr>
-            </a:pPr>
-            <a:r>
-              <a:t>Closed-book, in-class</a:t>
-            </a:r>
-          </a:p>
-        </p:txBody>
-      </p:sp>
-      <p:sp>
-        <p:nvSpPr>
-          <p:cNvPr id="6" name="TextBox 5"/>
+              <a:defRPr sz="1150" b="1">
+                <a:solidFill>
+                  <a:srgbClr val="0E7C7B"/>
+                </a:solidFill>
+                <a:latin typeface="Trebuchet MS"/>
+              </a:defRPr>
+            </a:pPr>
+            <a:r>
+              <a:t>Format</a:t>
+            </a:r>
+          </a:p>
+          <a:p>
+            <a:pPr algn="l">
+              <a:spcAft>
+                <a:spcPts val="300"/>
+              </a:spcAft>
+              <a:defRPr sz="1100" b="0">
+                <a:solidFill>
+                  <a:srgbClr val="4A5568"/>
+                </a:solidFill>
+                <a:latin typeface="Trebuchet MS"/>
+              </a:defRPr>
+            </a:pPr>
+            <a:r>
+              <a:t>•  Closed-book, closed-note</a:t>
+            </a:r>
+          </a:p>
+          <a:p>
+            <a:pPr algn="l">
+              <a:spcAft>
+                <a:spcPts val="300"/>
+              </a:spcAft>
+              <a:defRPr sz="1100" b="0">
+                <a:solidFill>
+                  <a:srgbClr val="4A5568"/>
+                </a:solidFill>
+                <a:latin typeface="Trebuchet MS"/>
+              </a:defRPr>
+            </a:pPr>
+            <a:r>
+              <a:t>•  110 minutes</a:t>
+            </a:r>
+          </a:p>
+          <a:p>
+            <a:pPr algn="l">
+              <a:spcAft>
+                <a:spcPts val="300"/>
+              </a:spcAft>
+              <a:defRPr sz="1100" b="0">
+                <a:solidFill>
+                  <a:srgbClr val="4A5568"/>
+                </a:solidFill>
+                <a:latin typeface="Trebuchet MS"/>
+              </a:defRPr>
+            </a:pPr>
+            <a:r>
+              <a:t>•  Mix of short answer, derivations,</a:t>
+            </a:r>
+          </a:p>
+          <a:p>
+            <a:pPr algn="l">
+              <a:spcAft>
+                <a:spcPts val="300"/>
+              </a:spcAft>
+              <a:defRPr sz="1100" b="0">
+                <a:solidFill>
+                  <a:srgbClr val="4A5568"/>
+                </a:solidFill>
+                <a:latin typeface="Trebuchet MS"/>
+              </a:defRPr>
+            </a:pPr>
+            <a:r>
+              <a:t>   and design questions</a:t>
+            </a:r>
+          </a:p>
+          <a:p>
+            <a:pPr algn="l">
+              <a:spcAft>
+                <a:spcPts val="300"/>
+              </a:spcAft>
+              <a:defRPr sz="800" b="0">
+                <a:solidFill>
+                  <a:srgbClr val="4A5568"/>
+                </a:solidFill>
+                <a:latin typeface="Trebuchet MS"/>
+              </a:defRPr>
+            </a:pPr>
+            <a:endParaRPr/>
+          </a:p>
+          <a:p>
+            <a:pPr algn="l">
+              <a:spcAft>
+                <a:spcPts val="300"/>
+              </a:spcAft>
+              <a:defRPr sz="1150" b="1">
+                <a:solidFill>
+                  <a:srgbClr val="0E7C7B"/>
+                </a:solidFill>
+                <a:latin typeface="Trebuchet MS"/>
+              </a:defRPr>
+            </a:pPr>
+            <a:r>
+              <a:t>Coverage (Lectures 1–10)</a:t>
+            </a:r>
+          </a:p>
+          <a:p>
+            <a:pPr algn="l">
+              <a:spcAft>
+                <a:spcPts val="300"/>
+              </a:spcAft>
+              <a:defRPr sz="1100" b="0">
+                <a:solidFill>
+                  <a:srgbClr val="4A5568"/>
+                </a:solidFill>
+                <a:latin typeface="Trebuchet MS"/>
+              </a:defRPr>
+            </a:pPr>
+            <a:r>
+              <a:t>•  Agentic programming concepts</a:t>
+            </a:r>
+          </a:p>
+          <a:p>
+            <a:pPr algn="l">
+              <a:spcAft>
+                <a:spcPts val="300"/>
+              </a:spcAft>
+              <a:defRPr sz="1100" b="0">
+                <a:solidFill>
+                  <a:srgbClr val="4A5568"/>
+                </a:solidFill>
+                <a:latin typeface="Trebuchet MS"/>
+              </a:defRPr>
+            </a:pPr>
+            <a:r>
+              <a:t>•  Skills, MCP, multi-agent patterns</a:t>
+            </a:r>
+          </a:p>
+          <a:p>
+            <a:pPr algn="l">
+              <a:spcAft>
+                <a:spcPts val="300"/>
+              </a:spcAft>
+              <a:defRPr sz="1100" b="0">
+                <a:solidFill>
+                  <a:srgbClr val="4A5568"/>
+                </a:solidFill>
+                <a:latin typeface="Trebuchet MS"/>
+              </a:defRPr>
+            </a:pPr>
+            <a:r>
+              <a:t>•  Hoare logic + VCG</a:t>
+            </a:r>
+          </a:p>
+          <a:p>
+            <a:pPr algn="l">
+              <a:spcAft>
+                <a:spcPts val="300"/>
+              </a:spcAft>
+              <a:defRPr sz="1100" b="0">
+                <a:solidFill>
+                  <a:srgbClr val="4A5568"/>
+                </a:solidFill>
+                <a:latin typeface="Trebuchet MS"/>
+              </a:defRPr>
+            </a:pPr>
+            <a:r>
+              <a:t>•  SAT/SMT (not solver internals)</a:t>
+            </a:r>
+          </a:p>
+          <a:p>
+            <a:pPr algn="l">
+              <a:spcAft>
+                <a:spcPts val="300"/>
+              </a:spcAft>
+              <a:defRPr sz="1100" b="0">
+                <a:solidFill>
+                  <a:srgbClr val="4A5568"/>
+                </a:solidFill>
+                <a:latin typeface="Trebuchet MS"/>
+              </a:defRPr>
+            </a:pPr>
+            <a:r>
+              <a:t>•  Static analysis + Datalog</a:t>
+            </a:r>
+          </a:p>
+          <a:p>
+            <a:pPr algn="l">
+              <a:spcAft>
+                <a:spcPts val="300"/>
+              </a:spcAft>
+              <a:defRPr sz="1100" b="0">
+                <a:solidFill>
+                  <a:srgbClr val="4A5568"/>
+                </a:solidFill>
+                <a:latin typeface="Trebuchet MS"/>
+              </a:defRPr>
+            </a:pPr>
+            <a:r>
+              <a:t>•  Trace properties + monitors</a:t>
+            </a:r>
+          </a:p>
+        </p:txBody>
+      </p:sp>
+      <p:sp>
+        <p:nvSpPr>
+          <p:cNvPr id="7" name="TextBox 6"/>
           <p:cNvSpPr txBox="1"/>
           <p:nvPr/>
         </p:nvSpPr>
         <p:spPr>
           <a:xfrm>
-            <a:off x="4800600" y="822960"/>
-            <a:ext cx="3931920" cy="2286000"/>
+            <a:off x="4800600" y="1005840"/>
+            <a:ext cx="3931920" cy="3657600"/>
           </a:xfrm>
           <a:prstGeom prst="rect">
             <a:avLst/>
@@ -10697,186 +12475,269 @@
           <a:p>
             <a:pPr algn="l">
               <a:spcAft>
-                <a:spcPts val="300"/>
-              </a:spcAft>
-              <a:defRPr sz="1600" b="1">
+                <a:spcPts val="200"/>
+              </a:spcAft>
+            </a:pPr>
+            <a:r>
+              <a:rPr lang="en-US" sz="1150" b="1" dirty="0">
+                <a:solidFill>
+                  <a:srgbClr val="E67E22"/>
+                </a:solidFill>
+                <a:latin typeface="Trebuchet MS"/>
+              </a:rPr>
+              <a:t>Sample Question Types</a:t>
+            </a:r>
+          </a:p>
+          <a:p>
+            <a:pPr>
+              <a:defRPr sz="300"/>
+            </a:pPr>
+            <a:endParaRPr/>
+          </a:p>
+          <a:p>
+            <a:pPr marL="171450" indent="-171450" algn="l">
+              <a:spcAft>
+                <a:spcPts val="120"/>
+              </a:spcAft>
+              <a:buFont typeface="+mj-lt"/>
+              <a:buAutoNum type="arabicPeriod"/>
+            </a:pPr>
+            <a:r>
+              <a:rPr lang="en-US" sz="950" dirty="0">
+                <a:solidFill>
+                  <a:srgbClr val="4A5568"/>
+                </a:solidFill>
+                <a:latin typeface="Trebuchet MS"/>
+              </a:rPr>
+              <a:t>Single-choice / yes-no on core concepts (agentic paradigm, GATE taxonomy, attention degradation, formal mappings, Hoare logic, context sensitivity, call-graph construction)</a:t>
+            </a:r>
+          </a:p>
+          <a:p>
+            <a:pPr marL="171450" indent="-171450" algn="l">
+              <a:spcAft>
+                <a:spcPts val="120"/>
+              </a:spcAft>
+              <a:buFont typeface="+mj-lt"/>
+              <a:buAutoNum type="arabicPeriod"/>
+            </a:pPr>
+            <a:r>
+              <a:rPr lang="en-US" sz="950" dirty="0">
+                <a:solidFill>
+                  <a:srgbClr val="4A5568"/>
+                </a:solidFill>
+                <a:latin typeface="Trebuchet MS"/>
+              </a:rPr>
+              <a:t>Derive a Hoare logic proof using assignment, sequencing, and conditional rules</a:t>
+            </a:r>
+          </a:p>
+          <a:p>
+            <a:pPr marL="171450" indent="-171450" algn="l">
+              <a:spcAft>
+                <a:spcPts val="120"/>
+              </a:spcAft>
+              <a:buFont typeface="+mj-lt"/>
+              <a:buAutoNum type="arabicPeriod"/>
+            </a:pPr>
+            <a:r>
+              <a:rPr lang="en-US" sz="950" dirty="0">
+                <a:solidFill>
+                  <a:srgbClr val="4A5568"/>
+                </a:solidFill>
+                <a:latin typeface="Trebuchet MS"/>
+              </a:rPr>
+              <a:t>Propose a loop invariant and prove initialization + preservation</a:t>
+            </a:r>
+          </a:p>
+          <a:p>
+            <a:pPr marL="171450" indent="-171450" algn="l">
+              <a:spcAft>
+                <a:spcPts val="120"/>
+              </a:spcAft>
+              <a:buFont typeface="+mj-lt"/>
+              <a:buAutoNum type="arabicPeriod"/>
+            </a:pPr>
+            <a:r>
+              <a:rPr lang="en-US" sz="950" dirty="0">
+                <a:solidFill>
+                  <a:srgbClr val="4A5568"/>
+                </a:solidFill>
+                <a:latin typeface="Trebuchet MS"/>
+              </a:rPr>
+              <a:t>Propose a loop invariant for a harder program (GCD) — no proof required</a:t>
+            </a:r>
+          </a:p>
+          <a:p>
+            <a:pPr marL="171450" indent="-171450" algn="l">
+              <a:spcAft>
+                <a:spcPts val="120"/>
+              </a:spcAft>
+              <a:buFont typeface="+mj-lt"/>
+              <a:buAutoNum type="arabicPeriod"/>
+            </a:pPr>
+            <a:r>
+              <a:rPr lang="en-US" sz="950" dirty="0">
+                <a:solidFill>
+                  <a:srgbClr val="4A5568"/>
+                </a:solidFill>
+                <a:latin typeface="Trebuchet MS"/>
+              </a:rPr>
+              <a:t>Apply precondition strengthening and postcondition weakening rules</a:t>
+            </a:r>
+          </a:p>
+          <a:p>
+            <a:pPr marL="171450" indent="-171450" algn="l">
+              <a:spcAft>
+                <a:spcPts val="120"/>
+              </a:spcAft>
+              <a:buFont typeface="+mj-lt"/>
+              <a:buAutoNum type="arabicPeriod"/>
+            </a:pPr>
+            <a:r>
+              <a:rPr lang="en-US" sz="950" dirty="0">
+                <a:solidFill>
+                  <a:srgbClr val="4A5568"/>
+                </a:solidFill>
+                <a:latin typeface="Trebuchet MS"/>
+              </a:rPr>
+              <a:t>Compute weakest preconditions through assignments, conditionals, and sequences</a:t>
+            </a:r>
+          </a:p>
+          <a:p>
+            <a:pPr marL="171450" indent="-171450" algn="l">
+              <a:spcAft>
+                <a:spcPts val="120"/>
+              </a:spcAft>
+              <a:buFont typeface="+mj-lt"/>
+              <a:buAutoNum type="arabicPeriod"/>
+            </a:pPr>
+            <a:r>
+              <a:rPr lang="en-US" sz="950" dirty="0">
+                <a:solidFill>
+                  <a:srgbClr val="4A5568"/>
+                </a:solidFill>
+                <a:latin typeface="Trebuchet MS"/>
+              </a:rPr>
+              <a:t>Compute wp through assert and assume statements</a:t>
+            </a:r>
+          </a:p>
+          <a:p>
+            <a:pPr marL="171450" indent="-171450" algn="l">
+              <a:spcAft>
+                <a:spcPts val="120"/>
+              </a:spcAft>
+              <a:buFont typeface="+mj-lt"/>
+              <a:buAutoNum type="arabicPeriod"/>
+            </a:pPr>
+            <a:r>
+              <a:rPr lang="en-US" sz="950" dirty="0">
+                <a:solidFill>
+                  <a:srgbClr val="4A5568"/>
+                </a:solidFill>
+                <a:latin typeface="Trebuchet MS"/>
+              </a:rPr>
+              <a:t>Encode agent permission policies as SMT formulas</a:t>
+            </a:r>
+          </a:p>
+          <a:p>
+            <a:pPr marL="171450" indent="-171450" algn="l">
+              <a:spcAft>
+                <a:spcPts val="120"/>
+              </a:spcAft>
+              <a:buFont typeface="+mj-lt"/>
+              <a:buAutoNum type="arabicPeriod"/>
+            </a:pPr>
+            <a:r>
+              <a:rPr lang="en-US" sz="950" dirty="0">
+                <a:solidFill>
+                  <a:srgbClr val="4A5568"/>
+                </a:solidFill>
+                <a:latin typeface="Trebuchet MS"/>
+              </a:rPr>
+              <a:t>Identify policy gaps in a tool-call sequence</a:t>
+            </a:r>
+          </a:p>
+          <a:p>
+            <a:pPr marL="171450" indent="-171450" algn="l">
+              <a:spcAft>
+                <a:spcPts val="120"/>
+              </a:spcAft>
+              <a:buFont typeface="+mj-lt"/>
+              <a:buAutoNum type="arabicPeriod"/>
+            </a:pPr>
+            <a:r>
+              <a:rPr lang="en-US" sz="950" dirty="0">
+                <a:solidFill>
+                  <a:srgbClr val="4A5568"/>
+                </a:solidFill>
+                <a:latin typeface="Trebuchet MS"/>
+              </a:rPr>
+              <a:t>Trace taint through a program and identify source-to-sink violations</a:t>
+            </a:r>
+          </a:p>
+          <a:p>
+            <a:pPr marL="171450" indent="-171450" algn="l">
+              <a:spcAft>
+                <a:spcPts val="120"/>
+              </a:spcAft>
+              <a:buFont typeface="+mj-lt"/>
+              <a:buAutoNum type="arabicPeriod"/>
+            </a:pPr>
+            <a:r>
+              <a:rPr lang="en-US" sz="950" dirty="0">
+                <a:solidFill>
+                  <a:srgbClr val="4A5568"/>
+                </a:solidFill>
+                <a:latin typeface="Trebuchet MS"/>
+              </a:rPr>
+              <a:t>Compute Andersen's points-to analysis using Datalog rules (alloc, copy, store, load)</a:t>
+            </a:r>
+          </a:p>
+          <a:p>
+            <a:pPr>
+              <a:defRPr sz="300"/>
+            </a:pPr>
+            <a:endParaRPr/>
+          </a:p>
+          <a:p>
+            <a:pPr algn="l">
+              <a:spcAft>
+                <a:spcPts val="100"/>
+              </a:spcAft>
+            </a:pPr>
+            <a:r>
+              <a:rPr lang="en-US" sz="1000" b="1" dirty="0">
                 <a:solidFill>
                   <a:srgbClr val="0E7C7B"/>
                 </a:solidFill>
                 <a:latin typeface="Trebuchet MS"/>
-              </a:defRPr>
-            </a:pPr>
-            <a:r>
-              <a:t>After Midterm: Part III</a:t>
-            </a:r>
-          </a:p>
-          <a:p>
-            <a:pPr algn="l">
-              <a:spcAft>
-                <a:spcPts val="300"/>
-              </a:spcAft>
-              <a:defRPr sz="1200" b="0">
-                <a:solidFill>
-                  <a:srgbClr val="4A5568"/>
-                </a:solidFill>
-                <a:latin typeface="Trebuchet MS"/>
-              </a:defRPr>
-            </a:pPr>
-            <a:r>
-              <a:t>Security of Agentic Systems</a:t>
-            </a:r>
-          </a:p>
-          <a:p>
-            <a:pPr algn="l">
-              <a:spcAft>
-                <a:spcPts val="300"/>
-              </a:spcAft>
-              <a:defRPr sz="1100" b="0">
-                <a:solidFill>
-                  <a:srgbClr val="4A5568"/>
-                </a:solidFill>
-                <a:latin typeface="Trebuchet MS"/>
-              </a:defRPr>
-            </a:pPr>
-            <a:r>
-              <a:t>•  Threat landscape</a:t>
-            </a:r>
-          </a:p>
-          <a:p>
-            <a:pPr algn="l">
-              <a:spcAft>
-                <a:spcPts val="300"/>
-              </a:spcAft>
-              <a:defRPr sz="1100" b="0">
-                <a:solidFill>
-                  <a:srgbClr val="4A5568"/>
-                </a:solidFill>
-                <a:latin typeface="Trebuchet MS"/>
-              </a:defRPr>
-            </a:pPr>
-            <a:r>
-              <a:t>•  Skill supply-chain attacks</a:t>
-            </a:r>
-          </a:p>
-          <a:p>
-            <a:pPr algn="l">
-              <a:spcAft>
-                <a:spcPts val="300"/>
-              </a:spcAft>
-              <a:defRPr sz="1100" b="0">
-                <a:solidFill>
-                  <a:srgbClr val="4A5568"/>
-                </a:solidFill>
-                <a:latin typeface="Trebuchet MS"/>
-              </a:defRPr>
-            </a:pPr>
-            <a:r>
-              <a:t>•  Permission escalation</a:t>
-            </a:r>
-          </a:p>
-          <a:p>
-            <a:pPr algn="l">
-              <a:spcAft>
-                <a:spcPts val="300"/>
-              </a:spcAft>
-              <a:defRPr sz="1100" b="0">
-                <a:solidFill>
-                  <a:srgbClr val="4A5568"/>
-                </a:solidFill>
-                <a:latin typeface="Trebuchet MS"/>
-              </a:defRPr>
-            </a:pPr>
-            <a:r>
-              <a:t>•  Fuzzing agent skills</a:t>
-            </a:r>
-          </a:p>
-        </p:txBody>
-      </p:sp>
-      <p:sp>
-        <p:nvSpPr>
-          <p:cNvPr id="7" name="TextBox 6"/>
-          <p:cNvSpPr txBox="1"/>
-          <p:nvPr/>
-        </p:nvSpPr>
-        <p:spPr>
-          <a:xfrm>
-            <a:off x="502920" y="3200400"/>
-            <a:ext cx="8229600" cy="1371600"/>
-          </a:xfrm>
-          <a:prstGeom prst="rect">
-            <a:avLst/>
-          </a:prstGeom>
-          <a:noFill/>
-        </p:spPr>
-        <p:txBody>
-          <a:bodyPr wrap="square">
-            <a:spAutoFit/>
-          </a:bodyPr>
-          <a:lstStyle/>
-          <a:p>
-            <a:pPr algn="l">
-              <a:spcAft>
-                <a:spcPts val="300"/>
-              </a:spcAft>
-              <a:defRPr sz="1200" b="1">
-                <a:solidFill>
-                  <a:srgbClr val="E67E22"/>
-                </a:solidFill>
-                <a:latin typeface="Trebuchet MS"/>
-              </a:defRPr>
-            </a:pPr>
-            <a:r>
-              <a:t>HW2 Due: May 5 (same day as midterm)</a:t>
-            </a:r>
-          </a:p>
-          <a:p>
-            <a:pPr algn="l">
-              <a:spcAft>
-                <a:spcPts val="300"/>
-              </a:spcAft>
-              <a:defRPr sz="1100" b="0">
-                <a:solidFill>
-                  <a:srgbClr val="4A5568"/>
-                </a:solidFill>
-                <a:latin typeface="Trebuchet MS"/>
-              </a:defRPr>
-            </a:pPr>
-            <a:r>
-              <a:t>Implement a VCG for IMP with Z3 + SMT encoding of agent permission policies.</a:t>
-            </a:r>
-          </a:p>
-          <a:p>
-            <a:pPr algn="l">
-              <a:spcAft>
-                <a:spcPts val="300"/>
-              </a:spcAft>
-              <a:defRPr sz="600" b="0">
-                <a:solidFill>
-                  <a:srgbClr val="4A5568"/>
-                </a:solidFill>
-                <a:latin typeface="Trebuchet MS"/>
-              </a:defRPr>
-            </a:pPr>
-          </a:p>
-          <a:p>
-            <a:pPr algn="l">
-              <a:spcAft>
-                <a:spcPts val="300"/>
-              </a:spcAft>
-              <a:defRPr sz="1100" b="1">
-                <a:solidFill>
-                  <a:srgbClr val="0E7C7B"/>
-                </a:solidFill>
-                <a:latin typeface="Trebuchet MS"/>
-              </a:defRPr>
-            </a:pPr>
-            <a:r>
-              <a:t>Study tip:  Review the exercises from each lecture.  If you can do those, you’re ready.</a:t>
+              </a:rPr>
+              <a:t>No memorization of algorithms.</a:t>
+            </a:r>
+          </a:p>
+          <a:p>
+            <a:pPr algn="l">
+              <a:spcAft>
+                <a:spcPts val="100"/>
+              </a:spcAft>
+            </a:pPr>
+            <a:r>
+              <a:rPr lang="en-US" sz="1000" dirty="0">
+                <a:solidFill>
+                  <a:srgbClr val="4A5568"/>
+                </a:solidFill>
+                <a:latin typeface="Trebuchet MS"/>
+              </a:rPr>
+              <a:t>Focus on understanding and applying.</a:t>
             </a:r>
           </a:p>
         </p:txBody>
       </p:sp>
     </p:spTree>
+    <p:extLst>
+      <p:ext uri="{BB962C8B-B14F-4D97-AF65-F5344CB8AC3E}">
+        <p14:creationId xmlns:p14="http://schemas.microsoft.com/office/powerpoint/2010/main" val="3969470452"/>
+      </p:ext>
+    </p:extLst>
   </p:cSld>
   <p:clrMapOvr>
     <a:masterClrMapping/>
@@ -10885,7 +12746,7 @@
 </file>
 
 <file path=ppt/slides/slide27.xml><?xml version="1.0" encoding="utf-8"?>
-<p:sld xmlns:a="http://schemas.openxmlformats.org/drawingml/2006/main" xmlns:p="http://schemas.openxmlformats.org/presentationml/2006/main" xmlns:r="http://schemas.openxmlformats.org/officeDocument/2006/relationships">
+<p:sld xmlns:a="http://schemas.openxmlformats.org/drawingml/2006/main" xmlns:r="http://schemas.openxmlformats.org/officeDocument/2006/relationships" xmlns:p="http://schemas.openxmlformats.org/presentationml/2006/main">
   <p:cSld>
     <p:spTree>
       <p:nvGrpSpPr>
@@ -10893,7 +12754,14 @@
         <p:cNvGrpSpPr/>
         <p:nvPr/>
       </p:nvGrpSpPr>
-      <p:grpSpPr/>
+      <p:grpSpPr>
+        <a:xfrm>
+          <a:off x="0" y="0"/>
+          <a:ext cx="0" cy="0"/>
+          <a:chOff x="0" y="0"/>
+          <a:chExt cx="0" cy="0"/>
+        </a:xfrm>
+      </p:grpSpPr>
       <p:sp>
         <p:nvSpPr>
           <p:cNvPr id="2" name="TextBox 1"/>
@@ -10903,7 +12771,7 @@
         <p:spPr>
           <a:xfrm>
             <a:off x="502920" y="164592"/>
-            <a:ext cx="8229600" cy="274320"/>
+            <a:ext cx="8138160" cy="457200"/>
           </a:xfrm>
           <a:prstGeom prst="rect">
             <a:avLst/>
@@ -10917,15 +12785,15 @@
           <a:lstStyle/>
           <a:p>
             <a:pPr algn="l">
-              <a:defRPr sz="1100" b="1">
-                <a:solidFill>
-                  <a:srgbClr val="0E7C7B"/>
-                </a:solidFill>
-                <a:latin typeface="Trebuchet MS"/>
-              </a:defRPr>
-            </a:pPr>
-            <a:r>
-              <a:t>IV. BOUNDED TRACE VERIFICATION</a:t>
+              <a:defRPr sz="2600" b="1">
+                <a:solidFill>
+                  <a:srgbClr val="1B2A4A"/>
+                </a:solidFill>
+                <a:latin typeface="Trebuchet MS"/>
+              </a:defRPr>
+            </a:pPr>
+            <a:r>
+              <a:t>Key Takeaways</a:t>
             </a:r>
           </a:p>
         </p:txBody>
@@ -10938,8 +12806,8 @@
         </p:nvSpPr>
         <p:spPr>
           <a:xfrm>
-            <a:off x="502920" y="438912"/>
-            <a:ext cx="8229600" cy="457200"/>
+            <a:off x="502920" y="4956048"/>
+            <a:ext cx="5486400" cy="182880"/>
           </a:xfrm>
           <a:prstGeom prst="rect">
             <a:avLst/>
@@ -10953,15 +12821,15 @@
           <a:lstStyle/>
           <a:p>
             <a:pPr algn="l">
-              <a:defRPr sz="2600" b="1">
-                <a:solidFill>
-                  <a:srgbClr val="1B2A4A"/>
-                </a:solidFill>
-                <a:latin typeface="Trebuchet MS"/>
-              </a:defRPr>
-            </a:pPr>
-            <a:r>
-              <a:t>Example: Permission Escalation Detection</a:t>
+              <a:defRPr sz="750" b="0">
+                <a:solidFill>
+                  <a:srgbClr val="8A95A7"/>
+                </a:solidFill>
+                <a:latin typeface="Trebuchet MS"/>
+              </a:defRPr>
+            </a:pPr>
+            <a:r>
+              <a:t>CS292C · Formal Methods for Agentic Programming</a:t>
             </a:r>
           </a:p>
         </p:txBody>
@@ -10974,8 +12842,8 @@
         </p:nvSpPr>
         <p:spPr>
           <a:xfrm>
-            <a:off x="502920" y="4956048"/>
-            <a:ext cx="5486400" cy="182880"/>
+            <a:off x="8229600" y="4956048"/>
+            <a:ext cx="457200" cy="182880"/>
           </a:xfrm>
           <a:prstGeom prst="rect">
             <a:avLst/>
@@ -10988,7 +12856,7 @@
           </a:bodyPr>
           <a:lstStyle/>
           <a:p>
-            <a:pPr algn="l">
+            <a:pPr algn="r">
               <a:defRPr sz="750" b="0">
                 <a:solidFill>
                   <a:srgbClr val="8A95A7"/>
@@ -10997,7 +12865,7 @@
               </a:defRPr>
             </a:pPr>
             <a:r>
-              <a:t>CS292C · Formal Methods for Agentic Programming</a:t>
+              <a:t>27</a:t>
             </a:r>
           </a:p>
         </p:txBody>
@@ -11010,8 +12878,8 @@
         </p:nvSpPr>
         <p:spPr>
           <a:xfrm>
-            <a:off x="8229600" y="4956048"/>
-            <a:ext cx="457200" cy="182880"/>
+            <a:off x="502920" y="822960"/>
+            <a:ext cx="8229600" cy="3657600"/>
           </a:xfrm>
           <a:prstGeom prst="rect">
             <a:avLst/>
@@ -11024,55 +12892,35 @@
           </a:bodyPr>
           <a:lstStyle/>
           <a:p>
-            <a:pPr algn="r">
-              <a:defRPr sz="750" b="0">
-                <a:solidFill>
-                  <a:srgbClr val="8A95A7"/>
-                </a:solidFill>
-                <a:latin typeface="Trebuchet MS"/>
-              </a:defRPr>
-            </a:pPr>
-            <a:r>
-              <a:t>20</a:t>
-            </a:r>
-          </a:p>
-        </p:txBody>
-      </p:sp>
-      <p:sp>
-        <p:nvSpPr>
-          <p:cNvPr id="6" name="TextBox 5"/>
-          <p:cNvSpPr txBox="1"/>
-          <p:nvPr/>
-        </p:nvSpPr>
-        <p:spPr>
-          <a:xfrm>
-            <a:off x="502920" y="960120"/>
-            <a:ext cx="8229600" cy="3840480"/>
-          </a:xfrm>
-          <a:prstGeom prst="rect">
-            <a:avLst/>
-          </a:prstGeom>
-          <a:noFill/>
-        </p:spPr>
-        <p:txBody>
-          <a:bodyPr wrap="square">
-            <a:spAutoFit/>
-          </a:bodyPr>
-          <a:lstStyle/>
-          <a:p>
-            <a:pPr algn="l">
-              <a:spcAft>
-                <a:spcPts val="300"/>
-              </a:spcAft>
-              <a:defRPr sz="1100" b="1">
-                <a:solidFill>
-                  <a:srgbClr val="1B2A4A"/>
-                </a:solidFill>
-                <a:latin typeface="Trebuchet MS"/>
-              </a:defRPr>
-            </a:pPr>
-            <a:r>
-              <a:t>Can an agent chain 3 tool calls to escalate from USER to ROOT?</a:t>
+            <a:pPr algn="l">
+              <a:spcAft>
+                <a:spcPts val="300"/>
+              </a:spcAft>
+              <a:defRPr sz="1400" b="1">
+                <a:solidFill>
+                  <a:srgbClr val="5DAFAF"/>
+                </a:solidFill>
+                <a:latin typeface="Trebuchet MS"/>
+              </a:defRPr>
+            </a:pPr>
+            <a:r>
+              <a:t>1</a:t>
+            </a:r>
+          </a:p>
+          <a:p>
+            <a:pPr algn="l">
+              <a:spcAft>
+                <a:spcPts val="300"/>
+              </a:spcAft>
+              <a:defRPr sz="1100" b="0">
+                <a:solidFill>
+                  <a:srgbClr val="4A5568"/>
+                </a:solidFill>
+                <a:latin typeface="Trebuchet MS"/>
+              </a:defRPr>
+            </a:pPr>
+            <a:r>
+              <a:t>Agent traces are sequences of tool-call events — no special formalism needed to work with them.</a:t>
             </a:r>
           </a:p>
           <a:p>
@@ -11087,332 +12935,176 @@
                 <a:latin typeface="Trebuchet MS"/>
               </a:defRPr>
             </a:pPr>
-          </a:p>
-          <a:p>
-            <a:pPr algn="l">
-              <a:spcAft>
-                <a:spcPts val="300"/>
-              </a:spcAft>
-              <a:defRPr sz="1000" b="0">
-                <a:solidFill>
-                  <a:srgbClr val="1B2A4A"/>
-                </a:solidFill>
-                <a:latin typeface="Courier New"/>
-              </a:defRPr>
-            </a:pPr>
-            <a:r>
-              <a:t>from z3 import *</a:t>
-            </a:r>
-          </a:p>
-          <a:p>
-            <a:pPr algn="l">
-              <a:spcAft>
-                <a:spcPts val="300"/>
-              </a:spcAft>
-              <a:defRPr sz="1000" b="0">
-                <a:solidFill>
-                  <a:srgbClr val="1B2A4A"/>
-                </a:solidFill>
-                <a:latin typeface="Courier New"/>
-              </a:defRPr>
-            </a:pPr>
-            <a:r>
-              <a:t>USER, ADMIN, ROOT = 0, 1, 2</a:t>
-            </a:r>
-          </a:p>
-          <a:p>
-            <a:pPr algn="l">
-              <a:spcAft>
-                <a:spcPts val="300"/>
-              </a:spcAft>
-              <a:defRPr sz="1000" b="0">
-                <a:solidFill>
-                  <a:srgbClr val="1B2A4A"/>
-                </a:solidFill>
-                <a:latin typeface="Courier New"/>
-              </a:defRPr>
-            </a:pPr>
-            <a:r>
-              <a:t>READ, SUDO, EDIT_CFG = 0, 1, 2</a:t>
-            </a:r>
-          </a:p>
-          <a:p>
-            <a:pPr algn="l">
-              <a:spcAft>
-                <a:spcPts val="300"/>
-              </a:spcAft>
-              <a:defRPr sz="200" b="0">
-                <a:solidFill>
-                  <a:srgbClr val="4A5568"/>
-                </a:solidFill>
-                <a:latin typeface="Trebuchet MS"/>
-              </a:defRPr>
-            </a:pPr>
-          </a:p>
-          <a:p>
-            <a:pPr algn="l">
-              <a:spcAft>
-                <a:spcPts val="300"/>
-              </a:spcAft>
-              <a:defRPr sz="1000" b="0">
-                <a:solidFill>
-                  <a:srgbClr val="1B2A4A"/>
-                </a:solidFill>
-                <a:latin typeface="Courier New"/>
-              </a:defRPr>
-            </a:pPr>
-            <a:r>
-              <a:t>perm = [Int(f"perm_{i}") for i in range(4)]   # perm at each step</a:t>
-            </a:r>
-          </a:p>
-          <a:p>
-            <a:pPr algn="l">
-              <a:spcAft>
-                <a:spcPts val="300"/>
-              </a:spcAft>
-              <a:defRPr sz="1000" b="0">
-                <a:solidFill>
-                  <a:srgbClr val="1B2A4A"/>
-                </a:solidFill>
-                <a:latin typeface="Courier New"/>
-              </a:defRPr>
-            </a:pPr>
-            <a:r>
-              <a:t>act  = [Int(f"act_{i}")  for i in range(3)]   # 3 actions</a:t>
-            </a:r>
-          </a:p>
-          <a:p>
-            <a:pPr algn="l">
-              <a:spcAft>
-                <a:spcPts val="300"/>
-              </a:spcAft>
-              <a:defRPr sz="1000" b="0">
-                <a:solidFill>
-                  <a:srgbClr val="1B2A4A"/>
-                </a:solidFill>
-                <a:latin typeface="Courier New"/>
-              </a:defRPr>
-            </a:pPr>
-            <a:r>
-              <a:t>s = Solver()</a:t>
-            </a:r>
-          </a:p>
-          <a:p>
-            <a:pPr algn="l">
-              <a:spcAft>
-                <a:spcPts val="300"/>
-              </a:spcAft>
-              <a:defRPr sz="1000" b="0">
-                <a:solidFill>
-                  <a:srgbClr val="1B2A4A"/>
-                </a:solidFill>
-                <a:latin typeface="Courier New"/>
-              </a:defRPr>
-            </a:pPr>
-            <a:r>
-              <a:t>s.add(perm[0] == USER)                         # start unprivileged</a:t>
-            </a:r>
-          </a:p>
-          <a:p>
-            <a:pPr algn="l">
-              <a:spcAft>
-                <a:spcPts val="300"/>
-              </a:spcAft>
-              <a:defRPr sz="1000" b="0">
-                <a:solidFill>
-                  <a:srgbClr val="1B2A4A"/>
-                </a:solidFill>
-                <a:latin typeface="Courier New"/>
-              </a:defRPr>
-            </a:pPr>
-            <a:r>
-              <a:t>for i in range(3):                             # encode transitions</a:t>
-            </a:r>
-          </a:p>
-          <a:p>
-            <a:pPr algn="l">
-              <a:spcAft>
-                <a:spcPts val="300"/>
-              </a:spcAft>
-              <a:defRPr sz="1000" b="0">
-                <a:solidFill>
-                  <a:srgbClr val="1B2A4A"/>
-                </a:solidFill>
-                <a:latin typeface="Courier New"/>
-              </a:defRPr>
-            </a:pPr>
-            <a:r>
-              <a:t>    s.add(And(act[i] &gt;= 0, act[i] &lt;= 2))</a:t>
-            </a:r>
-          </a:p>
-          <a:p>
-            <a:pPr algn="l">
-              <a:spcAft>
-                <a:spcPts val="300"/>
-              </a:spcAft>
-              <a:defRPr sz="1000" b="0">
-                <a:solidFill>
-                  <a:srgbClr val="1B2A4A"/>
-                </a:solidFill>
-                <a:latin typeface="Courier New"/>
-              </a:defRPr>
-            </a:pPr>
-            <a:r>
-              <a:t>    s.add(perm[i+1] ==</a:t>
-            </a:r>
-          </a:p>
-          <a:p>
-            <a:pPr algn="l">
-              <a:spcAft>
-                <a:spcPts val="300"/>
-              </a:spcAft>
-              <a:defRPr sz="1000" b="0">
-                <a:solidFill>
-                  <a:srgbClr val="1B2A4A"/>
-                </a:solidFill>
-                <a:latin typeface="Courier New"/>
-              </a:defRPr>
-            </a:pPr>
-            <a:r>
-              <a:t>      If(act[i]==READ, perm[i],                # read: no change</a:t>
-            </a:r>
-          </a:p>
-          <a:p>
-            <a:pPr algn="l">
-              <a:spcAft>
-                <a:spcPts val="300"/>
-              </a:spcAft>
-              <a:defRPr sz="1000" b="0">
-                <a:solidFill>
-                  <a:srgbClr val="1B2A4A"/>
-                </a:solidFill>
-                <a:latin typeface="Courier New"/>
-              </a:defRPr>
-            </a:pPr>
-            <a:r>
-              <a:t>      If(act[i]==EDIT_CFG,                     # edit_config:</a:t>
-            </a:r>
-          </a:p>
-          <a:p>
-            <a:pPr algn="l">
-              <a:spcAft>
-                <a:spcPts val="300"/>
-              </a:spcAft>
-              <a:defRPr sz="1000" b="0">
-                <a:solidFill>
-                  <a:srgbClr val="1B2A4A"/>
-                </a:solidFill>
-                <a:latin typeface="Courier New"/>
-              </a:defRPr>
-            </a:pPr>
-            <a:r>
-              <a:t>         If(perm[i]==USER, ADMIN, perm[i]),     #   USER → ADMIN</a:t>
-            </a:r>
-          </a:p>
-          <a:p>
-            <a:pPr algn="l">
-              <a:spcAft>
-                <a:spcPts val="300"/>
-              </a:spcAft>
-              <a:defRPr sz="1000" b="0">
-                <a:solidFill>
-                  <a:srgbClr val="1B2A4A"/>
-                </a:solidFill>
-                <a:latin typeface="Courier New"/>
-              </a:defRPr>
-            </a:pPr>
-            <a:r>
-              <a:t>         If(perm[i]==ADMIN, ROOT, perm[i]))))   # sudo: ADMIN → ROOT</a:t>
-            </a:r>
-          </a:p>
-          <a:p>
-            <a:pPr algn="l">
-              <a:spcAft>
-                <a:spcPts val="300"/>
-              </a:spcAft>
-              <a:defRPr sz="200" b="0">
-                <a:solidFill>
-                  <a:srgbClr val="4A5568"/>
-                </a:solidFill>
-                <a:latin typeface="Trebuchet MS"/>
-              </a:defRPr>
-            </a:pPr>
-          </a:p>
-          <a:p>
-            <a:pPr algn="l">
-              <a:spcAft>
-                <a:spcPts val="300"/>
-              </a:spcAft>
-              <a:defRPr sz="1000" b="0">
-                <a:solidFill>
-                  <a:srgbClr val="C0392B"/>
-                </a:solidFill>
-                <a:latin typeface="Courier New"/>
-              </a:defRPr>
-            </a:pPr>
-            <a:r>
-              <a:t>s.add(perm[3] == ROOT)                         # goal: reach ROOT</a:t>
-            </a:r>
-          </a:p>
-          <a:p>
-            <a:pPr algn="l">
-              <a:spcAft>
-                <a:spcPts val="300"/>
-              </a:spcAft>
-              <a:defRPr sz="1000" b="1">
-                <a:solidFill>
-                  <a:srgbClr val="0E7C7B"/>
-                </a:solidFill>
-                <a:latin typeface="Courier New"/>
-              </a:defRPr>
-            </a:pPr>
-            <a:r>
-              <a:t>print(s.check())   # sat!</a:t>
-            </a:r>
-          </a:p>
-          <a:p>
-            <a:pPr algn="l">
-              <a:spcAft>
-                <a:spcPts val="300"/>
-              </a:spcAft>
-              <a:defRPr sz="1000" b="1">
-                <a:solidFill>
-                  <a:srgbClr val="0E7C7B"/>
-                </a:solidFill>
-                <a:latin typeface="Courier New"/>
-              </a:defRPr>
-            </a:pPr>
-            <a:r>
-              <a:t>print(s.model())   # act_0=EDIT_CFG, act_1=SUDO, act_2=READ</a:t>
-            </a:r>
-          </a:p>
-          <a:p>
-            <a:pPr algn="l">
-              <a:spcAft>
-                <a:spcPts val="300"/>
-              </a:spcAft>
-              <a:defRPr sz="300" b="0">
-                <a:solidFill>
-                  <a:srgbClr val="4A5568"/>
-                </a:solidFill>
-                <a:latin typeface="Trebuchet MS"/>
-              </a:defRPr>
-            </a:pPr>
-          </a:p>
-          <a:p>
-            <a:pPr algn="l">
-              <a:spcAft>
-                <a:spcPts val="300"/>
-              </a:spcAft>
-              <a:defRPr sz="1100" b="1">
-                <a:solidFill>
-                  <a:srgbClr val="E67E22"/>
-                </a:solidFill>
-                <a:latin typeface="Trebuchet MS"/>
-              </a:defRPr>
-            </a:pPr>
-            <a:r>
-              <a:t>→ Z3 found a 2-step escalation path.  A monitor should block edit_config for USER.</a:t>
+            <a:endParaRPr/>
+          </a:p>
+          <a:p>
+            <a:pPr algn="l">
+              <a:spcAft>
+                <a:spcPts val="300"/>
+              </a:spcAft>
+              <a:defRPr sz="1400" b="1">
+                <a:solidFill>
+                  <a:srgbClr val="5DAFAF"/>
+                </a:solidFill>
+                <a:latin typeface="Trebuchet MS"/>
+              </a:defRPr>
+            </a:pPr>
+            <a:r>
+              <a:t>2</a:t>
+            </a:r>
+          </a:p>
+          <a:p>
+            <a:pPr algn="l">
+              <a:spcAft>
+                <a:spcPts val="300"/>
+              </a:spcAft>
+              <a:defRPr sz="1100" b="0">
+                <a:solidFill>
+                  <a:srgbClr val="4A5568"/>
+                </a:solidFill>
+                <a:latin typeface="Trebuchet MS"/>
+              </a:defRPr>
+            </a:pPr>
+            <a:r>
+              <a:t>Safety (∀i), liveness (∃i), and ordering (∀j.∃i&lt;j) cover most agent properties, expressed as Python predicates.</a:t>
+            </a:r>
+          </a:p>
+          <a:p>
+            <a:pPr algn="l">
+              <a:spcAft>
+                <a:spcPts val="300"/>
+              </a:spcAft>
+              <a:defRPr sz="400" b="0">
+                <a:solidFill>
+                  <a:srgbClr val="4A5568"/>
+                </a:solidFill>
+                <a:latin typeface="Trebuchet MS"/>
+              </a:defRPr>
+            </a:pPr>
+            <a:endParaRPr/>
+          </a:p>
+          <a:p>
+            <a:pPr algn="l">
+              <a:spcAft>
+                <a:spcPts val="300"/>
+              </a:spcAft>
+              <a:defRPr sz="1400" b="1">
+                <a:solidFill>
+                  <a:srgbClr val="5DAFAF"/>
+                </a:solidFill>
+                <a:latin typeface="Trebuchet MS"/>
+              </a:defRPr>
+            </a:pPr>
+            <a:r>
+              <a:t>3</a:t>
+            </a:r>
+          </a:p>
+          <a:p>
+            <a:pPr algn="l">
+              <a:spcAft>
+                <a:spcPts val="300"/>
+              </a:spcAft>
+              <a:defRPr sz="1100" b="0">
+                <a:solidFill>
+                  <a:srgbClr val="4A5568"/>
+                </a:solidFill>
+                <a:latin typeface="Trebuchet MS"/>
+              </a:defRPr>
+            </a:pPr>
+            <a:r>
+              <a:t>Runtime monitors are DFAs that consume trace events and reject on violation — O(n), composable, deployable.</a:t>
+            </a:r>
+          </a:p>
+          <a:p>
+            <a:pPr algn="l">
+              <a:spcAft>
+                <a:spcPts val="300"/>
+              </a:spcAft>
+              <a:defRPr sz="400" b="0">
+                <a:solidFill>
+                  <a:srgbClr val="4A5568"/>
+                </a:solidFill>
+                <a:latin typeface="Trebuchet MS"/>
+              </a:defRPr>
+            </a:pPr>
+            <a:endParaRPr/>
+          </a:p>
+          <a:p>
+            <a:pPr algn="l">
+              <a:spcAft>
+                <a:spcPts val="300"/>
+              </a:spcAft>
+              <a:defRPr sz="1400" b="1">
+                <a:solidFill>
+                  <a:srgbClr val="5DAFAF"/>
+                </a:solidFill>
+                <a:latin typeface="Trebuchet MS"/>
+              </a:defRPr>
+            </a:pPr>
+            <a:r>
+              <a:t>4</a:t>
+            </a:r>
+          </a:p>
+          <a:p>
+            <a:pPr algn="l">
+              <a:spcAft>
+                <a:spcPts val="300"/>
+              </a:spcAft>
+              <a:defRPr sz="1100" b="0">
+                <a:solidFill>
+                  <a:srgbClr val="4A5568"/>
+                </a:solidFill>
+                <a:latin typeface="Trebuchet MS"/>
+              </a:defRPr>
+            </a:pPr>
+            <a:r>
+              <a:t>Bounded trace verification encodes traces as SMT, connecting model checking back to Z3.</a:t>
+            </a:r>
+          </a:p>
+          <a:p>
+            <a:pPr algn="l">
+              <a:spcAft>
+                <a:spcPts val="300"/>
+              </a:spcAft>
+              <a:defRPr sz="400" b="0">
+                <a:solidFill>
+                  <a:srgbClr val="4A5568"/>
+                </a:solidFill>
+                <a:latin typeface="Trebuchet MS"/>
+              </a:defRPr>
+            </a:pPr>
+            <a:endParaRPr/>
+          </a:p>
+          <a:p>
+            <a:pPr algn="l">
+              <a:spcAft>
+                <a:spcPts val="300"/>
+              </a:spcAft>
+              <a:defRPr sz="1400" b="1">
+                <a:solidFill>
+                  <a:srgbClr val="5DAFAF"/>
+                </a:solidFill>
+                <a:latin typeface="Trebuchet MS"/>
+              </a:defRPr>
+            </a:pPr>
+            <a:r>
+              <a:t>5</a:t>
+            </a:r>
+          </a:p>
+          <a:p>
+            <a:pPr algn="l">
+              <a:spcAft>
+                <a:spcPts val="300"/>
+              </a:spcAft>
+              <a:defRPr sz="1100" b="0">
+                <a:solidFill>
+                  <a:srgbClr val="4A5568"/>
+                </a:solidFill>
+                <a:latin typeface="Trebuchet MS"/>
+              </a:defRPr>
+            </a:pPr>
+            <a:r>
+              <a:t>The four pillars (Hoare, SMT, static analysis, traces) cover the full agent lifecycle.</a:t>
             </a:r>
           </a:p>
         </p:txBody>
@@ -11426,7 +13118,7 @@
 </file>
 
 <file path=ppt/slides/slide28.xml><?xml version="1.0" encoding="utf-8"?>
-<p:sld xmlns:a="http://schemas.openxmlformats.org/drawingml/2006/main" xmlns:p="http://schemas.openxmlformats.org/presentationml/2006/main" xmlns:r="http://schemas.openxmlformats.org/officeDocument/2006/relationships">
+<p:sld xmlns:a="http://schemas.openxmlformats.org/drawingml/2006/main" xmlns:r="http://schemas.openxmlformats.org/officeDocument/2006/relationships" xmlns:p="http://schemas.openxmlformats.org/presentationml/2006/main">
   <p:cSld>
     <p:spTree>
       <p:nvGrpSpPr>
@@ -11434,7 +13126,14 @@
         <p:cNvGrpSpPr/>
         <p:nvPr/>
       </p:nvGrpSpPr>
-      <p:grpSpPr/>
+      <p:grpSpPr>
+        <a:xfrm>
+          <a:off x="0" y="0"/>
+          <a:ext cx="0" cy="0"/>
+          <a:chOff x="0" y="0"/>
+          <a:chExt cx="0" cy="0"/>
+        </a:xfrm>
+      </p:grpSpPr>
       <p:sp>
         <p:nvSpPr>
           <p:cNvPr id="2" name="TextBox 1"/>
@@ -11444,7 +13143,7 @@
         <p:spPr>
           <a:xfrm>
             <a:off x="502920" y="164592"/>
-            <a:ext cx="8229600" cy="274320"/>
+            <a:ext cx="8138160" cy="457200"/>
           </a:xfrm>
           <a:prstGeom prst="rect">
             <a:avLst/>
@@ -11458,15 +13157,15 @@
           <a:lstStyle/>
           <a:p>
             <a:pPr algn="l">
-              <a:defRPr sz="1100" b="1">
-                <a:solidFill>
-                  <a:srgbClr val="0E7C7B"/>
-                </a:solidFill>
-                <a:latin typeface="Trebuchet MS"/>
-              </a:defRPr>
-            </a:pPr>
-            <a:r>
-              <a:t>IV. BOUNDED TRACE VERIFICATION</a:t>
+              <a:defRPr sz="2600" b="1">
+                <a:solidFill>
+                  <a:srgbClr val="1B2A4A"/>
+                </a:solidFill>
+                <a:latin typeface="Trebuchet MS"/>
+              </a:defRPr>
+            </a:pPr>
+            <a:r>
+              <a:t>What’s Next</a:t>
             </a:r>
           </a:p>
         </p:txBody>
@@ -11479,8 +13178,8 @@
         </p:nvSpPr>
         <p:spPr>
           <a:xfrm>
-            <a:off x="502920" y="438912"/>
-            <a:ext cx="8229600" cy="457200"/>
+            <a:off x="502920" y="4956048"/>
+            <a:ext cx="5486400" cy="182880"/>
           </a:xfrm>
           <a:prstGeom prst="rect">
             <a:avLst/>
@@ -11494,15 +13193,15 @@
           <a:lstStyle/>
           <a:p>
             <a:pPr algn="l">
-              <a:defRPr sz="2600" b="1">
-                <a:solidFill>
-                  <a:srgbClr val="1B2A4A"/>
-                </a:solidFill>
-                <a:latin typeface="Trebuchet MS"/>
-              </a:defRPr>
-            </a:pPr>
-            <a:r>
-              <a:t>Example: Proving Read-Before-Write</a:t>
+              <a:defRPr sz="750" b="0">
+                <a:solidFill>
+                  <a:srgbClr val="8A95A7"/>
+                </a:solidFill>
+                <a:latin typeface="Trebuchet MS"/>
+              </a:defRPr>
+            </a:pPr>
+            <a:r>
+              <a:t>CS292C · Formal Methods for Agentic Programming</a:t>
             </a:r>
           </a:p>
         </p:txBody>
@@ -11515,8 +13214,8 @@
         </p:nvSpPr>
         <p:spPr>
           <a:xfrm>
-            <a:off x="502920" y="4956048"/>
-            <a:ext cx="5486400" cy="182880"/>
+            <a:off x="8229600" y="4956048"/>
+            <a:ext cx="457200" cy="182880"/>
           </a:xfrm>
           <a:prstGeom prst="rect">
             <a:avLst/>
@@ -11529,7 +13228,7 @@
           </a:bodyPr>
           <a:lstStyle/>
           <a:p>
-            <a:pPr algn="l">
+            <a:pPr algn="r">
               <a:defRPr sz="750" b="0">
                 <a:solidFill>
                   <a:srgbClr val="8A95A7"/>
@@ -11538,7 +13237,7 @@
               </a:defRPr>
             </a:pPr>
             <a:r>
-              <a:t>CS292C · Formal Methods for Agentic Programming</a:t>
+              <a:t>28</a:t>
             </a:r>
           </a:p>
         </p:txBody>
@@ -11551,8 +13250,8 @@
         </p:nvSpPr>
         <p:spPr>
           <a:xfrm>
-            <a:off x="8229600" y="4956048"/>
-            <a:ext cx="457200" cy="182880"/>
+            <a:off x="502920" y="822960"/>
+            <a:ext cx="4114800" cy="2286000"/>
           </a:xfrm>
           <a:prstGeom prst="rect">
             <a:avLst/>
@@ -11565,16 +13264,67 @@
           </a:bodyPr>
           <a:lstStyle/>
           <a:p>
-            <a:pPr algn="r">
-              <a:defRPr sz="750" b="0">
-                <a:solidFill>
-                  <a:srgbClr val="8A95A7"/>
-                </a:solidFill>
-                <a:latin typeface="Trebuchet MS"/>
-              </a:defRPr>
-            </a:pPr>
-            <a:r>
-              <a:t>21</a:t>
+            <a:pPr algn="l">
+              <a:spcAft>
+                <a:spcPts val="300"/>
+              </a:spcAft>
+              <a:defRPr sz="1600" b="1">
+                <a:solidFill>
+                  <a:srgbClr val="C0392B"/>
+                </a:solidFill>
+                <a:latin typeface="Trebuchet MS"/>
+              </a:defRPr>
+            </a:pPr>
+            <a:r>
+              <a:t>Midterm</a:t>
+            </a:r>
+          </a:p>
+          <a:p>
+            <a:pPr algn="l">
+              <a:spcAft>
+                <a:spcPts val="300"/>
+              </a:spcAft>
+              <a:defRPr sz="1200" b="0">
+                <a:solidFill>
+                  <a:srgbClr val="4A5568"/>
+                </a:solidFill>
+                <a:latin typeface="Trebuchet MS"/>
+              </a:defRPr>
+            </a:pPr>
+            <a:r>
+              <a:t>May 5 (Lecture 11)</a:t>
+            </a:r>
+          </a:p>
+          <a:p>
+            <a:pPr algn="l">
+              <a:spcAft>
+                <a:spcPts val="300"/>
+              </a:spcAft>
+              <a:defRPr sz="1200" b="0">
+                <a:solidFill>
+                  <a:srgbClr val="4A5568"/>
+                </a:solidFill>
+                <a:latin typeface="Trebuchet MS"/>
+              </a:defRPr>
+            </a:pPr>
+            <a:r>
+              <a:t>Covers Lectures 1–10</a:t>
+            </a:r>
+          </a:p>
+          <a:p>
+            <a:pPr algn="l">
+              <a:spcAft>
+                <a:spcPts val="300"/>
+              </a:spcAft>
+              <a:defRPr sz="1200" b="0">
+                <a:solidFill>
+                  <a:srgbClr val="4A5568"/>
+                </a:solidFill>
+                <a:latin typeface="Trebuchet MS"/>
+              </a:defRPr>
+            </a:pPr>
+            <a:r>
+              <a:t>Closed-book, in-class</a:t>
             </a:r>
           </a:p>
         </p:txBody>
@@ -11587,8 +13337,8 @@
         </p:nvSpPr>
         <p:spPr>
           <a:xfrm>
-            <a:off x="502920" y="960120"/>
-            <a:ext cx="4754880" cy="3840480"/>
+            <a:off x="4800600" y="822960"/>
+            <a:ext cx="3931920" cy="2286000"/>
           </a:xfrm>
           <a:prstGeom prst="rect">
             <a:avLst/>
@@ -11605,6 +13355,38 @@
               <a:spcAft>
                 <a:spcPts val="300"/>
               </a:spcAft>
+              <a:defRPr sz="1600" b="1">
+                <a:solidFill>
+                  <a:srgbClr val="0E7C7B"/>
+                </a:solidFill>
+                <a:latin typeface="Trebuchet MS"/>
+              </a:defRPr>
+            </a:pPr>
+            <a:r>
+              <a:t>After Midterm: Part III</a:t>
+            </a:r>
+          </a:p>
+          <a:p>
+            <a:pPr algn="l">
+              <a:spcAft>
+                <a:spcPts val="300"/>
+              </a:spcAft>
+              <a:defRPr sz="1200" b="0">
+                <a:solidFill>
+                  <a:srgbClr val="4A5568"/>
+                </a:solidFill>
+                <a:latin typeface="Trebuchet MS"/>
+              </a:defRPr>
+            </a:pPr>
+            <a:r>
+              <a:t>Security of Agentic Systems</a:t>
+            </a:r>
+          </a:p>
+          <a:p>
+            <a:pPr algn="l">
+              <a:spcAft>
+                <a:spcPts val="300"/>
+              </a:spcAft>
               <a:defRPr sz="1100" b="0">
                 <a:solidFill>
                   <a:srgbClr val="4A5568"/>
@@ -11613,7 +13395,7 @@
               </a:defRPr>
             </a:pPr>
             <a:r>
-              <a:t>Can any 4-step trace write a file</a:t>
+              <a:t>•  Threat landscape</a:t>
             </a:r>
           </a:p>
           <a:p>
@@ -11629,148 +13411,39 @@
               </a:defRPr>
             </a:pPr>
             <a:r>
-              <a:t>without reading it first?</a:t>
-            </a:r>
-          </a:p>
-          <a:p>
-            <a:pPr algn="l">
-              <a:spcAft>
-                <a:spcPts val="300"/>
-              </a:spcAft>
-              <a:defRPr sz="400" b="0">
-                <a:solidFill>
-                  <a:srgbClr val="4A5568"/>
-                </a:solidFill>
-                <a:latin typeface="Trebuchet MS"/>
-              </a:defRPr>
-            </a:pPr>
-          </a:p>
-          <a:p>
-            <a:pPr algn="l">
-              <a:spcAft>
-                <a:spcPts val="300"/>
-              </a:spcAft>
-              <a:defRPr sz="1000" b="0">
-                <a:solidFill>
-                  <a:srgbClr val="1B2A4A"/>
-                </a:solidFill>
-                <a:latin typeface="Courier New"/>
-              </a:defRPr>
-            </a:pPr>
-            <a:r>
-              <a:t>from z3 import *</a:t>
-            </a:r>
-          </a:p>
-          <a:p>
-            <a:pPr algn="l">
-              <a:spcAft>
-                <a:spcPts val="300"/>
-              </a:spcAft>
-              <a:defRPr sz="1000" b="0">
-                <a:solidFill>
-                  <a:srgbClr val="1B2A4A"/>
-                </a:solidFill>
-                <a:latin typeface="Courier New"/>
-              </a:defRPr>
-            </a:pPr>
-            <a:r>
-              <a:t>K = 4; READ, WRITE, BASH = 0, 1, 2</a:t>
-            </a:r>
-          </a:p>
-          <a:p>
-            <a:pPr algn="l">
-              <a:spcAft>
-                <a:spcPts val="300"/>
-              </a:spcAft>
-              <a:defRPr sz="1000" b="0">
-                <a:solidFill>
-                  <a:srgbClr val="1B2A4A"/>
-                </a:solidFill>
-                <a:latin typeface="Courier New"/>
-              </a:defRPr>
-            </a:pPr>
-            <a:r>
-              <a:t>act  = [Int(f"a{i}") for i in range(K)]</a:t>
-            </a:r>
-          </a:p>
-          <a:p>
-            <a:pPr algn="l">
-              <a:spcAft>
-                <a:spcPts val="300"/>
-              </a:spcAft>
-              <a:defRPr sz="1000" b="0">
-                <a:solidFill>
-                  <a:srgbClr val="1B2A4A"/>
-                </a:solidFill>
-                <a:latin typeface="Courier New"/>
-              </a:defRPr>
-            </a:pPr>
-            <a:r>
-              <a:t>file = [Int(f"f{i}") for i in range(K)]</a:t>
-            </a:r>
-          </a:p>
-          <a:p>
-            <a:pPr algn="l">
-              <a:spcAft>
-                <a:spcPts val="300"/>
-              </a:spcAft>
-              <a:defRPr sz="1000" b="0">
-                <a:solidFill>
-                  <a:srgbClr val="1B2A4A"/>
-                </a:solidFill>
-                <a:latin typeface="Courier New"/>
-              </a:defRPr>
-            </a:pPr>
-            <a:r>
-              <a:t>s = Solver()</a:t>
-            </a:r>
-          </a:p>
-          <a:p>
-            <a:pPr algn="l">
-              <a:spcAft>
-                <a:spcPts val="300"/>
-              </a:spcAft>
-              <a:defRPr sz="1000" b="0">
-                <a:solidFill>
-                  <a:srgbClr val="1B2A4A"/>
-                </a:solidFill>
-                <a:latin typeface="Courier New"/>
-              </a:defRPr>
-            </a:pPr>
-            <a:r>
-              <a:t>for i in range(K):</a:t>
-            </a:r>
-          </a:p>
-          <a:p>
-            <a:pPr algn="l">
-              <a:spcAft>
-                <a:spcPts val="300"/>
-              </a:spcAft>
-              <a:defRPr sz="1000" b="0">
-                <a:solidFill>
-                  <a:srgbClr val="1B2A4A"/>
-                </a:solidFill>
-                <a:latin typeface="Courier New"/>
-              </a:defRPr>
-            </a:pPr>
-            <a:r>
-              <a:t>  s.add(And(act[i]&gt;=0, act[i]&lt;=2))</a:t>
-            </a:r>
-          </a:p>
-          <a:p>
-            <a:pPr algn="l">
-              <a:spcAft>
-                <a:spcPts val="300"/>
-              </a:spcAft>
-              <a:defRPr sz="1000" b="0">
-                <a:solidFill>
-                  <a:srgbClr val="1B2A4A"/>
-                </a:solidFill>
-                <a:latin typeface="Courier New"/>
-              </a:defRPr>
-            </a:pPr>
-            <a:r>
-              <a:t>  s.add(And(file[i]&gt;=0, file[i]&lt;=2))</a:t>
+              <a:t>•  Skill supply-chain attacks</a:t>
+            </a:r>
+          </a:p>
+          <a:p>
+            <a:pPr algn="l">
+              <a:spcAft>
+                <a:spcPts val="300"/>
+              </a:spcAft>
+              <a:defRPr sz="1100" b="0">
+                <a:solidFill>
+                  <a:srgbClr val="4A5568"/>
+                </a:solidFill>
+                <a:latin typeface="Trebuchet MS"/>
+              </a:defRPr>
+            </a:pPr>
+            <a:r>
+              <a:t>•  Permission escalation</a:t>
+            </a:r>
+          </a:p>
+          <a:p>
+            <a:pPr algn="l">
+              <a:spcAft>
+                <a:spcPts val="300"/>
+              </a:spcAft>
+              <a:defRPr sz="1100" b="0">
+                <a:solidFill>
+                  <a:srgbClr val="4A5568"/>
+                </a:solidFill>
+                <a:latin typeface="Trebuchet MS"/>
+              </a:defRPr>
+            </a:pPr>
+            <a:r>
+              <a:t>•  Fuzzing agent skills</a:t>
             </a:r>
           </a:p>
         </p:txBody>
@@ -11783,8 +13456,8 @@
         </p:nvSpPr>
         <p:spPr>
           <a:xfrm>
-            <a:off x="5029200" y="960120"/>
-            <a:ext cx="3840480" cy="3840480"/>
+            <a:off x="502920" y="3200400"/>
+            <a:ext cx="8229600" cy="1371600"/>
           </a:xfrm>
           <a:prstGeom prst="rect">
             <a:avLst/>
@@ -11801,329 +13474,61 @@
               <a:spcAft>
                 <a:spcPts val="300"/>
               </a:spcAft>
-              <a:defRPr sz="1000" b="0">
-                <a:solidFill>
-                  <a:srgbClr val="8A95A7"/>
-                </a:solidFill>
-                <a:latin typeface="Courier New"/>
-              </a:defRPr>
-            </a:pPr>
-            <a:r>
-              <a:t># Find: write with no prior read</a:t>
-            </a:r>
-          </a:p>
-          <a:p>
-            <a:pPr algn="l">
-              <a:spcAft>
-                <a:spcPts val="300"/>
-              </a:spcAft>
-              <a:defRPr sz="1000" b="0">
-                <a:solidFill>
-                  <a:srgbClr val="1B2A4A"/>
-                </a:solidFill>
-                <a:latin typeface="Courier New"/>
-              </a:defRPr>
-            </a:pPr>
-            <a:r>
-              <a:t>bad = BoolVal(False)</a:t>
-            </a:r>
-          </a:p>
-          <a:p>
-            <a:pPr algn="l">
-              <a:spcAft>
-                <a:spcPts val="300"/>
-              </a:spcAft>
-              <a:defRPr sz="1000" b="0">
-                <a:solidFill>
-                  <a:srgbClr val="1B2A4A"/>
-                </a:solidFill>
-                <a:latin typeface="Courier New"/>
-              </a:defRPr>
-            </a:pPr>
-            <a:r>
-              <a:t>for j in range(K):</a:t>
-            </a:r>
-          </a:p>
-          <a:p>
-            <a:pPr algn="l">
-              <a:spcAft>
-                <a:spcPts val="300"/>
-              </a:spcAft>
-              <a:defRPr sz="1000" b="0">
-                <a:solidFill>
-                  <a:srgbClr val="1B2A4A"/>
-                </a:solidFill>
-                <a:latin typeface="Courier New"/>
-              </a:defRPr>
-            </a:pPr>
-            <a:r>
-              <a:t>  prior = Or(*[</a:t>
-            </a:r>
-          </a:p>
-          <a:p>
-            <a:pPr algn="l">
-              <a:spcAft>
-                <a:spcPts val="300"/>
-              </a:spcAft>
-              <a:defRPr sz="1000" b="0">
-                <a:solidFill>
-                  <a:srgbClr val="1B2A4A"/>
-                </a:solidFill>
-                <a:latin typeface="Courier New"/>
-              </a:defRPr>
-            </a:pPr>
-            <a:r>
-              <a:t>    And(act[i]==READ,</a:t>
-            </a:r>
-          </a:p>
-          <a:p>
-            <a:pPr algn="l">
-              <a:spcAft>
-                <a:spcPts val="300"/>
-              </a:spcAft>
-              <a:defRPr sz="1000" b="0">
-                <a:solidFill>
-                  <a:srgbClr val="1B2A4A"/>
-                </a:solidFill>
-                <a:latin typeface="Courier New"/>
-              </a:defRPr>
-            </a:pPr>
-            <a:r>
-              <a:t>        file[i]==file[j])</a:t>
-            </a:r>
-          </a:p>
-          <a:p>
-            <a:pPr algn="l">
-              <a:spcAft>
-                <a:spcPts val="300"/>
-              </a:spcAft>
-              <a:defRPr sz="1000" b="0">
-                <a:solidFill>
-                  <a:srgbClr val="1B2A4A"/>
-                </a:solidFill>
-                <a:latin typeface="Courier New"/>
-              </a:defRPr>
-            </a:pPr>
-            <a:r>
-              <a:t>    for i in range(j)</a:t>
-            </a:r>
-          </a:p>
-          <a:p>
-            <a:pPr algn="l">
-              <a:spcAft>
-                <a:spcPts val="300"/>
-              </a:spcAft>
-              <a:defRPr sz="1000" b="0">
-                <a:solidFill>
-                  <a:srgbClr val="1B2A4A"/>
-                </a:solidFill>
-                <a:latin typeface="Courier New"/>
-              </a:defRPr>
-            </a:pPr>
-            <a:r>
-              <a:t>  ]) if j &gt; 0 else False</a:t>
-            </a:r>
-          </a:p>
-          <a:p>
-            <a:pPr algn="l">
-              <a:spcAft>
-                <a:spcPts val="300"/>
-              </a:spcAft>
-              <a:defRPr sz="1000" b="0">
-                <a:solidFill>
-                  <a:srgbClr val="1B2A4A"/>
-                </a:solidFill>
-                <a:latin typeface="Courier New"/>
-              </a:defRPr>
-            </a:pPr>
-            <a:r>
-              <a:t>  bad = Or(bad,</a:t>
-            </a:r>
-          </a:p>
-          <a:p>
-            <a:pPr algn="l">
-              <a:spcAft>
-                <a:spcPts val="300"/>
-              </a:spcAft>
-              <a:defRPr sz="1000" b="0">
-                <a:solidFill>
-                  <a:srgbClr val="1B2A4A"/>
-                </a:solidFill>
-                <a:latin typeface="Courier New"/>
-              </a:defRPr>
-            </a:pPr>
-            <a:r>
-              <a:t>    And(act[j]==WRITE,</a:t>
-            </a:r>
-          </a:p>
-          <a:p>
-            <a:pPr algn="l">
-              <a:spcAft>
-                <a:spcPts val="300"/>
-              </a:spcAft>
-              <a:defRPr sz="1000" b="0">
-                <a:solidFill>
-                  <a:srgbClr val="1B2A4A"/>
-                </a:solidFill>
-                <a:latin typeface="Courier New"/>
-              </a:defRPr>
-            </a:pPr>
-            <a:r>
-              <a:t>        Not(prior)))</a:t>
-            </a:r>
-          </a:p>
-          <a:p>
-            <a:pPr algn="l">
-              <a:spcAft>
-                <a:spcPts val="300"/>
-              </a:spcAft>
-              <a:defRPr sz="1000" b="0">
-                <a:solidFill>
-                  <a:srgbClr val="C0392B"/>
-                </a:solidFill>
-                <a:latin typeface="Courier New"/>
-              </a:defRPr>
-            </a:pPr>
-            <a:r>
-              <a:t>s.add(bad)</a:t>
-            </a:r>
-          </a:p>
-          <a:p>
-            <a:pPr algn="l">
-              <a:spcAft>
-                <a:spcPts val="300"/>
-              </a:spcAft>
-              <a:defRPr sz="200" b="0">
-                <a:solidFill>
-                  <a:srgbClr val="4A5568"/>
-                </a:solidFill>
-                <a:latin typeface="Trebuchet MS"/>
-              </a:defRPr>
-            </a:pPr>
-          </a:p>
-          <a:p>
-            <a:pPr algn="l">
-              <a:spcAft>
-                <a:spcPts val="300"/>
-              </a:spcAft>
-              <a:defRPr sz="1000" b="1">
+              <a:defRPr sz="1200" b="1">
+                <a:solidFill>
+                  <a:srgbClr val="E67E22"/>
+                </a:solidFill>
+                <a:latin typeface="Trebuchet MS"/>
+              </a:defRPr>
+            </a:pPr>
+            <a:r>
+              <a:t>HW2 Due: May 5 (same day as midterm)</a:t>
+            </a:r>
+          </a:p>
+          <a:p>
+            <a:pPr algn="l">
+              <a:spcAft>
+                <a:spcPts val="300"/>
+              </a:spcAft>
+              <a:defRPr sz="1100" b="0">
+                <a:solidFill>
+                  <a:srgbClr val="4A5568"/>
+                </a:solidFill>
+                <a:latin typeface="Trebuchet MS"/>
+              </a:defRPr>
+            </a:pPr>
+            <a:r>
+              <a:t>Implement a VCG for IMP with Z3 + SMT encoding of agent permission policies.</a:t>
+            </a:r>
+          </a:p>
+          <a:p>
+            <a:pPr algn="l">
+              <a:spcAft>
+                <a:spcPts val="300"/>
+              </a:spcAft>
+              <a:defRPr sz="600" b="0">
+                <a:solidFill>
+                  <a:srgbClr val="4A5568"/>
+                </a:solidFill>
+                <a:latin typeface="Trebuchet MS"/>
+              </a:defRPr>
+            </a:pPr>
+            <a:endParaRPr/>
+          </a:p>
+          <a:p>
+            <a:pPr algn="l">
+              <a:spcAft>
+                <a:spcPts val="300"/>
+              </a:spcAft>
+              <a:defRPr sz="1100" b="1">
                 <a:solidFill>
                   <a:srgbClr val="0E7C7B"/>
                 </a:solidFill>
-                <a:latin typeface="Courier New"/>
-              </a:defRPr>
-            </a:pPr>
-            <a:r>
-              <a:t>print(s.check())  # sat!</a:t>
-            </a:r>
-          </a:p>
-          <a:p>
-            <a:pPr algn="l">
-              <a:spcAft>
-                <a:spcPts val="300"/>
-              </a:spcAft>
-              <a:defRPr sz="1000" b="0">
-                <a:solidFill>
-                  <a:srgbClr val="1B2A4A"/>
-                </a:solidFill>
-                <a:latin typeface="Courier New"/>
-              </a:defRPr>
-            </a:pPr>
-            <a:r>
-              <a:t>m = s.model()</a:t>
-            </a:r>
-          </a:p>
-          <a:p>
-            <a:pPr algn="l">
-              <a:spcAft>
-                <a:spcPts val="300"/>
-              </a:spcAft>
-              <a:defRPr sz="1000" b="1">
-                <a:solidFill>
-                  <a:srgbClr val="E67E22"/>
-                </a:solidFill>
-                <a:latin typeface="Courier New"/>
-              </a:defRPr>
-            </a:pPr>
-            <a:r>
-              <a:t># a0=WRITE, f0=1</a:t>
-            </a:r>
-          </a:p>
-          <a:p>
-            <a:pPr algn="l">
-              <a:spcAft>
-                <a:spcPts val="300"/>
-              </a:spcAft>
-              <a:defRPr sz="1000" b="1">
-                <a:solidFill>
-                  <a:srgbClr val="E67E22"/>
-                </a:solidFill>
-                <a:latin typeface="Courier New"/>
-              </a:defRPr>
-            </a:pPr>
-            <a:r>
-              <a:t># → writes file 1 at step 0</a:t>
-            </a:r>
-          </a:p>
-          <a:p>
-            <a:pPr algn="l">
-              <a:spcAft>
-                <a:spcPts val="300"/>
-              </a:spcAft>
-              <a:defRPr sz="1000" b="1">
-                <a:solidFill>
-                  <a:srgbClr val="E67E22"/>
-                </a:solidFill>
-                <a:latin typeface="Courier New"/>
-              </a:defRPr>
-            </a:pPr>
-            <a:r>
-              <a:t>#   without any prior read!</a:t>
-            </a:r>
-          </a:p>
-          <a:p>
-            <a:pPr algn="l">
-              <a:spcAft>
-                <a:spcPts val="300"/>
-              </a:spcAft>
-              <a:defRPr sz="400" b="0">
-                <a:solidFill>
-                  <a:srgbClr val="4A5568"/>
-                </a:solidFill>
-                <a:latin typeface="Trebuchet MS"/>
-              </a:defRPr>
-            </a:pPr>
-          </a:p>
-          <a:p>
-            <a:pPr algn="l">
-              <a:spcAft>
-                <a:spcPts val="300"/>
-              </a:spcAft>
-              <a:defRPr sz="1000" b="1">
-                <a:solidFill>
-                  <a:srgbClr val="0E7C7B"/>
-                </a:solidFill>
-                <a:latin typeface="Trebuchet MS"/>
-              </a:defRPr>
-            </a:pPr>
-            <a:r>
-              <a:t>Fix: add monitor that rejects</a:t>
-            </a:r>
-          </a:p>
-          <a:p>
-            <a:pPr algn="l">
-              <a:spcAft>
-                <a:spcPts val="300"/>
-              </a:spcAft>
-              <a:defRPr sz="1000" b="1">
-                <a:solidFill>
-                  <a:srgbClr val="0E7C7B"/>
-                </a:solidFill>
-                <a:latin typeface="Trebuchet MS"/>
-              </a:defRPr>
-            </a:pPr>
-            <a:r>
-              <a:t>writes to unread files.</a:t>
+                <a:latin typeface="Trebuchet MS"/>
+              </a:defRPr>
+            </a:pPr>
+            <a:r>
+              <a:t>Study tip:  Review the exercises from each lecture.  If you can do those, you’re ready.</a:t>
             </a:r>
           </a:p>
         </p:txBody>
@@ -12137,7 +13542,7 @@
 </file>
 
 <file path=ppt/slides/slide3.xml><?xml version="1.0" encoding="utf-8"?>
-<p:sld xmlns:a="http://schemas.openxmlformats.org/drawingml/2006/main" xmlns:p="http://schemas.openxmlformats.org/presentationml/2006/main" xmlns:r="http://schemas.openxmlformats.org/officeDocument/2006/relationships">
+<p:sld xmlns:a="http://schemas.openxmlformats.org/drawingml/2006/main" xmlns:r="http://schemas.openxmlformats.org/officeDocument/2006/relationships" xmlns:p="http://schemas.openxmlformats.org/presentationml/2006/main">
   <p:cSld>
     <p:spTree>
       <p:nvGrpSpPr>
@@ -12145,7 +13550,14 @@
         <p:cNvGrpSpPr/>
         <p:nvPr/>
       </p:nvGrpSpPr>
-      <p:grpSpPr/>
+      <p:grpSpPr>
+        <a:xfrm>
+          <a:off x="0" y="0"/>
+          <a:ext cx="0" cy="0"/>
+          <a:chOff x="0" y="0"/>
+          <a:chExt cx="0" cy="0"/>
+        </a:xfrm>
+      </p:grpSpPr>
       <p:sp>
         <p:nvSpPr>
           <p:cNvPr id="2" name="TextBox 1"/>
@@ -12803,7 +14215,7 @@
 </file>
 
 <file path=ppt/slides/slide4.xml><?xml version="1.0" encoding="utf-8"?>
-<p:sld xmlns:a="http://schemas.openxmlformats.org/drawingml/2006/main" xmlns:p="http://schemas.openxmlformats.org/presentationml/2006/main" xmlns:r="http://schemas.openxmlformats.org/officeDocument/2006/relationships">
+<p:sld xmlns:a="http://schemas.openxmlformats.org/drawingml/2006/main" xmlns:r="http://schemas.openxmlformats.org/officeDocument/2006/relationships" xmlns:p="http://schemas.openxmlformats.org/presentationml/2006/main">
   <p:cSld>
     <p:spTree>
       <p:nvGrpSpPr>
@@ -12811,7 +14223,14 @@
         <p:cNvGrpSpPr/>
         <p:nvPr/>
       </p:nvGrpSpPr>
-      <p:grpSpPr/>
+      <p:grpSpPr>
+        <a:xfrm>
+          <a:off x="0" y="0"/>
+          <a:ext cx="0" cy="0"/>
+          <a:chOff x="0" y="0"/>
+          <a:chExt cx="0" cy="0"/>
+        </a:xfrm>
+      </p:grpSpPr>
       <p:sp>
         <p:nvSpPr>
           <p:cNvPr id="2" name="TextBox 1"/>
@@ -13005,6 +14424,7 @@
                 <a:latin typeface="Trebuchet MS"/>
               </a:defRPr>
             </a:pPr>
+            <a:endParaRPr/>
           </a:p>
           <a:p>
             <a:pPr algn="ctr">
@@ -13034,6 +14454,7 @@
                 <a:latin typeface="Trebuchet MS"/>
               </a:defRPr>
             </a:pPr>
+            <a:endParaRPr/>
           </a:p>
           <a:p>
             <a:pPr algn="l">
@@ -13063,6 +14484,7 @@
                 <a:latin typeface="Trebuchet MS"/>
               </a:defRPr>
             </a:pPr>
+            <a:endParaRPr/>
           </a:p>
           <a:p>
             <a:pPr algn="l">
@@ -13140,6 +14562,7 @@
                 <a:latin typeface="Trebuchet MS"/>
               </a:defRPr>
             </a:pPr>
+            <a:endParaRPr/>
           </a:p>
           <a:p>
             <a:pPr algn="l">
@@ -13184,7 +14607,7 @@
 </file>
 
 <file path=ppt/slides/slide5.xml><?xml version="1.0" encoding="utf-8"?>
-<p:sld xmlns:a="http://schemas.openxmlformats.org/drawingml/2006/main" xmlns:p="http://schemas.openxmlformats.org/presentationml/2006/main" xmlns:r="http://schemas.openxmlformats.org/officeDocument/2006/relationships">
+<p:sld xmlns:a="http://schemas.openxmlformats.org/drawingml/2006/main" xmlns:r="http://schemas.openxmlformats.org/officeDocument/2006/relationships" xmlns:p="http://schemas.openxmlformats.org/presentationml/2006/main">
   <p:cSld>
     <p:spTree>
       <p:nvGrpSpPr>
@@ -13192,7 +14615,14 @@
         <p:cNvGrpSpPr/>
         <p:nvPr/>
       </p:nvGrpSpPr>
-      <p:grpSpPr/>
+      <p:grpSpPr>
+        <a:xfrm>
+          <a:off x="0" y="0"/>
+          <a:ext cx="0" cy="0"/>
+          <a:chOff x="0" y="0"/>
+          <a:chExt cx="0" cy="0"/>
+        </a:xfrm>
+      </p:grpSpPr>
       <p:sp>
         <p:nvSpPr>
           <p:cNvPr id="2" name="TextBox 1"/>
@@ -13386,6 +14816,7 @@
                 <a:latin typeface="Trebuchet MS"/>
               </a:defRPr>
             </a:pPr>
+            <a:endParaRPr/>
           </a:p>
           <a:p>
             <a:pPr algn="l">
@@ -13495,6 +14926,7 @@
                 <a:latin typeface="Trebuchet MS"/>
               </a:defRPr>
             </a:pPr>
+            <a:endParaRPr/>
           </a:p>
           <a:p>
             <a:pPr algn="l">
@@ -13571,7 +15003,7 @@
 </file>
 
 <file path=ppt/slides/slide6.xml><?xml version="1.0" encoding="utf-8"?>
-<p:sld xmlns:a="http://schemas.openxmlformats.org/drawingml/2006/main" xmlns:p="http://schemas.openxmlformats.org/presentationml/2006/main" xmlns:r="http://schemas.openxmlformats.org/officeDocument/2006/relationships">
+<p:sld xmlns:a="http://schemas.openxmlformats.org/drawingml/2006/main" xmlns:r="http://schemas.openxmlformats.org/officeDocument/2006/relationships" xmlns:p="http://schemas.openxmlformats.org/presentationml/2006/main">
   <p:cSld>
     <p:spTree>
       <p:nvGrpSpPr>
@@ -13579,7 +15011,14 @@
         <p:cNvGrpSpPr/>
         <p:nvPr/>
       </p:nvGrpSpPr>
-      <p:grpSpPr/>
+      <p:grpSpPr>
+        <a:xfrm>
+          <a:off x="0" y="0"/>
+          <a:ext cx="0" cy="0"/>
+          <a:chOff x="0" y="0"/>
+          <a:chExt cx="0" cy="0"/>
+        </a:xfrm>
+      </p:grpSpPr>
       <p:sp>
         <p:nvSpPr>
           <p:cNvPr id="2" name="TextBox 1"/>
@@ -14026,7 +15465,7 @@
 </file>
 
 <file path=ppt/slides/slide7.xml><?xml version="1.0" encoding="utf-8"?>
-<p:sld xmlns:a="http://schemas.openxmlformats.org/drawingml/2006/main" xmlns:p="http://schemas.openxmlformats.org/presentationml/2006/main" xmlns:r="http://schemas.openxmlformats.org/officeDocument/2006/relationships">
+<p:sld xmlns:a="http://schemas.openxmlformats.org/drawingml/2006/main" xmlns:r="http://schemas.openxmlformats.org/officeDocument/2006/relationships" xmlns:p="http://schemas.openxmlformats.org/presentationml/2006/main">
   <p:cSld>
     <p:spTree>
       <p:nvGrpSpPr>
@@ -14034,7 +15473,14 @@
         <p:cNvGrpSpPr/>
         <p:nvPr/>
       </p:nvGrpSpPr>
-      <p:grpSpPr/>
+      <p:grpSpPr>
+        <a:xfrm>
+          <a:off x="0" y="0"/>
+          <a:ext cx="0" cy="0"/>
+          <a:chOff x="0" y="0"/>
+          <a:chExt cx="0" cy="0"/>
+        </a:xfrm>
+      </p:grpSpPr>
       <p:sp>
         <p:nvSpPr>
           <p:cNvPr id="2" name="TextBox 1"/>
@@ -14228,6 +15674,7 @@
                 <a:latin typeface="Trebuchet MS"/>
               </a:defRPr>
             </a:pPr>
+            <a:endParaRPr/>
           </a:p>
           <a:p>
             <a:pPr algn="l">
@@ -14305,6 +15752,7 @@
                 <a:latin typeface="Trebuchet MS"/>
               </a:defRPr>
             </a:pPr>
+            <a:endParaRPr/>
           </a:p>
           <a:p>
             <a:pPr algn="ctr">
@@ -14334,6 +15782,7 @@
                 <a:latin typeface="Trebuchet MS"/>
               </a:defRPr>
             </a:pPr>
+            <a:endParaRPr/>
           </a:p>
           <a:p>
             <a:pPr algn="l">
@@ -14379,6 +15828,7 @@
                 <a:latin typeface="Trebuchet MS"/>
               </a:defRPr>
             </a:pPr>
+            <a:endParaRPr/>
           </a:p>
           <a:p>
             <a:pPr algn="l">
@@ -14407,7 +15857,7 @@
 </file>
 
 <file path=ppt/slides/slide8.xml><?xml version="1.0" encoding="utf-8"?>
-<p:sld xmlns:a="http://schemas.openxmlformats.org/drawingml/2006/main" xmlns:p="http://schemas.openxmlformats.org/presentationml/2006/main" xmlns:r="http://schemas.openxmlformats.org/officeDocument/2006/relationships">
+<p:sld xmlns:a="http://schemas.openxmlformats.org/drawingml/2006/main" xmlns:r="http://schemas.openxmlformats.org/officeDocument/2006/relationships" xmlns:p="http://schemas.openxmlformats.org/presentationml/2006/main">
   <p:cSld>
     <p:spTree>
       <p:nvGrpSpPr>
@@ -14415,7 +15865,14 @@
         <p:cNvGrpSpPr/>
         <p:nvPr/>
       </p:nvGrpSpPr>
-      <p:grpSpPr/>
+      <p:grpSpPr>
+        <a:xfrm>
+          <a:off x="0" y="0"/>
+          <a:ext cx="0" cy="0"/>
+          <a:chOff x="0" y="0"/>
+          <a:chExt cx="0" cy="0"/>
+        </a:xfrm>
+      </p:grpSpPr>
       <p:sp>
         <p:nvSpPr>
           <p:cNvPr id="2" name="TextBox 1"/>
@@ -14609,6 +16066,7 @@
                 <a:latin typeface="Trebuchet MS"/>
               </a:defRPr>
             </a:pPr>
+            <a:endParaRPr/>
           </a:p>
           <a:p>
             <a:pPr algn="l">
@@ -14702,6 +16160,7 @@
                 <a:latin typeface="Trebuchet MS"/>
               </a:defRPr>
             </a:pPr>
+            <a:endParaRPr/>
           </a:p>
           <a:p>
             <a:pPr algn="ctr">
@@ -14731,6 +16190,7 @@
                 <a:latin typeface="Trebuchet MS"/>
               </a:defRPr>
             </a:pPr>
+            <a:endParaRPr/>
           </a:p>
           <a:p>
             <a:pPr algn="l">
@@ -14791,7 +16251,7 @@
 </file>
 
 <file path=ppt/slides/slide9.xml><?xml version="1.0" encoding="utf-8"?>
-<p:sld xmlns:a="http://schemas.openxmlformats.org/drawingml/2006/main" xmlns:p="http://schemas.openxmlformats.org/presentationml/2006/main" xmlns:r="http://schemas.openxmlformats.org/officeDocument/2006/relationships">
+<p:sld xmlns:a="http://schemas.openxmlformats.org/drawingml/2006/main" xmlns:r="http://schemas.openxmlformats.org/officeDocument/2006/relationships" xmlns:p="http://schemas.openxmlformats.org/presentationml/2006/main">
   <p:cSld>
     <p:spTree>
       <p:nvGrpSpPr>
@@ -14799,7 +16259,14 @@
         <p:cNvGrpSpPr/>
         <p:nvPr/>
       </p:nvGrpSpPr>
-      <p:grpSpPr/>
+      <p:grpSpPr>
+        <a:xfrm>
+          <a:off x="0" y="0"/>
+          <a:ext cx="0" cy="0"/>
+          <a:chOff x="0" y="0"/>
+          <a:chExt cx="0" cy="0"/>
+        </a:xfrm>
+      </p:grpSpPr>
       <p:sp>
         <p:nvSpPr>
           <p:cNvPr id="2" name="TextBox 1"/>
@@ -14993,6 +16460,7 @@
                 <a:latin typeface="Trebuchet MS"/>
               </a:defRPr>
             </a:pPr>
+            <a:endParaRPr/>
           </a:p>
           <a:p>
             <a:pPr algn="l">
@@ -15150,6 +16618,7 @@
                 <a:latin typeface="Trebuchet MS"/>
               </a:defRPr>
             </a:pPr>
+            <a:endParaRPr/>
           </a:p>
           <a:p>
             <a:pPr algn="ctr">
@@ -15495,4 +16964,26 @@
   </a:objectDefaults>
   <a:extraClrSchemeLst/>
 </a:theme>
+</file>
+
+<file path=ppt/webextensions/taskpanes.xml><?xml version="1.0" encoding="utf-8"?>
+<wetp:taskpanes xmlns:wetp="http://schemas.microsoft.com/office/webextensions/taskpanes/2010/11">
+  <wetp:taskpane dockstate="right" visibility="0" width="350" row="0">
+    <wetp:webextensionref xmlns:r="http://schemas.openxmlformats.org/officeDocument/2006/relationships" r:id="rId1"/>
+  </wetp:taskpane>
+</wetp:taskpanes>
+</file>
+
+<file path=ppt/webextensions/webextension1.xml><?xml version="1.0" encoding="utf-8"?>
+<we:webextension xmlns:we="http://schemas.microsoft.com/office/webextensions/webextension/2010/11" id="{1F4575AC-1893-3C4C-BE32-EE68A28AC1B1}">
+  <we:reference id="wa200010001" version="1.0.0.1" store="en-US" storeType="OMEX"/>
+  <we:alternateReferences>
+    <we:reference id="WA200010001" version="1.0.0.1" store="" storeType="OMEX"/>
+  </we:alternateReferences>
+  <we:properties>
+    <we:property name="claude.fileId" value="&quot;31e062cb-51e1-47c9-ba8c-748618f74ea0&quot;"/>
+  </we:properties>
+  <we:bindings/>
+  <we:snapshot xmlns:r="http://schemas.openxmlformats.org/officeDocument/2006/relationships"/>
+</we:webextension>
 </file>